--- a/Bases de Datos II/Clases/Clase 7 - Indices y particionamiento/Presentacion.pptx
+++ b/Bases de Datos II/Clases/Clase 7 - Indices y particionamiento/Presentacion.pptx
@@ -20,8 +20,6 @@
     <p:sldId id="268" r:id="rId19"/>
     <p:sldId id="269" r:id="rId20"/>
     <p:sldId id="270" r:id="rId21"/>
-    <p:sldId id="271" r:id="rId22"/>
-    <p:sldId id="272" r:id="rId23"/>
   </p:sldIdLst>
   <p:sldSz cx="12191695" cy="6858000" type="screen4x3"/>
   <p:notesSz cx="6858000" cy="9144000"/>
@@ -6112,1017 +6110,6 @@
         <p:spPr>
           <a:xfrm>
             <a:off x="0" y="0"/>
-            <a:ext cx="12191695" cy="1170432"/>
-          </a:xfrm>
-          <a:prstGeom prst="rect">
-            <a:avLst/>
-          </a:prstGeom>
-          <a:solidFill>
-            <a:srgbClr val="095292"/>
-          </a:solidFill>
-          <a:ln>
-            <a:noFill/>
-          </a:ln>
-        </p:spPr>
-        <p:style>
-          <a:lnRef idx="1">
-            <a:schemeClr val="accent1"/>
-          </a:lnRef>
-          <a:fillRef idx="3">
-            <a:schemeClr val="accent1"/>
-          </a:fillRef>
-          <a:effectRef idx="2">
-            <a:schemeClr val="accent1"/>
-          </a:effectRef>
-          <a:fontRef idx="minor">
-            <a:schemeClr val="lt1"/>
-          </a:fontRef>
-        </p:style>
-        <p:txBody>
-          <a:bodyPr rtlCol="0" anchor="ctr"/>
-          <a:lstStyle/>
-          <a:p>
-            <a:pPr algn="ctr"/>
-          </a:p>
-        </p:txBody>
-      </p:sp>
-      <p:sp>
-        <p:nvSpPr>
-          <p:cNvPr id="3" name="Rectangle 2"/>
-          <p:cNvSpPr/>
-          <p:nvPr/>
-        </p:nvSpPr>
-        <p:spPr>
-          <a:xfrm>
-            <a:off x="0" y="1170432"/>
-            <a:ext cx="12191695" cy="41148"/>
-          </a:xfrm>
-          <a:prstGeom prst="rect">
-            <a:avLst/>
-          </a:prstGeom>
-          <a:solidFill>
-            <a:srgbClr val="FFD000"/>
-          </a:solidFill>
-          <a:ln>
-            <a:noFill/>
-          </a:ln>
-        </p:spPr>
-        <p:style>
-          <a:lnRef idx="1">
-            <a:schemeClr val="accent1"/>
-          </a:lnRef>
-          <a:fillRef idx="3">
-            <a:schemeClr val="accent1"/>
-          </a:fillRef>
-          <a:effectRef idx="2">
-            <a:schemeClr val="accent1"/>
-          </a:effectRef>
-          <a:fontRef idx="minor">
-            <a:schemeClr val="lt1"/>
-          </a:fontRef>
-        </p:style>
-        <p:txBody>
-          <a:bodyPr rtlCol="0" anchor="ctr"/>
-          <a:lstStyle/>
-          <a:p>
-            <a:pPr algn="ctr"/>
-          </a:p>
-        </p:txBody>
-      </p:sp>
-      <p:sp>
-        <p:nvSpPr>
-          <p:cNvPr id="4" name="TextBox 3"/>
-          <p:cNvSpPr txBox="1"/>
-          <p:nvPr/>
-        </p:nvSpPr>
-        <p:spPr>
-          <a:xfrm>
-            <a:off x="457200" y="164592"/>
-            <a:ext cx="11277295" cy="384048"/>
-          </a:xfrm>
-          <a:prstGeom prst="rect">
-            <a:avLst/>
-          </a:prstGeom>
-          <a:noFill/>
-        </p:spPr>
-        <p:txBody>
-          <a:bodyPr wrap="square">
-            <a:spAutoFit/>
-          </a:bodyPr>
-          <a:lstStyle/>
-          <a:p>
-            <a:r>
-              <a:rPr sz="2600" b="1" i="0">
-                <a:solidFill>
-                  <a:srgbClr val="FFFFFF"/>
-                </a:solidFill>
-                <a:latin typeface="Calibri"/>
-              </a:rPr>
-              <a:t>Quiz rapido (cierre)</a:t>
-            </a:r>
-          </a:p>
-        </p:txBody>
-      </p:sp>
-      <p:sp>
-        <p:nvSpPr>
-          <p:cNvPr id="5" name="TextBox 4"/>
-          <p:cNvSpPr txBox="1"/>
-          <p:nvPr/>
-        </p:nvSpPr>
-        <p:spPr>
-          <a:xfrm>
-            <a:off x="457200" y="566928"/>
-            <a:ext cx="11277295" cy="411480"/>
-          </a:xfrm>
-          <a:prstGeom prst="rect">
-            <a:avLst/>
-          </a:prstGeom>
-          <a:noFill/>
-        </p:spPr>
-        <p:txBody>
-          <a:bodyPr wrap="square">
-            <a:spAutoFit/>
-          </a:bodyPr>
-          <a:lstStyle/>
-          <a:p>
-            <a:r>
-              <a:rPr sz="1400" b="0" i="0">
-                <a:solidFill>
-                  <a:srgbClr val="B8D8EE"/>
-                </a:solidFill>
-                <a:latin typeface="Calibri"/>
-              </a:rPr>
-              <a:t>Individual · 8–10 min</a:t>
-            </a:r>
-          </a:p>
-        </p:txBody>
-      </p:sp>
-      <p:sp>
-        <p:nvSpPr>
-          <p:cNvPr id="6" name="TextBox 5"/>
-          <p:cNvSpPr txBox="1"/>
-          <p:nvPr/>
-        </p:nvSpPr>
-        <p:spPr>
-          <a:xfrm>
-            <a:off x="457200" y="1380744"/>
-            <a:ext cx="11277295" cy="5020056"/>
-          </a:xfrm>
-          <a:prstGeom prst="rect">
-            <a:avLst/>
-          </a:prstGeom>
-          <a:noFill/>
-        </p:spPr>
-        <p:txBody>
-          <a:bodyPr wrap="square">
-            <a:spAutoFit/>
-          </a:bodyPr>
-          <a:lstStyle/>
-          <a:p>
-            <a:pPr>
-              <a:spcAft>
-                <a:spcPts val="800"/>
-              </a:spcAft>
-            </a:pPr>
-            <a:r>
-              <a:rPr sz="1200" b="1" i="0">
-                <a:solidFill>
-                  <a:srgbClr val="333333"/>
-                </a:solidFill>
-                <a:latin typeface="Calibri"/>
-              </a:rPr>
-              <a:t>1.</a:t>
-            </a:r>
-            <a:r>
-              <a:rPr sz="1200" b="0" i="0">
-                <a:solidFill>
-                  <a:srgbClr val="333333"/>
-                </a:solidFill>
-                <a:latin typeface="Calibri"/>
-              </a:rPr>
-              <a:t> ¿Cuándo NO conviene crear un índice?</a:t>
-            </a:r>
-          </a:p>
-          <a:p>
-            <a:pPr>
-              <a:spcAft>
-                <a:spcPts val="800"/>
-              </a:spcAft>
-            </a:pPr>
-            <a:r>
-              <a:rPr sz="1200" b="0" i="0">
-                <a:solidFill>
-                  <a:srgbClr val="333333"/>
-                </a:solidFill>
-                <a:latin typeface="Calibri"/>
-              </a:rPr>
-              <a:t>–   ('A) Filtros frecuentes selectivos', 1)</a:t>
-            </a:r>
-          </a:p>
-          <a:p>
-            <a:pPr>
-              <a:spcAft>
-                <a:spcPts val="800"/>
-              </a:spcAft>
-            </a:pPr>
-            <a:r>
-              <a:rPr sz="1200" b="0" i="0">
-                <a:solidFill>
-                  <a:srgbClr val="333333"/>
-                </a:solidFill>
-                <a:latin typeface="Calibri"/>
-              </a:rPr>
-              <a:t>–   ('B) Baja selectividad o escritura intensa sin lectura asociada', 1)</a:t>
-            </a:r>
-          </a:p>
-          <a:p>
-            <a:pPr>
-              <a:spcAft>
-                <a:spcPts val="800"/>
-              </a:spcAft>
-            </a:pPr>
-            <a:r>
-              <a:rPr sz="1200" b="0" i="0">
-                <a:solidFill>
-                  <a:srgbClr val="333333"/>
-                </a:solidFill>
-                <a:latin typeface="Calibri"/>
-              </a:rPr>
-              <a:t>–   ('C) Agenda por fecha_hora', 1)</a:t>
-            </a:r>
-          </a:p>
-          <a:p>
-            <a:pPr>
-              <a:spcAft>
-                <a:spcPts val="800"/>
-              </a:spcAft>
-            </a:pPr>
-            <a:r>
-              <a:rPr sz="1200" b="0" i="0">
-                <a:solidFill>
-                  <a:srgbClr val="333333"/>
-                </a:solidFill>
-                <a:latin typeface="Calibri"/>
-              </a:rPr>
-              <a:t>–   ('D) FK muy consultada', 1)</a:t>
-            </a:r>
-          </a:p>
-          <a:p>
-            <a:pPr>
-              <a:spcAft>
-                <a:spcPts val="800"/>
-              </a:spcAft>
-            </a:pPr>
-            <a:r>
-              <a:rPr sz="1200" b="0" i="0">
-                <a:solidFill>
-                  <a:srgbClr val="333333"/>
-                </a:solidFill>
-                <a:latin typeface="Calibri"/>
-              </a:rPr>
-              <a:t>–   </a:t>
-            </a:r>
-            <a:r>
-              <a:rPr sz="1200" b="1" i="0">
-                <a:solidFill>
-                  <a:srgbClr val="333333"/>
-                </a:solidFill>
-                <a:latin typeface="Calibri"/>
-              </a:rPr>
-              <a:t>2.</a:t>
-            </a:r>
-            <a:r>
-              <a:rPr sz="1200" b="0" i="0">
-                <a:solidFill>
-                  <a:srgbClr val="333333"/>
-                </a:solidFill>
-                <a:latin typeface="Calibri"/>
-              </a:rPr>
-              <a:t> Índice típico para agenda del día:</a:t>
-            </a:r>
-          </a:p>
-          <a:p>
-            <a:pPr>
-              <a:spcAft>
-                <a:spcPts val="800"/>
-              </a:spcAft>
-            </a:pPr>
-            <a:r>
-              <a:rPr sz="1200" b="0" i="0">
-                <a:solidFill>
-                  <a:srgbClr val="333333"/>
-                </a:solidFill>
-                <a:latin typeface="Calibri"/>
-              </a:rPr>
-              <a:t>–   ('A) Sobre cita.fecha_hora (y opcionalmente estado)', 1)</a:t>
-            </a:r>
-          </a:p>
-          <a:p>
-            <a:pPr>
-              <a:spcAft>
-                <a:spcPts val="800"/>
-              </a:spcAft>
-            </a:pPr>
-            <a:r>
-              <a:rPr sz="1200" b="0" i="0">
-                <a:solidFill>
-                  <a:srgbClr val="333333"/>
-                </a:solidFill>
-                <a:latin typeface="Calibri"/>
-              </a:rPr>
-              <a:t>–   ('B) Sobre un comentario libre nunca filtrado', 1)</a:t>
-            </a:r>
-          </a:p>
-          <a:p>
-            <a:pPr>
-              <a:spcAft>
-                <a:spcPts val="800"/>
-              </a:spcAft>
-            </a:pPr>
-            <a:r>
-              <a:rPr sz="1200" b="0" i="0">
-                <a:solidFill>
-                  <a:srgbClr val="333333"/>
-                </a:solidFill>
-                <a:latin typeface="Calibri"/>
-              </a:rPr>
-              <a:t>–   ('C) Sobre todas las columnas a la vez sin criterio', 1)</a:t>
-            </a:r>
-          </a:p>
-          <a:p>
-            <a:pPr>
-              <a:spcAft>
-                <a:spcPts val="800"/>
-              </a:spcAft>
-            </a:pPr>
-            <a:r>
-              <a:rPr sz="1200" b="0" i="0">
-                <a:solidFill>
-                  <a:srgbClr val="333333"/>
-                </a:solidFill>
-                <a:latin typeface="Calibri"/>
-              </a:rPr>
-              <a:t>–   ('D) Ninguno nunca', 1)</a:t>
-            </a:r>
-          </a:p>
-          <a:p>
-            <a:pPr>
-              <a:spcAft>
-                <a:spcPts val="800"/>
-              </a:spcAft>
-            </a:pPr>
-            <a:r>
-              <a:rPr sz="1200" b="0" i="0">
-                <a:solidFill>
-                  <a:srgbClr val="333333"/>
-                </a:solidFill>
-                <a:latin typeface="Calibri"/>
-              </a:rPr>
-              <a:t>–   </a:t>
-            </a:r>
-            <a:r>
-              <a:rPr sz="1200" b="1" i="0">
-                <a:solidFill>
-                  <a:srgbClr val="333333"/>
-                </a:solidFill>
-                <a:latin typeface="Calibri"/>
-              </a:rPr>
-              <a:t>3.</a:t>
-            </a:r>
-            <a:r>
-              <a:rPr sz="1200" b="0" i="0">
-                <a:solidFill>
-                  <a:srgbClr val="333333"/>
-                </a:solidFill>
-                <a:latin typeface="Calibri"/>
-              </a:rPr>
-              <a:t> Particionamiento aquí se trabaja como concepto (p. ej. rango de fecha); no exige SGBD local de pago.</a:t>
-            </a:r>
-          </a:p>
-          <a:p>
-            <a:pPr>
-              <a:spcAft>
-                <a:spcPts val="800"/>
-              </a:spcAft>
-            </a:pPr>
-            <a:r>
-              <a:rPr sz="1200" b="0" i="0">
-                <a:solidFill>
-                  <a:srgbClr val="333333"/>
-                </a:solidFill>
-                <a:latin typeface="Calibri"/>
-              </a:rPr>
-              <a:t>–   ('( ) Verdadero    ( ) Falso', 1)</a:t>
-            </a:r>
-          </a:p>
-          <a:p>
-            <a:pPr>
-              <a:spcAft>
-                <a:spcPts val="800"/>
-              </a:spcAft>
-            </a:pPr>
-            <a:r>
-              <a:rPr sz="1200" b="0" i="0">
-                <a:solidFill>
-                  <a:srgbClr val="333333"/>
-                </a:solidFill>
-                <a:latin typeface="Calibri"/>
-              </a:rPr>
-              <a:t>–   </a:t>
-            </a:r>
-            <a:r>
-              <a:rPr sz="1200" b="1" i="0">
-                <a:solidFill>
-                  <a:srgbClr val="333333"/>
-                </a:solidFill>
-                <a:latin typeface="Calibri"/>
-              </a:rPr>
-              <a:t>4.</a:t>
-            </a:r>
-            <a:r>
-              <a:rPr sz="1200" b="0" i="0">
-                <a:solidFill>
-                  <a:srgbClr val="333333"/>
-                </a:solidFill>
-                <a:latin typeface="Calibri"/>
-              </a:rPr>
-              <a:t> Más índices siempre aceleran inserts/updates de stock y facturas.</a:t>
-            </a:r>
-          </a:p>
-          <a:p>
-            <a:pPr>
-              <a:spcAft>
-                <a:spcPts val="800"/>
-              </a:spcAft>
-            </a:pPr>
-            <a:r>
-              <a:rPr sz="1200" b="0" i="0">
-                <a:solidFill>
-                  <a:srgbClr val="333333"/>
-                </a:solidFill>
-                <a:latin typeface="Calibri"/>
-              </a:rPr>
-              <a:t>–   ('( ) Verdadero    ( ) Falso', 1)</a:t>
-            </a:r>
-          </a:p>
-        </p:txBody>
-      </p:sp>
-      <p:sp>
-        <p:nvSpPr>
-          <p:cNvPr id="7" name="TextBox 6"/>
-          <p:cNvSpPr txBox="1"/>
-          <p:nvPr/>
-        </p:nvSpPr>
-        <p:spPr>
-          <a:xfrm>
-            <a:off x="11185855" y="6473952"/>
-            <a:ext cx="640080" cy="274320"/>
-          </a:xfrm>
-          <a:prstGeom prst="rect">
-            <a:avLst/>
-          </a:prstGeom>
-          <a:noFill/>
-        </p:spPr>
-        <p:txBody>
-          <a:bodyPr wrap="square">
-            <a:spAutoFit/>
-          </a:bodyPr>
-          <a:lstStyle/>
-          <a:p>
-            <a:pPr algn="r"/>
-            <a:r>
-              <a:rPr sz="1100" b="0" i="0">
-                <a:solidFill>
-                  <a:srgbClr val="666666"/>
-                </a:solidFill>
-                <a:latin typeface="Calibri"/>
-              </a:rPr>
-              <a:t>15</a:t>
-            </a:r>
-          </a:p>
-        </p:txBody>
-      </p:sp>
-    </p:spTree>
-  </p:cSld>
-  <p:clrMapOvr>
-    <a:masterClrMapping/>
-  </p:clrMapOvr>
-</p:sld>
-</file>
-
-<file path=ppt/slides/slide16.xml><?xml version="1.0" encoding="utf-8"?>
-<p:sld xmlns:a="http://schemas.openxmlformats.org/drawingml/2006/main" xmlns:p="http://schemas.openxmlformats.org/presentationml/2006/main" xmlns:r="http://schemas.openxmlformats.org/officeDocument/2006/relationships">
-  <p:cSld>
-    <p:bg>
-      <p:bgPr>
-        <a:solidFill>
-          <a:srgbClr val="FFFFFF"/>
-        </a:solidFill>
-        <a:effectLst/>
-      </p:bgPr>
-    </p:bg>
-    <p:spTree>
-      <p:nvGrpSpPr>
-        <p:cNvPr id="1" name=""/>
-        <p:cNvGrpSpPr/>
-        <p:nvPr/>
-      </p:nvGrpSpPr>
-      <p:grpSpPr/>
-      <p:sp>
-        <p:nvSpPr>
-          <p:cNvPr id="2" name="Rectangle 1"/>
-          <p:cNvSpPr/>
-          <p:nvPr/>
-        </p:nvSpPr>
-        <p:spPr>
-          <a:xfrm>
-            <a:off x="0" y="0"/>
-            <a:ext cx="12191695" cy="1170432"/>
-          </a:xfrm>
-          <a:prstGeom prst="rect">
-            <a:avLst/>
-          </a:prstGeom>
-          <a:solidFill>
-            <a:srgbClr val="095292"/>
-          </a:solidFill>
-          <a:ln>
-            <a:noFill/>
-          </a:ln>
-        </p:spPr>
-        <p:style>
-          <a:lnRef idx="1">
-            <a:schemeClr val="accent1"/>
-          </a:lnRef>
-          <a:fillRef idx="3">
-            <a:schemeClr val="accent1"/>
-          </a:fillRef>
-          <a:effectRef idx="2">
-            <a:schemeClr val="accent1"/>
-          </a:effectRef>
-          <a:fontRef idx="minor">
-            <a:schemeClr val="lt1"/>
-          </a:fontRef>
-        </p:style>
-        <p:txBody>
-          <a:bodyPr rtlCol="0" anchor="ctr"/>
-          <a:lstStyle/>
-          <a:p>
-            <a:pPr algn="ctr"/>
-          </a:p>
-        </p:txBody>
-      </p:sp>
-      <p:sp>
-        <p:nvSpPr>
-          <p:cNvPr id="3" name="Rectangle 2"/>
-          <p:cNvSpPr/>
-          <p:nvPr/>
-        </p:nvSpPr>
-        <p:spPr>
-          <a:xfrm>
-            <a:off x="0" y="1170432"/>
-            <a:ext cx="12191695" cy="41148"/>
-          </a:xfrm>
-          <a:prstGeom prst="rect">
-            <a:avLst/>
-          </a:prstGeom>
-          <a:solidFill>
-            <a:srgbClr val="FFD000"/>
-          </a:solidFill>
-          <a:ln>
-            <a:noFill/>
-          </a:ln>
-        </p:spPr>
-        <p:style>
-          <a:lnRef idx="1">
-            <a:schemeClr val="accent1"/>
-          </a:lnRef>
-          <a:fillRef idx="3">
-            <a:schemeClr val="accent1"/>
-          </a:fillRef>
-          <a:effectRef idx="2">
-            <a:schemeClr val="accent1"/>
-          </a:effectRef>
-          <a:fontRef idx="minor">
-            <a:schemeClr val="lt1"/>
-          </a:fontRef>
-        </p:style>
-        <p:txBody>
-          <a:bodyPr rtlCol="0" anchor="ctr"/>
-          <a:lstStyle/>
-          <a:p>
-            <a:pPr algn="ctr"/>
-          </a:p>
-        </p:txBody>
-      </p:sp>
-      <p:sp>
-        <p:nvSpPr>
-          <p:cNvPr id="4" name="TextBox 3"/>
-          <p:cNvSpPr txBox="1"/>
-          <p:nvPr/>
-        </p:nvSpPr>
-        <p:spPr>
-          <a:xfrm>
-            <a:off x="457200" y="164592"/>
-            <a:ext cx="11277295" cy="384048"/>
-          </a:xfrm>
-          <a:prstGeom prst="rect">
-            <a:avLst/>
-          </a:prstGeom>
-          <a:noFill/>
-        </p:spPr>
-        <p:txBody>
-          <a:bodyPr wrap="square">
-            <a:spAutoFit/>
-          </a:bodyPr>
-          <a:lstStyle/>
-          <a:p>
-            <a:r>
-              <a:rPr sz="2600" b="1" i="0">
-                <a:solidFill>
-                  <a:srgbClr val="FFFFFF"/>
-                </a:solidFill>
-                <a:latin typeface="Calibri"/>
-              </a:rPr>
-              <a:t>Quiz rapido (cierre) · cont. 2</a:t>
-            </a:r>
-          </a:p>
-        </p:txBody>
-      </p:sp>
-      <p:sp>
-        <p:nvSpPr>
-          <p:cNvPr id="5" name="TextBox 4"/>
-          <p:cNvSpPr txBox="1"/>
-          <p:nvPr/>
-        </p:nvSpPr>
-        <p:spPr>
-          <a:xfrm>
-            <a:off x="457200" y="566928"/>
-            <a:ext cx="11277295" cy="411480"/>
-          </a:xfrm>
-          <a:prstGeom prst="rect">
-            <a:avLst/>
-          </a:prstGeom>
-          <a:noFill/>
-        </p:spPr>
-        <p:txBody>
-          <a:bodyPr wrap="square">
-            <a:spAutoFit/>
-          </a:bodyPr>
-          <a:lstStyle/>
-          <a:p>
-            <a:r>
-              <a:rPr sz="1400" b="0" i="0">
-                <a:solidFill>
-                  <a:srgbClr val="B8D8EE"/>
-                </a:solidFill>
-                <a:latin typeface="Calibri"/>
-              </a:rPr>
-              <a:t>Individual · 8–10 min</a:t>
-            </a:r>
-          </a:p>
-        </p:txBody>
-      </p:sp>
-      <p:sp>
-        <p:nvSpPr>
-          <p:cNvPr id="6" name="TextBox 5"/>
-          <p:cNvSpPr txBox="1"/>
-          <p:nvPr/>
-        </p:nvSpPr>
-        <p:spPr>
-          <a:xfrm>
-            <a:off x="457200" y="1380744"/>
-            <a:ext cx="11277295" cy="5020056"/>
-          </a:xfrm>
-          <a:prstGeom prst="rect">
-            <a:avLst/>
-          </a:prstGeom>
-          <a:noFill/>
-        </p:spPr>
-        <p:txBody>
-          <a:bodyPr wrap="square">
-            <a:spAutoFit/>
-          </a:bodyPr>
-          <a:lstStyle/>
-          <a:p>
-            <a:pPr>
-              <a:spcAft>
-                <a:spcPts val="800"/>
-              </a:spcAft>
-            </a:pPr>
-            <a:r>
-              <a:rPr sz="1200" b="0" i="0">
-                <a:solidFill>
-                  <a:srgbClr val="333333"/>
-                </a:solidFill>
-                <a:latin typeface="Calibri"/>
-              </a:rPr>
-              <a:t>–   </a:t>
-            </a:r>
-            <a:r>
-              <a:rPr sz="1200" b="1" i="0">
-                <a:solidFill>
-                  <a:srgbClr val="333333"/>
-                </a:solidFill>
-                <a:latin typeface="Calibri"/>
-              </a:rPr>
-              <a:t>5.</a:t>
-            </a:r>
-            <a:r>
-              <a:rPr sz="1200" b="0" i="0">
-                <a:solidFill>
-                  <a:srgbClr val="333333"/>
-                </a:solidFill>
-                <a:latin typeface="Calibri"/>
-              </a:rPr>
-              <a:t> Selectividad alta significa:</a:t>
-            </a:r>
-          </a:p>
-          <a:p>
-            <a:pPr>
-              <a:spcAft>
-                <a:spcPts val="800"/>
-              </a:spcAft>
-            </a:pPr>
-            <a:r>
-              <a:rPr sz="1200" b="0" i="0">
-                <a:solidFill>
-                  <a:srgbClr val="333333"/>
-                </a:solidFill>
-                <a:latin typeface="Calibri"/>
-              </a:rPr>
-              <a:t>–   ('A) Casi todas las filas comparten el valor', 1)</a:t>
-            </a:r>
-          </a:p>
-          <a:p>
-            <a:pPr>
-              <a:spcAft>
-                <a:spcPts val="800"/>
-              </a:spcAft>
-            </a:pPr>
-            <a:r>
-              <a:rPr sz="1200" b="0" i="0">
-                <a:solidFill>
-                  <a:srgbClr val="333333"/>
-                </a:solidFill>
-                <a:latin typeface="Calibri"/>
-              </a:rPr>
-              <a:t>–   ('B) El predicado discrimina bien (pocas filas)', 1)</a:t>
-            </a:r>
-          </a:p>
-          <a:p>
-            <a:pPr>
-              <a:spcAft>
-                <a:spcPts val="800"/>
-              </a:spcAft>
-            </a:pPr>
-            <a:r>
-              <a:rPr sz="1200" b="0" i="0">
-                <a:solidFill>
-                  <a:srgbClr val="333333"/>
-                </a:solidFill>
-                <a:latin typeface="Calibri"/>
-              </a:rPr>
-              <a:t>–   ('C) Que no hay PK', 1)</a:t>
-            </a:r>
-          </a:p>
-          <a:p>
-            <a:pPr>
-              <a:spcAft>
-                <a:spcPts val="800"/>
-              </a:spcAft>
-            </a:pPr>
-            <a:r>
-              <a:rPr sz="1200" b="0" i="0">
-                <a:solidFill>
-                  <a:srgbClr val="333333"/>
-                </a:solidFill>
-                <a:latin typeface="Calibri"/>
-              </a:rPr>
-              <a:t>–   ('D) Que hay SELECT *', 1)</a:t>
-            </a:r>
-          </a:p>
-          <a:p>
-            <a:pPr>
-              <a:spcAft>
-                <a:spcPts val="800"/>
-              </a:spcAft>
-            </a:pPr>
-            <a:r>
-              <a:rPr sz="1200" b="0" i="0">
-                <a:solidFill>
-                  <a:srgbClr val="333333"/>
-                </a:solidFill>
-                <a:latin typeface="Calibri"/>
-              </a:rPr>
-              <a:t>–   </a:t>
-            </a:r>
-            <a:r>
-              <a:rPr sz="1200" b="1" i="0">
-                <a:solidFill>
-                  <a:srgbClr val="333333"/>
-                </a:solidFill>
-                <a:latin typeface="Calibri"/>
-              </a:rPr>
-              <a:t>6.</a:t>
-            </a:r>
-            <a:r>
-              <a:rPr sz="1200" b="0" i="0">
-                <a:solidFill>
-                  <a:srgbClr val="333333"/>
-                </a:solidFill>
-                <a:latin typeface="Calibri"/>
-              </a:rPr>
-              <a:t> Documentar por qué se creó (o no) un índice es parte de la evidencia del PI.</a:t>
-            </a:r>
-          </a:p>
-          <a:p>
-            <a:pPr>
-              <a:spcAft>
-                <a:spcPts val="800"/>
-              </a:spcAft>
-            </a:pPr>
-            <a:r>
-              <a:rPr sz="1200" b="0" i="0">
-                <a:solidFill>
-                  <a:srgbClr val="333333"/>
-                </a:solidFill>
-                <a:latin typeface="Calibri"/>
-              </a:rPr>
-              <a:t>–   ('( ) Verdadero    ( ) Falso', 1)</a:t>
-            </a:r>
-          </a:p>
-          <a:p>
-            <a:pPr>
-              <a:spcAft>
-                <a:spcPts val="800"/>
-              </a:spcAft>
-            </a:pPr>
-            <a:r>
-              <a:rPr sz="1200" b="0" i="0">
-                <a:solidFill>
-                  <a:srgbClr val="333333"/>
-                </a:solidFill>
-                <a:latin typeface="Calibri"/>
-              </a:rPr>
-              <a:t>–   </a:t>
-            </a:r>
-            <a:r>
-              <a:rPr sz="1200" b="1" i="0">
-                <a:solidFill>
-                  <a:srgbClr val="333333"/>
-                </a:solidFill>
-                <a:latin typeface="Calibri"/>
-              </a:rPr>
-              <a:t>7.</a:t>
-            </a:r>
-            <a:r>
-              <a:rPr sz="1200" b="0" i="0">
-                <a:solidFill>
-                  <a:srgbClr val="333333"/>
-                </a:solidFill>
-                <a:latin typeface="Calibri"/>
-              </a:rPr>
-              <a:t> Proponga un índice VetCare (tabla + columna(s) + consulta que lo usa).</a:t>
-            </a:r>
-          </a:p>
-          <a:p>
-            <a:pPr>
-              <a:spcAft>
-                <a:spcPts val="800"/>
-              </a:spcAft>
-            </a:pPr>
-            <a:r>
-              <a:rPr sz="1200" b="0" i="0">
-                <a:solidFill>
-                  <a:srgbClr val="333333"/>
-                </a:solidFill>
-                <a:latin typeface="Calibri"/>
-              </a:rPr>
-              <a:t>–   ('Respuesta corta: ____________________________', 1)</a:t>
-            </a:r>
-          </a:p>
-          <a:p>
-            <a:pPr>
-              <a:spcAft>
-                <a:spcPts val="800"/>
-              </a:spcAft>
-            </a:pPr>
-            <a:r>
-              <a:rPr sz="1200" b="0" i="0">
-                <a:solidFill>
-                  <a:srgbClr val="333333"/>
-                </a:solidFill>
-                <a:latin typeface="Calibri"/>
-              </a:rPr>
-              <a:t>–   </a:t>
-            </a:r>
-            <a:r>
-              <a:rPr sz="1200" b="1" i="0">
-                <a:solidFill>
-                  <a:srgbClr val="333333"/>
-                </a:solidFill>
-                <a:latin typeface="Calibri"/>
-              </a:rPr>
-              <a:t>8.</a:t>
-            </a:r>
-            <a:r>
-              <a:rPr sz="1200" b="0" i="0">
-                <a:solidFill>
-                  <a:srgbClr val="333333"/>
-                </a:solidFill>
-                <a:latin typeface="Calibri"/>
-              </a:rPr>
-              <a:t> ¿Particionaría citas por mes? Justifique en 1 frase (sí/no + motivo).</a:t>
-            </a:r>
-          </a:p>
-          <a:p>
-            <a:pPr>
-              <a:spcAft>
-                <a:spcPts val="800"/>
-              </a:spcAft>
-            </a:pPr>
-            <a:r>
-              <a:rPr sz="1200" b="0" i="0">
-                <a:solidFill>
-                  <a:srgbClr val="333333"/>
-                </a:solidFill>
-                <a:latin typeface="Calibri"/>
-              </a:rPr>
-              <a:t>–   ('Respuesta corta: ____________________________', 1)</a:t>
-            </a:r>
-          </a:p>
-        </p:txBody>
-      </p:sp>
-      <p:sp>
-        <p:nvSpPr>
-          <p:cNvPr id="7" name="TextBox 6"/>
-          <p:cNvSpPr txBox="1"/>
-          <p:nvPr/>
-        </p:nvSpPr>
-        <p:spPr>
-          <a:xfrm>
-            <a:off x="11185855" y="6473952"/>
-            <a:ext cx="640080" cy="274320"/>
-          </a:xfrm>
-          <a:prstGeom prst="rect">
-            <a:avLst/>
-          </a:prstGeom>
-          <a:noFill/>
-        </p:spPr>
-        <p:txBody>
-          <a:bodyPr wrap="square">
-            <a:spAutoFit/>
-          </a:bodyPr>
-          <a:lstStyle/>
-          <a:p>
-            <a:pPr algn="r"/>
-            <a:r>
-              <a:rPr sz="1100" b="0" i="0">
-                <a:solidFill>
-                  <a:srgbClr val="666666"/>
-                </a:solidFill>
-                <a:latin typeface="Calibri"/>
-              </a:rPr>
-              <a:t>16</a:t>
-            </a:r>
-          </a:p>
-        </p:txBody>
-      </p:sp>
-    </p:spTree>
-  </p:cSld>
-  <p:clrMapOvr>
-    <a:masterClrMapping/>
-  </p:clrMapOvr>
-</p:sld>
-</file>
-
-<file path=ppt/slides/slide17.xml><?xml version="1.0" encoding="utf-8"?>
-<p:sld xmlns:a="http://schemas.openxmlformats.org/drawingml/2006/main" xmlns:p="http://schemas.openxmlformats.org/presentationml/2006/main" xmlns:r="http://schemas.openxmlformats.org/officeDocument/2006/relationships">
-  <p:cSld>
-    <p:bg>
-      <p:bgPr>
-        <a:solidFill>
-          <a:srgbClr val="FFFFFF"/>
-        </a:solidFill>
-        <a:effectLst/>
-      </p:bgPr>
-    </p:bg>
-    <p:spTree>
-      <p:nvGrpSpPr>
-        <p:cNvPr id="1" name=""/>
-        <p:cNvGrpSpPr/>
-        <p:nvPr/>
-      </p:nvGrpSpPr>
-      <p:grpSpPr/>
-      <p:sp>
-        <p:nvSpPr>
-          <p:cNvPr id="2" name="Rectangle 1"/>
-          <p:cNvSpPr/>
-          <p:nvPr/>
-        </p:nvSpPr>
-        <p:spPr>
-          <a:xfrm>
-            <a:off x="0" y="0"/>
             <a:ext cx="12191695" cy="164592"/>
           </a:xfrm>
           <a:prstGeom prst="rect">
@@ -8451,7 +7438,7 @@
                 </a:solidFill>
                 <a:latin typeface="Calibri"/>
               </a:rPr>
-              <a:t>Criterios · quiz/cierre · duda PI</a:t>
+              <a:t>Criterios de exito · cierre · dudas del PI</a:t>
             </a:r>
           </a:p>
         </p:txBody>

--- a/Bases de Datos II/Clases/Clase 7 - Indices y particionamiento/Presentacion.pptx
+++ b/Bases de Datos II/Clases/Clase 7 - Indices y particionamiento/Presentacion.pptx
@@ -5440,7 +5440,7 @@
                 </a:solidFill>
                 <a:latin typeface="Calibri"/>
               </a:rPr>
-              <a:t> (Talleres) — domingo 23:59 cuando aplique taller.</a:t>
+              <a:t> (https://examlab.lovable.app/) — domingo 23:59 cuando aplique taller.</a:t>
             </a:r>
           </a:p>
         </p:txBody>
@@ -6035,7 +6035,7 @@
                 </a:solidFill>
                 <a:latin typeface="Calibri"/>
               </a:rPr>
-              <a:t>Taller de la semana en ExamLab: domingo 23:59 (regla del Acuerdo) cuando aplique.</a:t>
+              <a:t>Taller de la semana en ExamLab (https://examlab.lovable.app/): domingo 23:59 (regla del Acuerdo) cuando aplique.</a:t>
             </a:r>
           </a:p>
         </p:txBody>

--- a/Bases de Datos II/Clases/Clase 7 - Indices y particionamiento/Presentacion.pptx
+++ b/Bases de Datos II/Clases/Clase 7 - Indices y particionamiento/Presentacion.pptx
@@ -7776,22 +7776,6 @@
                 <a:latin typeface="Calibri"/>
               </a:rPr>
               <a:t>–   Particionamiento (idea conceptual, no se implementa hoy): dividir fisicamente una tabla muy grande en…</a:t>
-            </a:r>
-          </a:p>
-          <a:p>
-            <a:pPr>
-              <a:spcAft>
-                <a:spcPts val="800"/>
-              </a:spcAft>
-            </a:pPr>
-            <a:r>
-              <a:rPr sz="1500" b="0" i="0">
-                <a:solidFill>
-                  <a:srgbClr val="333333"/>
-                </a:solidFill>
-                <a:latin typeface="Calibri"/>
-              </a:rPr>
-              <a:t>–   Error de docente que no domina el tema: crear un indice sobre CADA columna 'por si acaso' sin mirar que…</a:t>
             </a:r>
           </a:p>
         </p:txBody>

--- a/Bases de Datos II/Clases/Clase 7 - Indices y particionamiento/Presentacion.pptx
+++ b/Bases de Datos II/Clases/Clase 7 - Indices y particionamiento/Presentacion.pptx
@@ -5390,7 +5390,7 @@
                 </a:solidFill>
                 <a:latin typeface="Calibri"/>
               </a:rPr>
-              <a:t>–   Evidencia en playground (enlace) o archivo SQL/PNG del equipo.</a:t>
+              <a:t>–   Evidencia en playground (enlace) o archivo SQL/PNG propio.</a:t>
             </a:r>
           </a:p>
           <a:p>
@@ -6639,7 +6639,7 @@
                 </a:solidFill>
                 <a:latin typeface="Calibri"/>
               </a:rPr>
-              <a:t>–   Al salir: avance concreto en el paquete VetCare del equipo.</a:t>
+              <a:t>–   Al salir: avance concreto en su paquete VetCare.</a:t>
             </a:r>
           </a:p>
         </p:txBody>
@@ -8550,7 +8550,7 @@
                 </a:solidFill>
                 <a:latin typeface="Calibri"/>
               </a:rPr>
-              <a:t>–   Al final de la demo: dejar enlace/script compartible al equipo.</a:t>
+              <a:t>–   Al final de la demo: dejar enlace/script compartible al grupo.</a:t>
             </a:r>
           </a:p>
         </p:txBody>

--- a/Bases de Datos II/Clases/Clase 7 - Indices y particionamiento/Presentacion.pptx
+++ b/Bases de Datos II/Clases/Clase 7 - Indices y particionamiento/Presentacion.pptx
@@ -5440,7 +5440,7 @@
                 </a:solidFill>
                 <a:latin typeface="Calibri"/>
               </a:rPr>
-              <a:t> (https://examlab.lovable.app/) — domingo 23:59 cuando aplique taller.</a:t>
+              <a:t> (https://uniaj.examlab.workers.dev/) — domingo 23:59 cuando aplique taller.</a:t>
             </a:r>
           </a:p>
         </p:txBody>
@@ -6035,7 +6035,7 @@
                 </a:solidFill>
                 <a:latin typeface="Calibri"/>
               </a:rPr>
-              <a:t>Taller de la semana en ExamLab (https://examlab.lovable.app/): domingo 23:59 (regla del Acuerdo) cuando aplique.</a:t>
+              <a:t>Taller de la semana en ExamLab (https://uniaj.examlab.workers.dev/): domingo 23:59 (regla del Acuerdo) cuando aplique.</a:t>
             </a:r>
           </a:p>
         </p:txBody>

--- a/Bases de Datos II/Clases/Clase 7 - Indices y particionamiento/Presentacion.pptx
+++ b/Bases de Datos II/Clases/Clase 7 - Indices y particionamiento/Presentacion.pptx
@@ -3853,8 +3853,8 @@
         </p:nvSpPr>
         <p:spPr>
           <a:xfrm>
-            <a:off x="457200" y="1234440"/>
-            <a:ext cx="11277295" cy="777240"/>
+            <a:off x="457200" y="1554480"/>
+            <a:ext cx="11277295" cy="1051560"/>
           </a:xfrm>
           <a:prstGeom prst="roundRect">
             <a:avLst>
@@ -3898,7 +3898,7 @@
         </p:nvSpPr>
         <p:spPr>
           <a:xfrm>
-            <a:off x="594360" y="1403604"/>
+            <a:off x="594360" y="1860804"/>
             <a:ext cx="438912" cy="438912"/>
           </a:xfrm>
           <a:prstGeom prst="roundRect">
@@ -3943,7 +3943,7 @@
         </p:nvSpPr>
         <p:spPr>
           <a:xfrm>
-            <a:off x="594360" y="1403604"/>
+            <a:off x="594360" y="1860804"/>
             <a:ext cx="438912" cy="438912"/>
           </a:xfrm>
           <a:prstGeom prst="rect">
@@ -3976,8 +3976,8 @@
         </p:nvSpPr>
         <p:spPr>
           <a:xfrm>
-            <a:off x="1188720" y="1325880"/>
-            <a:ext cx="10271455" cy="612647"/>
+            <a:off x="1188720" y="1645920"/>
+            <a:ext cx="10271455" cy="886968"/>
           </a:xfrm>
           <a:prstGeom prst="rect">
             <a:avLst/>
@@ -4008,8 +4008,8 @@
         </p:nvSpPr>
         <p:spPr>
           <a:xfrm>
-            <a:off x="457200" y="2103120"/>
-            <a:ext cx="11277295" cy="777240"/>
+            <a:off x="457200" y="2697480"/>
+            <a:ext cx="11277295" cy="1051560"/>
           </a:xfrm>
           <a:prstGeom prst="roundRect">
             <a:avLst>
@@ -4053,7 +4053,7 @@
         </p:nvSpPr>
         <p:spPr>
           <a:xfrm>
-            <a:off x="594360" y="2272284"/>
+            <a:off x="594360" y="3003804"/>
             <a:ext cx="438912" cy="438912"/>
           </a:xfrm>
           <a:prstGeom prst="roundRect">
@@ -4098,7 +4098,7 @@
         </p:nvSpPr>
         <p:spPr>
           <a:xfrm>
-            <a:off x="594360" y="2272284"/>
+            <a:off x="594360" y="3003804"/>
             <a:ext cx="438912" cy="438912"/>
           </a:xfrm>
           <a:prstGeom prst="rect">
@@ -4131,8 +4131,8 @@
         </p:nvSpPr>
         <p:spPr>
           <a:xfrm>
-            <a:off x="1188720" y="2194560"/>
-            <a:ext cx="10271455" cy="612647"/>
+            <a:off x="1188720" y="2788920"/>
+            <a:ext cx="10271455" cy="886968"/>
           </a:xfrm>
           <a:prstGeom prst="rect">
             <a:avLst/>
@@ -4163,8 +4163,8 @@
         </p:nvSpPr>
         <p:spPr>
           <a:xfrm>
-            <a:off x="457200" y="2971800"/>
-            <a:ext cx="11277295" cy="777240"/>
+            <a:off x="457200" y="3840480"/>
+            <a:ext cx="11277295" cy="1051560"/>
           </a:xfrm>
           <a:prstGeom prst="roundRect">
             <a:avLst>
@@ -4208,7 +4208,7 @@
         </p:nvSpPr>
         <p:spPr>
           <a:xfrm>
-            <a:off x="594360" y="3140964"/>
+            <a:off x="594360" y="4146804"/>
             <a:ext cx="438912" cy="438912"/>
           </a:xfrm>
           <a:prstGeom prst="roundRect">
@@ -4253,7 +4253,7 @@
         </p:nvSpPr>
         <p:spPr>
           <a:xfrm>
-            <a:off x="594360" y="3140964"/>
+            <a:off x="594360" y="4146804"/>
             <a:ext cx="438912" cy="438912"/>
           </a:xfrm>
           <a:prstGeom prst="rect">
@@ -4286,8 +4286,8 @@
         </p:nvSpPr>
         <p:spPr>
           <a:xfrm>
-            <a:off x="1188720" y="3063240"/>
-            <a:ext cx="10271455" cy="612647"/>
+            <a:off x="1188720" y="3931920"/>
+            <a:ext cx="10271455" cy="886968"/>
           </a:xfrm>
           <a:prstGeom prst="rect">
             <a:avLst/>
@@ -4318,8 +4318,8 @@
         </p:nvSpPr>
         <p:spPr>
           <a:xfrm>
-            <a:off x="457200" y="3840479"/>
-            <a:ext cx="11277295" cy="777240"/>
+            <a:off x="457200" y="4983480"/>
+            <a:ext cx="11277295" cy="1051560"/>
           </a:xfrm>
           <a:prstGeom prst="roundRect">
             <a:avLst>
@@ -4363,7 +4363,7 @@
         </p:nvSpPr>
         <p:spPr>
           <a:xfrm>
-            <a:off x="594360" y="4009643"/>
+            <a:off x="594360" y="5289804"/>
             <a:ext cx="438912" cy="438912"/>
           </a:xfrm>
           <a:prstGeom prst="roundRect">
@@ -4408,7 +4408,7 @@
         </p:nvSpPr>
         <p:spPr>
           <a:xfrm>
-            <a:off x="594360" y="4009643"/>
+            <a:off x="594360" y="5289804"/>
             <a:ext cx="438912" cy="438912"/>
           </a:xfrm>
           <a:prstGeom prst="rect">
@@ -4441,8 +4441,8 @@
         </p:nvSpPr>
         <p:spPr>
           <a:xfrm>
-            <a:off x="1188720" y="3931919"/>
-            <a:ext cx="10271455" cy="612647"/>
+            <a:off x="1188720" y="5074920"/>
+            <a:ext cx="10271455" cy="886968"/>
           </a:xfrm>
           <a:prstGeom prst="rect">
             <a:avLst/>
@@ -8917,8 +8917,8 @@
         </p:blipFill>
         <p:spPr>
           <a:xfrm>
-            <a:off x="1743913" y="1792224"/>
-            <a:ext cx="1051560" cy="1051560"/>
+            <a:off x="1643329" y="1847087"/>
+            <a:ext cx="1252728" cy="1252728"/>
           </a:xfrm>
           <a:prstGeom prst="rect">
             <a:avLst/>
@@ -8933,8 +8933,8 @@
         </p:nvSpPr>
         <p:spPr>
           <a:xfrm>
-            <a:off x="530352" y="2916936"/>
-            <a:ext cx="3478682" cy="502920"/>
+            <a:off x="530352" y="3191256"/>
+            <a:ext cx="3478682" cy="621792"/>
           </a:xfrm>
           <a:prstGeom prst="rect">
             <a:avLst/>
@@ -9121,8 +9121,8 @@
         </p:blipFill>
         <p:spPr>
           <a:xfrm>
-            <a:off x="5570067" y="1792224"/>
-            <a:ext cx="1051560" cy="1051560"/>
+            <a:off x="5469483" y="1847087"/>
+            <a:ext cx="1252728" cy="1252728"/>
           </a:xfrm>
           <a:prstGeom prst="rect">
             <a:avLst/>
@@ -9137,8 +9137,8 @@
         </p:nvSpPr>
         <p:spPr>
           <a:xfrm>
-            <a:off x="4356506" y="2916936"/>
-            <a:ext cx="3478682" cy="502920"/>
+            <a:off x="4356506" y="3191256"/>
+            <a:ext cx="3478682" cy="621792"/>
           </a:xfrm>
           <a:prstGeom prst="rect">
             <a:avLst/>
@@ -9325,8 +9325,8 @@
         </p:blipFill>
         <p:spPr>
           <a:xfrm>
-            <a:off x="9396222" y="1792224"/>
-            <a:ext cx="1051560" cy="1051560"/>
+            <a:off x="9295638" y="1847087"/>
+            <a:ext cx="1252728" cy="1252728"/>
           </a:xfrm>
           <a:prstGeom prst="rect">
             <a:avLst/>
@@ -9341,8 +9341,8 @@
         </p:nvSpPr>
         <p:spPr>
           <a:xfrm>
-            <a:off x="8182660" y="2916936"/>
-            <a:ext cx="3478682" cy="502920"/>
+            <a:off x="8182660" y="3191256"/>
+            <a:ext cx="3478682" cy="621792"/>
           </a:xfrm>
           <a:prstGeom prst="rect">
             <a:avLst/>

--- a/Bases de Datos II/Clases/Clase 7 - Indices y particionamiento/Presentacion.pptx
+++ b/Bases de Datos II/Clases/Clase 7 - Indices y particionamiento/Presentacion.pptx
@@ -20,6 +20,9 @@
     <p:sldId id="268" r:id="rId19"/>
     <p:sldId id="269" r:id="rId20"/>
     <p:sldId id="270" r:id="rId21"/>
+    <p:sldId id="271" r:id="rId22"/>
+    <p:sldId id="272" r:id="rId23"/>
+    <p:sldId id="273" r:id="rId24"/>
   </p:sldIdLst>
   <p:sldSz cx="12191695" cy="6858000" type="screen4x3"/>
   <p:notesSz cx="6858000" cy="9144000"/>
@@ -3514,7 +3517,7 @@
         <p:spPr>
           <a:xfrm>
             <a:off x="0" y="0"/>
-            <a:ext cx="12191695" cy="960120"/>
+            <a:ext cx="12191695" cy="1170432"/>
           </a:xfrm>
           <a:prstGeom prst="rect">
             <a:avLst/>
@@ -3556,7 +3559,7 @@
         </p:nvSpPr>
         <p:spPr>
           <a:xfrm>
-            <a:off x="0" y="960120"/>
+            <a:off x="0" y="1170432"/>
             <a:ext cx="12191695" cy="41148"/>
           </a:xfrm>
           <a:prstGeom prst="rect">
@@ -3600,7 +3603,7 @@
         <p:spPr>
           <a:xfrm>
             <a:off x="457200" y="164592"/>
-            <a:ext cx="11277295" cy="502920"/>
+            <a:ext cx="11277295" cy="384048"/>
           </a:xfrm>
           <a:prstGeom prst="rect">
             <a:avLst/>
@@ -3620,7 +3623,7 @@
                 </a:solidFill>
                 <a:latin typeface="Calibri"/>
               </a:rPr>
-              <a:t>Taller PI VetCare — escenario / datos de partida</a:t>
+              <a:t>Herramientas de hoy</a:t>
             </a:r>
           </a:p>
         </p:txBody>
@@ -3633,8 +3636,8 @@
         </p:nvSpPr>
         <p:spPr>
           <a:xfrm>
-            <a:off x="457200" y="1170432"/>
-            <a:ext cx="11277295" cy="5230368"/>
+            <a:off x="457200" y="566928"/>
+            <a:ext cx="11277295" cy="411480"/>
           </a:xfrm>
           <a:prstGeom prst="rect">
             <a:avLst/>
@@ -3647,26 +3650,429 @@
           </a:bodyPr>
           <a:lstStyle/>
           <a:p>
-            <a:pPr>
-              <a:spcAft>
-                <a:spcPts val="800"/>
-              </a:spcAft>
+            <a:r>
+              <a:rPr sz="1400" b="0" i="0">
+                <a:solidFill>
+                  <a:srgbClr val="B8D8EE"/>
+                </a:solidFill>
+                <a:latin typeface="Calibri"/>
+              </a:rPr>
+              <a:t>Gratis · navegador o free tier</a:t>
+            </a:r>
+          </a:p>
+        </p:txBody>
+      </p:sp>
+      <p:sp>
+        <p:nvSpPr>
+          <p:cNvPr id="6" name="Rounded Rectangle 5"/>
+          <p:cNvSpPr/>
+          <p:nvPr/>
+        </p:nvSpPr>
+        <p:spPr>
+          <a:xfrm>
+            <a:off x="457200" y="1591056"/>
+            <a:ext cx="5538063" cy="2331720"/>
+          </a:xfrm>
+          <a:prstGeom prst="roundRect">
+            <a:avLst>
+              <a:gd name="adj" fmla="val 12000"/>
+            </a:avLst>
+          </a:prstGeom>
+          <a:solidFill>
+            <a:srgbClr val="F2F2F2"/>
+          </a:solidFill>
+          <a:ln>
+            <a:noFill/>
+          </a:ln>
+        </p:spPr>
+        <p:style>
+          <a:lnRef idx="1">
+            <a:schemeClr val="accent1"/>
+          </a:lnRef>
+          <a:fillRef idx="3">
+            <a:schemeClr val="accent1"/>
+          </a:fillRef>
+          <a:effectRef idx="2">
+            <a:schemeClr val="accent1"/>
+          </a:effectRef>
+          <a:fontRef idx="minor">
+            <a:schemeClr val="lt1"/>
+          </a:fontRef>
+        </p:style>
+        <p:txBody>
+          <a:bodyPr rtlCol="0" anchor="ctr"/>
+          <a:lstStyle/>
+          <a:p>
+            <a:pPr algn="ctr"/>
+          </a:p>
+        </p:txBody>
+      </p:sp>
+      <p:sp>
+        <p:nvSpPr>
+          <p:cNvPr id="7" name="Rectangle 6"/>
+          <p:cNvSpPr/>
+          <p:nvPr/>
+        </p:nvSpPr>
+        <p:spPr>
+          <a:xfrm>
+            <a:off x="457200" y="1591056"/>
+            <a:ext cx="5538063" cy="64008"/>
+          </a:xfrm>
+          <a:prstGeom prst="rect">
+            <a:avLst/>
+          </a:prstGeom>
+          <a:solidFill>
+            <a:srgbClr val="095292"/>
+          </a:solidFill>
+          <a:ln>
+            <a:noFill/>
+          </a:ln>
+        </p:spPr>
+        <p:style>
+          <a:lnRef idx="1">
+            <a:schemeClr val="accent1"/>
+          </a:lnRef>
+          <a:fillRef idx="3">
+            <a:schemeClr val="accent1"/>
+          </a:fillRef>
+          <a:effectRef idx="2">
+            <a:schemeClr val="accent1"/>
+          </a:effectRef>
+          <a:fontRef idx="minor">
+            <a:schemeClr val="lt1"/>
+          </a:fontRef>
+        </p:style>
+        <p:txBody>
+          <a:bodyPr rtlCol="0" anchor="ctr"/>
+          <a:lstStyle/>
+          <a:p>
+            <a:pPr algn="ctr"/>
+          </a:p>
+        </p:txBody>
+      </p:sp>
+      <p:sp>
+        <p:nvSpPr>
+          <p:cNvPr id="8" name="Rectangle 7"/>
+          <p:cNvSpPr/>
+          <p:nvPr/>
+        </p:nvSpPr>
+        <p:spPr>
+          <a:xfrm>
+            <a:off x="457200" y="1655064"/>
+            <a:ext cx="5538063" cy="27432"/>
+          </a:xfrm>
+          <a:prstGeom prst="rect">
+            <a:avLst/>
+          </a:prstGeom>
+          <a:solidFill>
+            <a:srgbClr val="FFD000"/>
+          </a:solidFill>
+          <a:ln>
+            <a:noFill/>
+          </a:ln>
+        </p:spPr>
+        <p:style>
+          <a:lnRef idx="1">
+            <a:schemeClr val="accent1"/>
+          </a:lnRef>
+          <a:fillRef idx="3">
+            <a:schemeClr val="accent1"/>
+          </a:fillRef>
+          <a:effectRef idx="2">
+            <a:schemeClr val="accent1"/>
+          </a:effectRef>
+          <a:fontRef idx="minor">
+            <a:schemeClr val="lt1"/>
+          </a:fontRef>
+        </p:style>
+        <p:txBody>
+          <a:bodyPr rtlCol="0" anchor="ctr"/>
+          <a:lstStyle/>
+          <a:p>
+            <a:pPr algn="ctr"/>
+          </a:p>
+        </p:txBody>
+      </p:sp>
+      <p:pic>
+        <p:nvPicPr>
+          <p:cNvPr id="9" name="Picture 8" descr="examlab.png"/>
+          <p:cNvPicPr>
+            <a:picLocks noChangeAspect="1"/>
+          </p:cNvPicPr>
+          <p:nvPr/>
+        </p:nvPicPr>
+        <p:blipFill>
+          <a:blip r:embed="rId2"/>
+          <a:stretch>
+            <a:fillRect/>
+          </a:stretch>
+        </p:blipFill>
+        <p:spPr>
+          <a:xfrm>
+            <a:off x="2599867" y="1847087"/>
+            <a:ext cx="1252728" cy="1252728"/>
+          </a:xfrm>
+          <a:prstGeom prst="rect">
+            <a:avLst/>
+          </a:prstGeom>
+        </p:spPr>
+      </p:pic>
+      <p:sp>
+        <p:nvSpPr>
+          <p:cNvPr id="10" name="TextBox 9"/>
+          <p:cNvSpPr txBox="1"/>
+          <p:nvPr/>
+        </p:nvSpPr>
+        <p:spPr>
+          <a:xfrm>
+            <a:off x="530352" y="3191256"/>
+            <a:ext cx="5391759" cy="621792"/>
+          </a:xfrm>
+          <a:prstGeom prst="rect">
+            <a:avLst/>
+          </a:prstGeom>
+          <a:noFill/>
+        </p:spPr>
+        <p:txBody>
+          <a:bodyPr wrap="square" anchor="t"/>
+          <a:lstStyle/>
+          <a:p>
+            <a:pPr algn="ctr"/>
+            <a:r>
+              <a:rPr sz="1300" b="1" i="0">
+                <a:solidFill>
+                  <a:srgbClr val="095292"/>
+                </a:solidFill>
+                <a:latin typeface="Calibri"/>
+              </a:rPr>
+              <a:t>ExamLab</a:t>
+            </a:r>
+          </a:p>
+          <a:p>
+            <a:pPr algn="ctr">
+              <a:spcBef>
+                <a:spcPts val="200"/>
+              </a:spcBef>
             </a:pPr>
             <a:r>
-              <a:rPr sz="1600" b="0" i="0">
-                <a:solidFill>
-                  <a:srgbClr val="333333"/>
-                </a:solidFill>
-                <a:latin typeface="Calibri"/>
-              </a:rPr>
-              <a:t>–   Candidatos: Cita(fecha), Mascota(id_dueño).</a:t>
-            </a:r>
-          </a:p>
-        </p:txBody>
-      </p:sp>
-      <p:sp>
-        <p:nvSpPr>
-          <p:cNvPr id="6" name="TextBox 5"/>
+              <a:rPr sz="1000" b="0" i="0">
+                <a:solidFill>
+                  <a:srgbClr val="666666"/>
+                </a:solidFill>
+                <a:latin typeface="Calibri"/>
+              </a:rPr>
+              <a:t>PostgreSQL: 30.010 citas</a:t>
+            </a:r>
+          </a:p>
+        </p:txBody>
+      </p:sp>
+      <p:sp>
+        <p:nvSpPr>
+          <p:cNvPr id="11" name="Rounded Rectangle 10"/>
+          <p:cNvSpPr/>
+          <p:nvPr/>
+        </p:nvSpPr>
+        <p:spPr>
+          <a:xfrm>
+            <a:off x="6196431" y="1591056"/>
+            <a:ext cx="5538063" cy="2331720"/>
+          </a:xfrm>
+          <a:prstGeom prst="roundRect">
+            <a:avLst>
+              <a:gd name="adj" fmla="val 12000"/>
+            </a:avLst>
+          </a:prstGeom>
+          <a:solidFill>
+            <a:srgbClr val="F2F2F2"/>
+          </a:solidFill>
+          <a:ln>
+            <a:noFill/>
+          </a:ln>
+        </p:spPr>
+        <p:style>
+          <a:lnRef idx="1">
+            <a:schemeClr val="accent1"/>
+          </a:lnRef>
+          <a:fillRef idx="3">
+            <a:schemeClr val="accent1"/>
+          </a:fillRef>
+          <a:effectRef idx="2">
+            <a:schemeClr val="accent1"/>
+          </a:effectRef>
+          <a:fontRef idx="minor">
+            <a:schemeClr val="lt1"/>
+          </a:fontRef>
+        </p:style>
+        <p:txBody>
+          <a:bodyPr rtlCol="0" anchor="ctr"/>
+          <a:lstStyle/>
+          <a:p>
+            <a:pPr algn="ctr"/>
+          </a:p>
+        </p:txBody>
+      </p:sp>
+      <p:sp>
+        <p:nvSpPr>
+          <p:cNvPr id="12" name="Rectangle 11"/>
+          <p:cNvSpPr/>
+          <p:nvPr/>
+        </p:nvSpPr>
+        <p:spPr>
+          <a:xfrm>
+            <a:off x="6196431" y="1591056"/>
+            <a:ext cx="5538063" cy="64008"/>
+          </a:xfrm>
+          <a:prstGeom prst="rect">
+            <a:avLst/>
+          </a:prstGeom>
+          <a:solidFill>
+            <a:srgbClr val="095292"/>
+          </a:solidFill>
+          <a:ln>
+            <a:noFill/>
+          </a:ln>
+        </p:spPr>
+        <p:style>
+          <a:lnRef idx="1">
+            <a:schemeClr val="accent1"/>
+          </a:lnRef>
+          <a:fillRef idx="3">
+            <a:schemeClr val="accent1"/>
+          </a:fillRef>
+          <a:effectRef idx="2">
+            <a:schemeClr val="accent1"/>
+          </a:effectRef>
+          <a:fontRef idx="minor">
+            <a:schemeClr val="lt1"/>
+          </a:fontRef>
+        </p:style>
+        <p:txBody>
+          <a:bodyPr rtlCol="0" anchor="ctr"/>
+          <a:lstStyle/>
+          <a:p>
+            <a:pPr algn="ctr"/>
+          </a:p>
+        </p:txBody>
+      </p:sp>
+      <p:sp>
+        <p:nvSpPr>
+          <p:cNvPr id="13" name="Rectangle 12"/>
+          <p:cNvSpPr/>
+          <p:nvPr/>
+        </p:nvSpPr>
+        <p:spPr>
+          <a:xfrm>
+            <a:off x="6196431" y="1655064"/>
+            <a:ext cx="5538063" cy="27432"/>
+          </a:xfrm>
+          <a:prstGeom prst="rect">
+            <a:avLst/>
+          </a:prstGeom>
+          <a:solidFill>
+            <a:srgbClr val="FFD000"/>
+          </a:solidFill>
+          <a:ln>
+            <a:noFill/>
+          </a:ln>
+        </p:spPr>
+        <p:style>
+          <a:lnRef idx="1">
+            <a:schemeClr val="accent1"/>
+          </a:lnRef>
+          <a:fillRef idx="3">
+            <a:schemeClr val="accent1"/>
+          </a:fillRef>
+          <a:effectRef idx="2">
+            <a:schemeClr val="accent1"/>
+          </a:effectRef>
+          <a:fontRef idx="minor">
+            <a:schemeClr val="lt1"/>
+          </a:fontRef>
+        </p:style>
+        <p:txBody>
+          <a:bodyPr rtlCol="0" anchor="ctr"/>
+          <a:lstStyle/>
+          <a:p>
+            <a:pPr algn="ctr"/>
+          </a:p>
+        </p:txBody>
+      </p:sp>
+      <p:pic>
+        <p:nvPicPr>
+          <p:cNvPr id="14" name="Picture 13" descr="google_docs.png"/>
+          <p:cNvPicPr>
+            <a:picLocks noChangeAspect="1"/>
+          </p:cNvPicPr>
+          <p:nvPr/>
+        </p:nvPicPr>
+        <p:blipFill>
+          <a:blip r:embed="rId3"/>
+          <a:stretch>
+            <a:fillRect/>
+          </a:stretch>
+        </p:blipFill>
+        <p:spPr>
+          <a:xfrm>
+            <a:off x="8339099" y="1847087"/>
+            <a:ext cx="1252728" cy="1252728"/>
+          </a:xfrm>
+          <a:prstGeom prst="rect">
+            <a:avLst/>
+          </a:prstGeom>
+        </p:spPr>
+      </p:pic>
+      <p:sp>
+        <p:nvSpPr>
+          <p:cNvPr id="15" name="TextBox 14"/>
+          <p:cNvSpPr txBox="1"/>
+          <p:nvPr/>
+        </p:nvSpPr>
+        <p:spPr>
+          <a:xfrm>
+            <a:off x="6269583" y="3191256"/>
+            <a:ext cx="5391759" cy="621792"/>
+          </a:xfrm>
+          <a:prstGeom prst="rect">
+            <a:avLst/>
+          </a:prstGeom>
+          <a:noFill/>
+        </p:spPr>
+        <p:txBody>
+          <a:bodyPr wrap="square" anchor="t"/>
+          <a:lstStyle/>
+          <a:p>
+            <a:pPr algn="ctr"/>
+            <a:r>
+              <a:rPr sz="1300" b="1" i="0">
+                <a:solidFill>
+                  <a:srgbClr val="095292"/>
+                </a:solidFill>
+                <a:latin typeface="Calibri"/>
+              </a:rPr>
+              <a:t>Google Docs</a:t>
+            </a:r>
+          </a:p>
+          <a:p>
+            <a:pPr algn="ctr">
+              <a:spcBef>
+                <a:spcPts val="200"/>
+              </a:spcBef>
+            </a:pPr>
+            <a:r>
+              <a:rPr sz="1000" b="0" i="0">
+                <a:solidFill>
+                  <a:srgbClr val="666666"/>
+                </a:solidFill>
+                <a:latin typeface="Calibri"/>
+              </a:rPr>
+              <a:t>Tabla de justificacion</a:t>
+            </a:r>
+          </a:p>
+        </p:txBody>
+      </p:sp>
+      <p:sp>
+        <p:nvSpPr>
+          <p:cNvPr id="16" name="TextBox 15"/>
           <p:cNvSpPr txBox="1"/>
           <p:nvPr/>
         </p:nvSpPr>
@@ -3840,111 +4246,21 @@
                 </a:solidFill>
                 <a:latin typeface="Calibri"/>
               </a:rPr>
-              <a:t>Taller PI VetCare — pasos guiados</a:t>
-            </a:r>
-          </a:p>
-        </p:txBody>
-      </p:sp>
-      <p:sp>
-        <p:nvSpPr>
-          <p:cNvPr id="5" name="Rounded Rectangle 4"/>
-          <p:cNvSpPr/>
-          <p:nvPr/>
-        </p:nvSpPr>
-        <p:spPr>
-          <a:xfrm>
-            <a:off x="457200" y="1554480"/>
-            <a:ext cx="11277295" cy="1051560"/>
-          </a:xfrm>
-          <a:prstGeom prst="roundRect">
-            <a:avLst>
-              <a:gd name="adj" fmla="val 12000"/>
-            </a:avLst>
-          </a:prstGeom>
-          <a:solidFill>
-            <a:srgbClr val="F2F2F2"/>
-          </a:solidFill>
-          <a:ln>
-            <a:noFill/>
-          </a:ln>
-        </p:spPr>
-        <p:style>
-          <a:lnRef idx="1">
-            <a:schemeClr val="accent1"/>
-          </a:lnRef>
-          <a:fillRef idx="3">
-            <a:schemeClr val="accent1"/>
-          </a:fillRef>
-          <a:effectRef idx="2">
-            <a:schemeClr val="accent1"/>
-          </a:effectRef>
-          <a:fontRef idx="minor">
-            <a:schemeClr val="lt1"/>
-          </a:fontRef>
-        </p:style>
-        <p:txBody>
-          <a:bodyPr rtlCol="0" anchor="ctr"/>
-          <a:lstStyle/>
-          <a:p>
-            <a:pPr algn="ctr"/>
-          </a:p>
-        </p:txBody>
-      </p:sp>
-      <p:sp>
-        <p:nvSpPr>
-          <p:cNvPr id="6" name="Rounded Rectangle 5"/>
-          <p:cNvSpPr/>
-          <p:nvPr/>
-        </p:nvSpPr>
-        <p:spPr>
-          <a:xfrm>
-            <a:off x="594360" y="1860804"/>
-            <a:ext cx="438912" cy="438912"/>
-          </a:xfrm>
-          <a:prstGeom prst="roundRect">
-            <a:avLst>
-              <a:gd name="adj" fmla="val 12000"/>
-            </a:avLst>
-          </a:prstGeom>
-          <a:solidFill>
-            <a:srgbClr val="095292"/>
-          </a:solidFill>
-          <a:ln>
-            <a:noFill/>
-          </a:ln>
-        </p:spPr>
-        <p:style>
-          <a:lnRef idx="1">
-            <a:schemeClr val="accent1"/>
-          </a:lnRef>
-          <a:fillRef idx="3">
-            <a:schemeClr val="accent1"/>
-          </a:fillRef>
-          <a:effectRef idx="2">
-            <a:schemeClr val="accent1"/>
-          </a:effectRef>
-          <a:fontRef idx="minor">
-            <a:schemeClr val="lt1"/>
-          </a:fontRef>
-        </p:style>
-        <p:txBody>
-          <a:bodyPr rtlCol="0" anchor="ctr"/>
-          <a:lstStyle/>
-          <a:p>
-            <a:pPr algn="ctr"/>
-          </a:p>
-        </p:txBody>
-      </p:sp>
-      <p:sp>
-        <p:nvSpPr>
-          <p:cNvPr id="7" name="TextBox 6"/>
+              <a:t>Taller PI VetCare — contexto / por que importa</a:t>
+            </a:r>
+          </a:p>
+        </p:txBody>
+      </p:sp>
+      <p:sp>
+        <p:nvSpPr>
+          <p:cNvPr id="5" name="TextBox 4"/>
           <p:cNvSpPr txBox="1"/>
           <p:nvPr/>
         </p:nvSpPr>
         <p:spPr>
           <a:xfrm>
-            <a:off x="594360" y="1860804"/>
-            <a:ext cx="438912" cy="438912"/>
+            <a:off x="457200" y="1170432"/>
+            <a:ext cx="11277295" cy="5230368"/>
           </a:xfrm>
           <a:prstGeom prst="rect">
             <a:avLst/>
@@ -3952,522 +4268,153 @@
           <a:noFill/>
         </p:spPr>
         <p:txBody>
-          <a:bodyPr wrap="square" anchor="ctr"/>
-          <a:lstStyle/>
-          <a:p>
-            <a:pPr algn="ctr"/>
+          <a:bodyPr wrap="square">
+            <a:spAutoFit/>
+          </a:bodyPr>
+          <a:lstStyle/>
+          <a:p>
+            <a:pPr>
+              <a:spcAft>
+                <a:spcPts val="800"/>
+              </a:spcAft>
+            </a:pPr>
+            <a:r>
+              <a:rPr sz="1600" b="0" i="0">
+                <a:solidFill>
+                  <a:srgbClr val="333333"/>
+                </a:solidFill>
+                <a:latin typeface="Calibri"/>
+              </a:rPr>
+              <a:t>–   </a:t>
+            </a:r>
             <a:r>
               <a:rPr sz="1600" b="1" i="0">
                 <a:solidFill>
-                  <a:srgbClr val="FFFFFF"/>
-                </a:solidFill>
-                <a:latin typeface="Calibri"/>
-              </a:rPr>
-              <a:t>1</a:t>
-            </a:r>
-          </a:p>
-        </p:txBody>
-      </p:sp>
-      <p:sp>
-        <p:nvSpPr>
-          <p:cNvPr id="8" name="TextBox 7"/>
-          <p:cNvSpPr txBox="1"/>
-          <p:nvPr/>
-        </p:nvSpPr>
-        <p:spPr>
-          <a:xfrm>
-            <a:off x="1188720" y="1645920"/>
-            <a:ext cx="10271455" cy="886968"/>
-          </a:xfrm>
-          <a:prstGeom prst="rect">
-            <a:avLst/>
-          </a:prstGeom>
-          <a:noFill/>
-        </p:spPr>
-        <p:txBody>
-          <a:bodyPr wrap="square" anchor="ctr"/>
-          <a:lstStyle/>
-          <a:p>
-            <a:r>
-              <a:rPr sz="1500" b="1" i="0">
-                <a:solidFill>
-                  <a:srgbClr val="095292"/>
-                </a:solidFill>
-                <a:latin typeface="Calibri"/>
-              </a:rPr>
-              <a:t>Identificar 2 consultas frecuentes del PI.</a:t>
-            </a:r>
-          </a:p>
-        </p:txBody>
-      </p:sp>
-      <p:sp>
-        <p:nvSpPr>
-          <p:cNvPr id="9" name="Rounded Rectangle 8"/>
-          <p:cNvSpPr/>
-          <p:nvPr/>
-        </p:nvSpPr>
-        <p:spPr>
-          <a:xfrm>
-            <a:off x="457200" y="2697480"/>
-            <a:ext cx="11277295" cy="1051560"/>
-          </a:xfrm>
-          <a:prstGeom prst="roundRect">
-            <a:avLst>
-              <a:gd name="adj" fmla="val 12000"/>
-            </a:avLst>
-          </a:prstGeom>
-          <a:solidFill>
-            <a:srgbClr val="E8F4FA"/>
-          </a:solidFill>
-          <a:ln>
-            <a:noFill/>
-          </a:ln>
-        </p:spPr>
-        <p:style>
-          <a:lnRef idx="1">
-            <a:schemeClr val="accent1"/>
-          </a:lnRef>
-          <a:fillRef idx="3">
-            <a:schemeClr val="accent1"/>
-          </a:fillRef>
-          <a:effectRef idx="2">
-            <a:schemeClr val="accent1"/>
-          </a:effectRef>
-          <a:fontRef idx="minor">
-            <a:schemeClr val="lt1"/>
-          </a:fontRef>
-        </p:style>
-        <p:txBody>
-          <a:bodyPr rtlCol="0" anchor="ctr"/>
-          <a:lstStyle/>
-          <a:p>
-            <a:pPr algn="ctr"/>
-          </a:p>
-        </p:txBody>
-      </p:sp>
-      <p:sp>
-        <p:nvSpPr>
-          <p:cNvPr id="10" name="Rounded Rectangle 9"/>
-          <p:cNvSpPr/>
-          <p:nvPr/>
-        </p:nvSpPr>
-        <p:spPr>
-          <a:xfrm>
-            <a:off x="594360" y="3003804"/>
-            <a:ext cx="438912" cy="438912"/>
-          </a:xfrm>
-          <a:prstGeom prst="roundRect">
-            <a:avLst>
-              <a:gd name="adj" fmla="val 12000"/>
-            </a:avLst>
-          </a:prstGeom>
-          <a:solidFill>
-            <a:srgbClr val="095292"/>
-          </a:solidFill>
-          <a:ln>
-            <a:noFill/>
-          </a:ln>
-        </p:spPr>
-        <p:style>
-          <a:lnRef idx="1">
-            <a:schemeClr val="accent1"/>
-          </a:lnRef>
-          <a:fillRef idx="3">
-            <a:schemeClr val="accent1"/>
-          </a:fillRef>
-          <a:effectRef idx="2">
-            <a:schemeClr val="accent1"/>
-          </a:effectRef>
-          <a:fontRef idx="minor">
-            <a:schemeClr val="lt1"/>
-          </a:fontRef>
-        </p:style>
-        <p:txBody>
-          <a:bodyPr rtlCol="0" anchor="ctr"/>
-          <a:lstStyle/>
-          <a:p>
-            <a:pPr algn="ctr"/>
-          </a:p>
-        </p:txBody>
-      </p:sp>
-      <p:sp>
-        <p:nvSpPr>
-          <p:cNvPr id="11" name="TextBox 10"/>
-          <p:cNvSpPr txBox="1"/>
-          <p:nvPr/>
-        </p:nvSpPr>
-        <p:spPr>
-          <a:xfrm>
-            <a:off x="594360" y="3003804"/>
-            <a:ext cx="438912" cy="438912"/>
-          </a:xfrm>
-          <a:prstGeom prst="rect">
-            <a:avLst/>
-          </a:prstGeom>
-          <a:noFill/>
-        </p:spPr>
-        <p:txBody>
-          <a:bodyPr wrap="square" anchor="ctr"/>
-          <a:lstStyle/>
-          <a:p>
-            <a:pPr algn="ctr"/>
+                  <a:srgbClr val="333333"/>
+                </a:solidFill>
+                <a:latin typeface="Calibri"/>
+              </a:rPr>
+              <a:t>Por qué importa al PI:</a:t>
+            </a:r>
+            <a:r>
+              <a:rPr sz="1600" b="0" i="0">
+                <a:solidFill>
+                  <a:srgbClr val="333333"/>
+                </a:solidFill>
+                <a:latin typeface="Calibri"/>
+              </a:rPr>
+              <a:t> la rúbrica pide índices </a:t>
+            </a:r>
             <a:r>
               <a:rPr sz="1600" b="1" i="0">
                 <a:solidFill>
-                  <a:srgbClr val="FFFFFF"/>
-                </a:solidFill>
-                <a:latin typeface="Calibri"/>
-              </a:rPr>
-              <a:t>2</a:t>
-            </a:r>
-          </a:p>
-        </p:txBody>
-      </p:sp>
-      <p:sp>
-        <p:nvSpPr>
-          <p:cNvPr id="12" name="TextBox 11"/>
-          <p:cNvSpPr txBox="1"/>
-          <p:nvPr/>
-        </p:nvSpPr>
-        <p:spPr>
-          <a:xfrm>
-            <a:off x="1188720" y="2788920"/>
-            <a:ext cx="10271455" cy="886968"/>
-          </a:xfrm>
-          <a:prstGeom prst="rect">
-            <a:avLst/>
-          </a:prstGeom>
-          <a:noFill/>
-        </p:spPr>
-        <p:txBody>
-          <a:bodyPr wrap="square" anchor="ctr"/>
-          <a:lstStyle/>
-          <a:p>
-            <a:r>
-              <a:rPr sz="1500" b="1" i="0">
-                <a:solidFill>
-                  <a:srgbClr val="095292"/>
-                </a:solidFill>
-                <a:latin typeface="Calibri"/>
-              </a:rPr>
-              <a:t>Proponer y crear &gt;=2 indices con nombre claro.</a:t>
-            </a:r>
-          </a:p>
-        </p:txBody>
-      </p:sp>
-      <p:sp>
-        <p:nvSpPr>
-          <p:cNvPr id="13" name="Rounded Rectangle 12"/>
-          <p:cNvSpPr/>
-          <p:nvPr/>
-        </p:nvSpPr>
-        <p:spPr>
-          <a:xfrm>
-            <a:off x="457200" y="3840480"/>
-            <a:ext cx="11277295" cy="1051560"/>
-          </a:xfrm>
-          <a:prstGeom prst="roundRect">
-            <a:avLst>
-              <a:gd name="adj" fmla="val 12000"/>
-            </a:avLst>
-          </a:prstGeom>
-          <a:solidFill>
-            <a:srgbClr val="F2F2F2"/>
-          </a:solidFill>
-          <a:ln>
-            <a:noFill/>
-          </a:ln>
-        </p:spPr>
-        <p:style>
-          <a:lnRef idx="1">
-            <a:schemeClr val="accent1"/>
-          </a:lnRef>
-          <a:fillRef idx="3">
-            <a:schemeClr val="accent1"/>
-          </a:fillRef>
-          <a:effectRef idx="2">
-            <a:schemeClr val="accent1"/>
-          </a:effectRef>
-          <a:fontRef idx="minor">
-            <a:schemeClr val="lt1"/>
-          </a:fontRef>
-        </p:style>
-        <p:txBody>
-          <a:bodyPr rtlCol="0" anchor="ctr"/>
-          <a:lstStyle/>
-          <a:p>
-            <a:pPr algn="ctr"/>
-          </a:p>
-        </p:txBody>
-      </p:sp>
-      <p:sp>
-        <p:nvSpPr>
-          <p:cNvPr id="14" name="Rounded Rectangle 13"/>
-          <p:cNvSpPr/>
-          <p:nvPr/>
-        </p:nvSpPr>
-        <p:spPr>
-          <a:xfrm>
-            <a:off x="594360" y="4146804"/>
-            <a:ext cx="438912" cy="438912"/>
-          </a:xfrm>
-          <a:prstGeom prst="roundRect">
-            <a:avLst>
-              <a:gd name="adj" fmla="val 12000"/>
-            </a:avLst>
-          </a:prstGeom>
-          <a:solidFill>
-            <a:srgbClr val="095292"/>
-          </a:solidFill>
-          <a:ln>
-            <a:noFill/>
-          </a:ln>
-        </p:spPr>
-        <p:style>
-          <a:lnRef idx="1">
-            <a:schemeClr val="accent1"/>
-          </a:lnRef>
-          <a:fillRef idx="3">
-            <a:schemeClr val="accent1"/>
-          </a:fillRef>
-          <a:effectRef idx="2">
-            <a:schemeClr val="accent1"/>
-          </a:effectRef>
-          <a:fontRef idx="minor">
-            <a:schemeClr val="lt1"/>
-          </a:fontRef>
-        </p:style>
-        <p:txBody>
-          <a:bodyPr rtlCol="0" anchor="ctr"/>
-          <a:lstStyle/>
-          <a:p>
-            <a:pPr algn="ctr"/>
-          </a:p>
-        </p:txBody>
-      </p:sp>
-      <p:sp>
-        <p:nvSpPr>
-          <p:cNvPr id="15" name="TextBox 14"/>
-          <p:cNvSpPr txBox="1"/>
-          <p:nvPr/>
-        </p:nvSpPr>
-        <p:spPr>
-          <a:xfrm>
-            <a:off x="594360" y="4146804"/>
-            <a:ext cx="438912" cy="438912"/>
-          </a:xfrm>
-          <a:prstGeom prst="rect">
-            <a:avLst/>
-          </a:prstGeom>
-          <a:noFill/>
-        </p:spPr>
-        <p:txBody>
-          <a:bodyPr wrap="square" anchor="ctr"/>
-          <a:lstStyle/>
-          <a:p>
-            <a:pPr algn="ctr"/>
+                  <a:srgbClr val="333333"/>
+                </a:solidFill>
+                <a:latin typeface="Calibri"/>
+              </a:rPr>
+              <a:t>justificados</a:t>
+            </a:r>
+            <a:r>
+              <a:rPr sz="1600" b="0" i="0">
+                <a:solidFill>
+                  <a:srgbClr val="333333"/>
+                </a:solidFill>
+                <a:latin typeface="Calibri"/>
+              </a:rPr>
+              <a:t>, y una justificación es una consulta concreta más la evidencia del plan — no «indexé las columnas importantes».</a:t>
+            </a:r>
+          </a:p>
+          <a:p>
+            <a:pPr>
+              <a:spcAft>
+                <a:spcPts val="800"/>
+              </a:spcAft>
+            </a:pPr>
+            <a:r>
+              <a:rPr sz="1600" b="0" i="0">
+                <a:solidFill>
+                  <a:srgbClr val="333333"/>
+                </a:solidFill>
+                <a:latin typeface="Calibri"/>
+              </a:rPr>
+              <a:t>–   La agenda del día y la ficha del dueño son las dos pantallas que Huellitas abre </a:t>
+            </a:r>
             <a:r>
               <a:rPr sz="1600" b="1" i="0">
                 <a:solidFill>
-                  <a:srgbClr val="FFFFFF"/>
-                </a:solidFill>
-                <a:latin typeface="Calibri"/>
-              </a:rPr>
-              <a:t>3</a:t>
-            </a:r>
-          </a:p>
-        </p:txBody>
-      </p:sp>
-      <p:sp>
-        <p:nvSpPr>
-          <p:cNvPr id="16" name="TextBox 15"/>
-          <p:cNvSpPr txBox="1"/>
-          <p:nvPr/>
-        </p:nvSpPr>
-        <p:spPr>
-          <a:xfrm>
-            <a:off x="1188720" y="3931920"/>
-            <a:ext cx="10271455" cy="886968"/>
-          </a:xfrm>
-          <a:prstGeom prst="rect">
-            <a:avLst/>
-          </a:prstGeom>
-          <a:noFill/>
-        </p:spPr>
-        <p:txBody>
-          <a:bodyPr wrap="square" anchor="ctr"/>
-          <a:lstStyle/>
-          <a:p>
-            <a:r>
-              <a:rPr sz="1500" b="1" i="0">
-                <a:solidFill>
-                  <a:srgbClr val="095292"/>
-                </a:solidFill>
-                <a:latin typeface="Calibri"/>
-              </a:rPr>
-              <a:t>Justificar columna, cardinalidad y riesgo de sobre-indexar.</a:t>
-            </a:r>
-          </a:p>
-        </p:txBody>
-      </p:sp>
-      <p:sp>
-        <p:nvSpPr>
-          <p:cNvPr id="17" name="Rounded Rectangle 16"/>
-          <p:cNvSpPr/>
-          <p:nvPr/>
-        </p:nvSpPr>
-        <p:spPr>
-          <a:xfrm>
-            <a:off x="457200" y="4983480"/>
-            <a:ext cx="11277295" cy="1051560"/>
-          </a:xfrm>
-          <a:prstGeom prst="roundRect">
-            <a:avLst>
-              <a:gd name="adj" fmla="val 12000"/>
-            </a:avLst>
-          </a:prstGeom>
-          <a:solidFill>
-            <a:srgbClr val="E8F4FA"/>
-          </a:solidFill>
-          <a:ln>
-            <a:noFill/>
-          </a:ln>
-        </p:spPr>
-        <p:style>
-          <a:lnRef idx="1">
-            <a:schemeClr val="accent1"/>
-          </a:lnRef>
-          <a:fillRef idx="3">
-            <a:schemeClr val="accent1"/>
-          </a:fillRef>
-          <a:effectRef idx="2">
-            <a:schemeClr val="accent1"/>
-          </a:effectRef>
-          <a:fontRef idx="minor">
-            <a:schemeClr val="lt1"/>
-          </a:fontRef>
-        </p:style>
-        <p:txBody>
-          <a:bodyPr rtlCol="0" anchor="ctr"/>
-          <a:lstStyle/>
-          <a:p>
-            <a:pPr algn="ctr"/>
-          </a:p>
-        </p:txBody>
-      </p:sp>
-      <p:sp>
-        <p:nvSpPr>
-          <p:cNvPr id="18" name="Rounded Rectangle 17"/>
-          <p:cNvSpPr/>
-          <p:nvPr/>
-        </p:nvSpPr>
-        <p:spPr>
-          <a:xfrm>
-            <a:off x="594360" y="5289804"/>
-            <a:ext cx="438912" cy="438912"/>
-          </a:xfrm>
-          <a:prstGeom prst="roundRect">
-            <a:avLst>
-              <a:gd name="adj" fmla="val 12000"/>
-            </a:avLst>
-          </a:prstGeom>
-          <a:solidFill>
-            <a:srgbClr val="095292"/>
-          </a:solidFill>
-          <a:ln>
-            <a:noFill/>
-          </a:ln>
-        </p:spPr>
-        <p:style>
-          <a:lnRef idx="1">
-            <a:schemeClr val="accent1"/>
-          </a:lnRef>
-          <a:fillRef idx="3">
-            <a:schemeClr val="accent1"/>
-          </a:fillRef>
-          <a:effectRef idx="2">
-            <a:schemeClr val="accent1"/>
-          </a:effectRef>
-          <a:fontRef idx="minor">
-            <a:schemeClr val="lt1"/>
-          </a:fontRef>
-        </p:style>
-        <p:txBody>
-          <a:bodyPr rtlCol="0" anchor="ctr"/>
-          <a:lstStyle/>
-          <a:p>
-            <a:pPr algn="ctr"/>
-          </a:p>
-        </p:txBody>
-      </p:sp>
-      <p:sp>
-        <p:nvSpPr>
-          <p:cNvPr id="19" name="TextBox 18"/>
-          <p:cNvSpPr txBox="1"/>
-          <p:nvPr/>
-        </p:nvSpPr>
-        <p:spPr>
-          <a:xfrm>
-            <a:off x="594360" y="5289804"/>
-            <a:ext cx="438912" cy="438912"/>
-          </a:xfrm>
-          <a:prstGeom prst="rect">
-            <a:avLst/>
-          </a:prstGeom>
-          <a:noFill/>
-        </p:spPr>
-        <p:txBody>
-          <a:bodyPr wrap="square" anchor="ctr"/>
-          <a:lstStyle/>
-          <a:p>
-            <a:pPr algn="ctr"/>
+                  <a:srgbClr val="333333"/>
+                </a:solidFill>
+                <a:latin typeface="Calibri"/>
+              </a:rPr>
+              <a:t>todo el día</a:t>
+            </a:r>
+            <a:r>
+              <a:rPr sz="1600" b="0" i="0">
+                <a:solidFill>
+                  <a:srgbClr val="333333"/>
+                </a:solidFill>
+                <a:latin typeface="Calibri"/>
+              </a:rPr>
+              <a:t>: son las que pagan cada «Seq Scan» sobre 30.010 citas.</a:t>
+            </a:r>
+          </a:p>
+          <a:p>
+            <a:pPr>
+              <a:spcAft>
+                <a:spcPts val="800"/>
+              </a:spcAft>
+            </a:pPr>
+            <a:r>
+              <a:rPr sz="1600" b="0" i="0">
+                <a:solidFill>
+                  <a:srgbClr val="333333"/>
+                </a:solidFill>
+                <a:latin typeface="Calibri"/>
+              </a:rPr>
+              <a:t>–   Indexar de más también cuesta: cada índice se mantiene en </a:t>
+            </a:r>
             <a:r>
               <a:rPr sz="1600" b="1" i="0">
                 <a:solidFill>
-                  <a:srgbClr val="FFFFFF"/>
-                </a:solidFill>
-                <a:latin typeface="Calibri"/>
-              </a:rPr>
-              <a:t>4</a:t>
-            </a:r>
-          </a:p>
-        </p:txBody>
-      </p:sp>
-      <p:sp>
-        <p:nvSpPr>
-          <p:cNvPr id="20" name="TextBox 19"/>
-          <p:cNvSpPr txBox="1"/>
-          <p:nvPr/>
-        </p:nvSpPr>
-        <p:spPr>
-          <a:xfrm>
-            <a:off x="1188720" y="5074920"/>
-            <a:ext cx="10271455" cy="886968"/>
-          </a:xfrm>
-          <a:prstGeom prst="rect">
-            <a:avLst/>
-          </a:prstGeom>
-          <a:noFill/>
-        </p:spPr>
-        <p:txBody>
-          <a:bodyPr wrap="square" anchor="ctr"/>
-          <a:lstStyle/>
-          <a:p>
-            <a:r>
-              <a:rPr sz="1500" b="1" i="0">
-                <a:solidFill>
-                  <a:srgbClr val="095292"/>
-                </a:solidFill>
-                <a:latin typeface="Calibri"/>
-              </a:rPr>
-              <a:t>Opcional: diagrama tabla caliente -&gt; indices en Excalidraw.</a:t>
-            </a:r>
-          </a:p>
-        </p:txBody>
-      </p:sp>
-      <p:sp>
-        <p:nvSpPr>
-          <p:cNvPr id="21" name="TextBox 20"/>
+                  <a:srgbClr val="333333"/>
+                </a:solidFill>
+                <a:latin typeface="Calibri"/>
+              </a:rPr>
+              <a:t>cada cita agendada</a:t>
+            </a:r>
+            <a:r>
+              <a:rPr sz="1600" b="0" i="0">
+                <a:solidFill>
+                  <a:srgbClr val="333333"/>
+                </a:solidFill>
+                <a:latin typeface="Calibri"/>
+              </a:rPr>
+              <a:t>. Por eso hoy el </a:t>
+            </a:r>
+            <a:r>
+              <a:rPr sz="1600" b="1" i="0">
+                <a:solidFill>
+                  <a:srgbClr val="333333"/>
+                </a:solidFill>
+                <a:latin typeface="Calibri"/>
+              </a:rPr>
+              <a:t>veredicto</a:t>
+            </a:r>
+            <a:r>
+              <a:rPr sz="1600" b="0" i="0">
+                <a:solidFill>
+                  <a:srgbClr val="333333"/>
+                </a:solidFill>
+                <a:latin typeface="Calibri"/>
+              </a:rPr>
+              <a:t> de cada índice vale tantos puntos como crearlo.</a:t>
+            </a:r>
+          </a:p>
+        </p:txBody>
+      </p:sp>
+      <p:sp>
+        <p:nvSpPr>
+          <p:cNvPr id="6" name="TextBox 5"/>
           <p:cNvSpPr txBox="1"/>
           <p:nvPr/>
         </p:nvSpPr>
@@ -4641,154 +4588,21 @@
                 </a:solidFill>
                 <a:latin typeface="Calibri"/>
               </a:rPr>
-              <a:t>Taller PI VetCare — pistas (checklist vacio)</a:t>
-            </a:r>
-          </a:p>
-        </p:txBody>
-      </p:sp>
-      <p:sp>
-        <p:nvSpPr>
-          <p:cNvPr id="5" name="Rounded Rectangle 4"/>
-          <p:cNvSpPr/>
-          <p:nvPr/>
-        </p:nvSpPr>
-        <p:spPr>
-          <a:xfrm>
-            <a:off x="457200" y="1261872"/>
-            <a:ext cx="11277295" cy="566928"/>
-          </a:xfrm>
-          <a:prstGeom prst="roundRect">
-            <a:avLst>
-              <a:gd name="adj" fmla="val 12000"/>
-            </a:avLst>
-          </a:prstGeom>
-          <a:solidFill>
-            <a:srgbClr val="F2F2F2"/>
-          </a:solidFill>
-          <a:ln>
-            <a:noFill/>
-          </a:ln>
-        </p:spPr>
-        <p:style>
-          <a:lnRef idx="1">
-            <a:schemeClr val="accent1"/>
-          </a:lnRef>
-          <a:fillRef idx="3">
-            <a:schemeClr val="accent1"/>
-          </a:fillRef>
-          <a:effectRef idx="2">
-            <a:schemeClr val="accent1"/>
-          </a:effectRef>
-          <a:fontRef idx="minor">
-            <a:schemeClr val="lt1"/>
-          </a:fontRef>
-        </p:style>
-        <p:txBody>
-          <a:bodyPr rtlCol="0" anchor="ctr"/>
-          <a:lstStyle/>
-          <a:p>
-            <a:pPr algn="ctr"/>
-          </a:p>
-        </p:txBody>
-      </p:sp>
-      <p:sp>
-        <p:nvSpPr>
-          <p:cNvPr id="6" name="Rectangle 5"/>
-          <p:cNvSpPr/>
-          <p:nvPr/>
-        </p:nvSpPr>
-        <p:spPr>
-          <a:xfrm>
-            <a:off x="640080" y="1408175"/>
-            <a:ext cx="274320" cy="274320"/>
-          </a:xfrm>
-          <a:prstGeom prst="rect">
-            <a:avLst/>
-          </a:prstGeom>
-          <a:solidFill>
-            <a:srgbClr val="FFFFFF"/>
-          </a:solidFill>
-          <a:ln>
-            <a:solidFill>
-              <a:srgbClr val="333333"/>
-            </a:solidFill>
-          </a:ln>
-        </p:spPr>
-        <p:style>
-          <a:lnRef idx="1">
-            <a:schemeClr val="accent1"/>
-          </a:lnRef>
-          <a:fillRef idx="3">
-            <a:schemeClr val="accent1"/>
-          </a:fillRef>
-          <a:effectRef idx="2">
-            <a:schemeClr val="accent1"/>
-          </a:effectRef>
-          <a:fontRef idx="minor">
-            <a:schemeClr val="lt1"/>
-          </a:fontRef>
-        </p:style>
-        <p:txBody>
-          <a:bodyPr rtlCol="0" anchor="ctr"/>
-          <a:lstStyle/>
-          <a:p>
-            <a:pPr algn="ctr"/>
-          </a:p>
-        </p:txBody>
-      </p:sp>
-      <p:sp>
-        <p:nvSpPr>
-          <p:cNvPr id="7" name="Rectangle 6"/>
-          <p:cNvSpPr/>
-          <p:nvPr/>
-        </p:nvSpPr>
-        <p:spPr>
-          <a:xfrm>
-            <a:off x="640080" y="1408175"/>
-            <a:ext cx="73152" cy="274320"/>
-          </a:xfrm>
-          <a:prstGeom prst="rect">
-            <a:avLst/>
-          </a:prstGeom>
-          <a:solidFill>
-            <a:srgbClr val="269CCB"/>
-          </a:solidFill>
-          <a:ln>
-            <a:noFill/>
-          </a:ln>
-        </p:spPr>
-        <p:style>
-          <a:lnRef idx="1">
-            <a:schemeClr val="accent1"/>
-          </a:lnRef>
-          <a:fillRef idx="3">
-            <a:schemeClr val="accent1"/>
-          </a:fillRef>
-          <a:effectRef idx="2">
-            <a:schemeClr val="accent1"/>
-          </a:effectRef>
-          <a:fontRef idx="minor">
-            <a:schemeClr val="lt1"/>
-          </a:fontRef>
-        </p:style>
-        <p:txBody>
-          <a:bodyPr rtlCol="0" anchor="ctr"/>
-          <a:lstStyle/>
-          <a:p>
-            <a:pPr algn="ctr"/>
-          </a:p>
-        </p:txBody>
-      </p:sp>
-      <p:sp>
-        <p:nvSpPr>
-          <p:cNvPr id="8" name="TextBox 7"/>
+              <a:t>Taller PI VetCare — objetivo y criterios</a:t>
+            </a:r>
+          </a:p>
+        </p:txBody>
+      </p:sp>
+      <p:sp>
+        <p:nvSpPr>
+          <p:cNvPr id="5" name="TextBox 4"/>
           <p:cNvSpPr txBox="1"/>
           <p:nvPr/>
         </p:nvSpPr>
         <p:spPr>
           <a:xfrm>
-            <a:off x="1097280" y="1353312"/>
-            <a:ext cx="10362895" cy="402336"/>
+            <a:off x="457200" y="1170432"/>
+            <a:ext cx="11277295" cy="5230368"/>
           </a:xfrm>
           <a:prstGeom prst="rect">
             <a:avLst/>
@@ -4796,9 +4610,16 @@
           <a:noFill/>
         </p:spPr>
         <p:txBody>
-          <a:bodyPr wrap="square" anchor="ctr"/>
-          <a:lstStyle/>
-          <a:p>
+          <a:bodyPr wrap="square">
+            <a:spAutoFit/>
+          </a:bodyPr>
+          <a:lstStyle/>
+          <a:p>
+            <a:pPr>
+              <a:spcAft>
+                <a:spcPts val="800"/>
+              </a:spcAft>
+            </a:pPr>
             <a:r>
               <a:rPr sz="1500" b="0" i="0">
                 <a:solidFill>
@@ -4806,164 +4627,17 @@
                 </a:solidFill>
                 <a:latin typeface="Calibri"/>
               </a:rPr>
-              <a:t>□ Nombre legible?</a:t>
-            </a:r>
-          </a:p>
-        </p:txBody>
-      </p:sp>
-      <p:sp>
-        <p:nvSpPr>
-          <p:cNvPr id="9" name="Rounded Rectangle 8"/>
-          <p:cNvSpPr/>
-          <p:nvPr/>
-        </p:nvSpPr>
-        <p:spPr>
-          <a:xfrm>
-            <a:off x="457200" y="1938528"/>
-            <a:ext cx="11277295" cy="566928"/>
-          </a:xfrm>
-          <a:prstGeom prst="roundRect">
-            <a:avLst>
-              <a:gd name="adj" fmla="val 12000"/>
-            </a:avLst>
-          </a:prstGeom>
-          <a:solidFill>
-            <a:srgbClr val="F2F2F2"/>
-          </a:solidFill>
-          <a:ln>
-            <a:noFill/>
-          </a:ln>
-        </p:spPr>
-        <p:style>
-          <a:lnRef idx="1">
-            <a:schemeClr val="accent1"/>
-          </a:lnRef>
-          <a:fillRef idx="3">
-            <a:schemeClr val="accent1"/>
-          </a:fillRef>
-          <a:effectRef idx="2">
-            <a:schemeClr val="accent1"/>
-          </a:effectRef>
-          <a:fontRef idx="minor">
-            <a:schemeClr val="lt1"/>
-          </a:fontRef>
-        </p:style>
-        <p:txBody>
-          <a:bodyPr rtlCol="0" anchor="ctr"/>
-          <a:lstStyle/>
-          <a:p>
-            <a:pPr algn="ctr"/>
-          </a:p>
-        </p:txBody>
-      </p:sp>
-      <p:sp>
-        <p:nvSpPr>
-          <p:cNvPr id="10" name="Rectangle 9"/>
-          <p:cNvSpPr/>
-          <p:nvPr/>
-        </p:nvSpPr>
-        <p:spPr>
-          <a:xfrm>
-            <a:off x="640080" y="2084832"/>
-            <a:ext cx="274320" cy="274320"/>
-          </a:xfrm>
-          <a:prstGeom prst="rect">
-            <a:avLst/>
-          </a:prstGeom>
-          <a:solidFill>
-            <a:srgbClr val="FFFFFF"/>
-          </a:solidFill>
-          <a:ln>
-            <a:solidFill>
-              <a:srgbClr val="333333"/>
-            </a:solidFill>
-          </a:ln>
-        </p:spPr>
-        <p:style>
-          <a:lnRef idx="1">
-            <a:schemeClr val="accent1"/>
-          </a:lnRef>
-          <a:fillRef idx="3">
-            <a:schemeClr val="accent1"/>
-          </a:fillRef>
-          <a:effectRef idx="2">
-            <a:schemeClr val="accent1"/>
-          </a:effectRef>
-          <a:fontRef idx="minor">
-            <a:schemeClr val="lt1"/>
-          </a:fontRef>
-        </p:style>
-        <p:txBody>
-          <a:bodyPr rtlCol="0" anchor="ctr"/>
-          <a:lstStyle/>
-          <a:p>
-            <a:pPr algn="ctr"/>
-          </a:p>
-        </p:txBody>
-      </p:sp>
-      <p:sp>
-        <p:nvSpPr>
-          <p:cNvPr id="11" name="Rectangle 10"/>
-          <p:cNvSpPr/>
-          <p:nvPr/>
-        </p:nvSpPr>
-        <p:spPr>
-          <a:xfrm>
-            <a:off x="640080" y="2084832"/>
-            <a:ext cx="73152" cy="274320"/>
-          </a:xfrm>
-          <a:prstGeom prst="rect">
-            <a:avLst/>
-          </a:prstGeom>
-          <a:solidFill>
-            <a:srgbClr val="269CCB"/>
-          </a:solidFill>
-          <a:ln>
-            <a:noFill/>
-          </a:ln>
-        </p:spPr>
-        <p:style>
-          <a:lnRef idx="1">
-            <a:schemeClr val="accent1"/>
-          </a:lnRef>
-          <a:fillRef idx="3">
-            <a:schemeClr val="accent1"/>
-          </a:fillRef>
-          <a:effectRef idx="2">
-            <a:schemeClr val="accent1"/>
-          </a:effectRef>
-          <a:fontRef idx="minor">
-            <a:schemeClr val="lt1"/>
-          </a:fontRef>
-        </p:style>
-        <p:txBody>
-          <a:bodyPr rtlCol="0" anchor="ctr"/>
-          <a:lstStyle/>
-          <a:p>
-            <a:pPr algn="ctr"/>
-          </a:p>
-        </p:txBody>
-      </p:sp>
-      <p:sp>
-        <p:nvSpPr>
-          <p:cNvPr id="12" name="TextBox 11"/>
-          <p:cNvSpPr txBox="1"/>
-          <p:nvPr/>
-        </p:nvSpPr>
-        <p:spPr>
-          <a:xfrm>
-            <a:off x="1097280" y="2029968"/>
-            <a:ext cx="10362895" cy="402336"/>
-          </a:xfrm>
-          <a:prstGeom prst="rect">
-            <a:avLst/>
-          </a:prstGeom>
-          <a:noFill/>
-        </p:spPr>
-        <p:txBody>
-          <a:bodyPr wrap="square" anchor="ctr"/>
-          <a:lstStyle/>
-          <a:p>
+              <a:t>–   </a:t>
+            </a:r>
+            <a:r>
+              <a:rPr sz="1500" b="1" i="0">
+                <a:solidFill>
+                  <a:srgbClr val="333333"/>
+                </a:solidFill>
+                <a:latin typeface="Calibri"/>
+              </a:rPr>
+              <a:t>Objetivo:</a:t>
+            </a:r>
             <a:r>
               <a:rPr sz="1500" b="0" i="0">
                 <a:solidFill>
@@ -4971,164 +4645,15 @@
                 </a:solidFill>
                 <a:latin typeface="Calibri"/>
               </a:rPr>
-              <a:t>□ Atado a consulta?</a:t>
-            </a:r>
-          </a:p>
-        </p:txBody>
-      </p:sp>
-      <p:sp>
-        <p:nvSpPr>
-          <p:cNvPr id="13" name="Rounded Rectangle 12"/>
-          <p:cNvSpPr/>
-          <p:nvPr/>
-        </p:nvSpPr>
-        <p:spPr>
-          <a:xfrm>
-            <a:off x="457200" y="2615184"/>
-            <a:ext cx="11277295" cy="566928"/>
-          </a:xfrm>
-          <a:prstGeom prst="roundRect">
-            <a:avLst>
-              <a:gd name="adj" fmla="val 12000"/>
-            </a:avLst>
-          </a:prstGeom>
-          <a:solidFill>
-            <a:srgbClr val="F2F2F2"/>
-          </a:solidFill>
-          <a:ln>
-            <a:noFill/>
-          </a:ln>
-        </p:spPr>
-        <p:style>
-          <a:lnRef idx="1">
-            <a:schemeClr val="accent1"/>
-          </a:lnRef>
-          <a:fillRef idx="3">
-            <a:schemeClr val="accent1"/>
-          </a:fillRef>
-          <a:effectRef idx="2">
-            <a:schemeClr val="accent1"/>
-          </a:effectRef>
-          <a:fontRef idx="minor">
-            <a:schemeClr val="lt1"/>
-          </a:fontRef>
-        </p:style>
-        <p:txBody>
-          <a:bodyPr rtlCol="0" anchor="ctr"/>
-          <a:lstStyle/>
-          <a:p>
-            <a:pPr algn="ctr"/>
-          </a:p>
-        </p:txBody>
-      </p:sp>
-      <p:sp>
-        <p:nvSpPr>
-          <p:cNvPr id="14" name="Rectangle 13"/>
-          <p:cNvSpPr/>
-          <p:nvPr/>
-        </p:nvSpPr>
-        <p:spPr>
-          <a:xfrm>
-            <a:off x="640080" y="2761488"/>
-            <a:ext cx="274320" cy="274320"/>
-          </a:xfrm>
-          <a:prstGeom prst="rect">
-            <a:avLst/>
-          </a:prstGeom>
-          <a:solidFill>
-            <a:srgbClr val="FFFFFF"/>
-          </a:solidFill>
-          <a:ln>
-            <a:solidFill>
-              <a:srgbClr val="333333"/>
-            </a:solidFill>
-          </a:ln>
-        </p:spPr>
-        <p:style>
-          <a:lnRef idx="1">
-            <a:schemeClr val="accent1"/>
-          </a:lnRef>
-          <a:fillRef idx="3">
-            <a:schemeClr val="accent1"/>
-          </a:fillRef>
-          <a:effectRef idx="2">
-            <a:schemeClr val="accent1"/>
-          </a:effectRef>
-          <a:fontRef idx="minor">
-            <a:schemeClr val="lt1"/>
-          </a:fontRef>
-        </p:style>
-        <p:txBody>
-          <a:bodyPr rtlCol="0" anchor="ctr"/>
-          <a:lstStyle/>
-          <a:p>
-            <a:pPr algn="ctr"/>
-          </a:p>
-        </p:txBody>
-      </p:sp>
-      <p:sp>
-        <p:nvSpPr>
-          <p:cNvPr id="15" name="Rectangle 14"/>
-          <p:cNvSpPr/>
-          <p:nvPr/>
-        </p:nvSpPr>
-        <p:spPr>
-          <a:xfrm>
-            <a:off x="640080" y="2761488"/>
-            <a:ext cx="73152" cy="274320"/>
-          </a:xfrm>
-          <a:prstGeom prst="rect">
-            <a:avLst/>
-          </a:prstGeom>
-          <a:solidFill>
-            <a:srgbClr val="269CCB"/>
-          </a:solidFill>
-          <a:ln>
-            <a:noFill/>
-          </a:ln>
-        </p:spPr>
-        <p:style>
-          <a:lnRef idx="1">
-            <a:schemeClr val="accent1"/>
-          </a:lnRef>
-          <a:fillRef idx="3">
-            <a:schemeClr val="accent1"/>
-          </a:fillRef>
-          <a:effectRef idx="2">
-            <a:schemeClr val="accent1"/>
-          </a:effectRef>
-          <a:fontRef idx="minor">
-            <a:schemeClr val="lt1"/>
-          </a:fontRef>
-        </p:style>
-        <p:txBody>
-          <a:bodyPr rtlCol="0" anchor="ctr"/>
-          <a:lstStyle/>
-          <a:p>
-            <a:pPr algn="ctr"/>
-          </a:p>
-        </p:txBody>
-      </p:sp>
-      <p:sp>
-        <p:nvSpPr>
-          <p:cNvPr id="16" name="TextBox 15"/>
-          <p:cNvSpPr txBox="1"/>
-          <p:nvPr/>
-        </p:nvSpPr>
-        <p:spPr>
-          <a:xfrm>
-            <a:off x="1097280" y="2706624"/>
-            <a:ext cx="10362895" cy="402336"/>
-          </a:xfrm>
-          <a:prstGeom prst="rect">
-            <a:avLst/>
-          </a:prstGeom>
-          <a:noFill/>
-        </p:spPr>
-        <p:txBody>
-          <a:bodyPr wrap="square" anchor="ctr"/>
-          <a:lstStyle/>
-          <a:p>
+              <a:t> Tres índices creados con nombre exacto (uno parcial) y probados con EXPLAIN antes y después, el experimento del orden de columnas en un índice compuesto, el histórico particionado por año con su poda demostrada, y la tabla de justificación que va al informe.</a:t>
+            </a:r>
+          </a:p>
+          <a:p>
+            <a:pPr>
+              <a:spcAft>
+                <a:spcPts val="800"/>
+              </a:spcAft>
+            </a:pPr>
             <a:r>
               <a:rPr sz="1500" b="0" i="0">
                 <a:solidFill>
@@ -5136,14 +4661,398 @@
                 </a:solidFill>
                 <a:latin typeface="Calibri"/>
               </a:rPr>
-              <a:t>□ Indexar todo? (no)</a:t>
-            </a:r>
-          </a:p>
-        </p:txBody>
-      </p:sp>
-      <p:sp>
-        <p:nvSpPr>
-          <p:cNvPr id="17" name="TextBox 16"/>
+              <a:t>–   </a:t>
+            </a:r>
+            <a:r>
+              <a:rPr sz="1500" b="1" i="0">
+                <a:solidFill>
+                  <a:srgbClr val="333333"/>
+                </a:solidFill>
+                <a:latin typeface="Calibri"/>
+              </a:rPr>
+              <a:t>Exito:</a:t>
+            </a:r>
+            <a:r>
+              <a:rPr sz="1500" b="0" i="0">
+                <a:solidFill>
+                  <a:srgbClr val="333333"/>
+                </a:solidFill>
+                <a:latin typeface="Calibri"/>
+              </a:rPr>
+              <a:t> La línea base medida </a:t>
+            </a:r>
+            <a:r>
+              <a:rPr sz="1500" b="1" i="0">
+                <a:solidFill>
+                  <a:srgbClr val="333333"/>
+                </a:solidFill>
+                <a:latin typeface="Calibri"/>
+              </a:rPr>
+              <a:t>antes</a:t>
+            </a:r>
+            <a:r>
+              <a:rPr sz="1500" b="0" i="0">
+                <a:solidFill>
+                  <a:srgbClr val="333333"/>
+                </a:solidFill>
+                <a:latin typeface="Calibri"/>
+              </a:rPr>
+              <a:t> de indexar: «EXPLAIN ANALYZE» de las dos consultas frecuentes con «Seq Scan» a la vista.</a:t>
+            </a:r>
+          </a:p>
+          <a:p>
+            <a:pPr>
+              <a:spcAft>
+                <a:spcPts val="800"/>
+              </a:spcAft>
+            </a:pPr>
+            <a:r>
+              <a:rPr sz="1500" b="0" i="0">
+                <a:solidFill>
+                  <a:srgbClr val="333333"/>
+                </a:solidFill>
+                <a:latin typeface="Calibri"/>
+              </a:rPr>
+              <a:t>–   </a:t>
+            </a:r>
+            <a:r>
+              <a:rPr sz="1500" b="1" i="0">
+                <a:solidFill>
+                  <a:srgbClr val="333333"/>
+                </a:solidFill>
+                <a:latin typeface="Calibri"/>
+              </a:rPr>
+              <a:t>Exito:</a:t>
+            </a:r>
+            <a:r>
+              <a:rPr sz="1500" b="0" i="0">
+                <a:solidFill>
+                  <a:srgbClr val="333333"/>
+                </a:solidFill>
+                <a:latin typeface="Calibri"/>
+              </a:rPr>
+              <a:t> Los </a:t>
+            </a:r>
+            <a:r>
+              <a:rPr sz="1500" b="1" i="0">
+                <a:solidFill>
+                  <a:srgbClr val="333333"/>
+                </a:solidFill>
+                <a:latin typeface="Calibri"/>
+              </a:rPr>
+              <a:t>tres</a:t>
+            </a:r>
+            <a:r>
+              <a:rPr sz="1500" b="0" i="0">
+                <a:solidFill>
+                  <a:srgbClr val="333333"/>
+                </a:solidFill>
+                <a:latin typeface="Calibri"/>
+              </a:rPr>
+              <a:t> índices con el nombre exacto — «idx_cita_fecha_hora», «idx_mascota_dueno» y el </a:t>
+            </a:r>
+            <a:r>
+              <a:rPr sz="1500" b="1" i="0">
+                <a:solidFill>
+                  <a:srgbClr val="333333"/>
+                </a:solidFill>
+                <a:latin typeface="Calibri"/>
+              </a:rPr>
+              <a:t>parcial</a:t>
+            </a:r>
+            <a:r>
+              <a:rPr sz="1500" b="0" i="0">
+                <a:solidFill>
+                  <a:srgbClr val="333333"/>
+                </a:solidFill>
+                <a:latin typeface="Calibri"/>
+              </a:rPr>
+              <a:t> «idx_cita_programada_fecha» con su «WHERE estado = 'PROGRAMADA'» — y «ANALYZE» corrido después.</a:t>
+            </a:r>
+          </a:p>
+          <a:p>
+            <a:pPr>
+              <a:spcAft>
+                <a:spcPts val="800"/>
+              </a:spcAft>
+            </a:pPr>
+            <a:r>
+              <a:rPr sz="1500" b="0" i="0">
+                <a:solidFill>
+                  <a:srgbClr val="333333"/>
+                </a:solidFill>
+                <a:latin typeface="Calibri"/>
+              </a:rPr>
+              <a:t>–   </a:t>
+            </a:r>
+            <a:r>
+              <a:rPr sz="1500" b="1" i="0">
+                <a:solidFill>
+                  <a:srgbClr val="333333"/>
+                </a:solidFill>
+                <a:latin typeface="Calibri"/>
+              </a:rPr>
+              <a:t>Exito:</a:t>
+            </a:r>
+            <a:r>
+              <a:rPr sz="1500" b="0" i="0">
+                <a:solidFill>
+                  <a:srgbClr val="333333"/>
+                </a:solidFill>
+                <a:latin typeface="Calibri"/>
+              </a:rPr>
+              <a:t> Los «EXPLAIN» repetidos mostrando «Index Scan» o «Bitmap Index Scan», y dicho </a:t>
+            </a:r>
+            <a:r>
+              <a:rPr sz="1500" b="1" i="0">
+                <a:solidFill>
+                  <a:srgbClr val="333333"/>
+                </a:solidFill>
+                <a:latin typeface="Calibri"/>
+              </a:rPr>
+              <a:t>cuál</a:t>
+            </a:r>
+            <a:r>
+              <a:rPr sz="1500" b="0" i="0">
+                <a:solidFill>
+                  <a:srgbClr val="333333"/>
+                </a:solidFill>
+                <a:latin typeface="Calibri"/>
+              </a:rPr>
+              <a:t> de los dos índices sobre «fecha_hora» eligió el planeador.</a:t>
+            </a:r>
+          </a:p>
+          <a:p>
+            <a:pPr>
+              <a:spcAft>
+                <a:spcPts val="800"/>
+              </a:spcAft>
+            </a:pPr>
+            <a:r>
+              <a:rPr sz="1500" b="0" i="0">
+                <a:solidFill>
+                  <a:srgbClr val="333333"/>
+                </a:solidFill>
+                <a:latin typeface="Calibri"/>
+              </a:rPr>
+              <a:t>–   </a:t>
+            </a:r>
+            <a:r>
+              <a:rPr sz="1500" b="1" i="0">
+                <a:solidFill>
+                  <a:srgbClr val="333333"/>
+                </a:solidFill>
+                <a:latin typeface="Calibri"/>
+              </a:rPr>
+              <a:t>Exito:</a:t>
+            </a:r>
+            <a:r>
+              <a:rPr sz="1500" b="0" i="0">
+                <a:solidFill>
+                  <a:srgbClr val="333333"/>
+                </a:solidFill>
+                <a:latin typeface="Calibri"/>
+              </a:rPr>
+              <a:t> El experimento del orden de columnas: los dos índices compuestos, las </a:t>
+            </a:r>
+            <a:r>
+              <a:rPr sz="1500" b="1" i="0">
+                <a:solidFill>
+                  <a:srgbClr val="333333"/>
+                </a:solidFill>
+                <a:latin typeface="Calibri"/>
+              </a:rPr>
+              <a:t>tres</a:t>
+            </a:r>
+            <a:r>
+              <a:rPr sz="1500" b="0" i="0">
+                <a:solidFill>
+                  <a:srgbClr val="333333"/>
+                </a:solidFill>
+                <a:latin typeface="Calibri"/>
+              </a:rPr>
+              <a:t> consultas medidas, el «DROP INDEX» que fuerza la comparación y la línea «-- CONCLUSION:» con la regla de igualdad antes que rango.</a:t>
+            </a:r>
+          </a:p>
+          <a:p>
+            <a:pPr>
+              <a:spcAft>
+                <a:spcPts val="800"/>
+              </a:spcAft>
+            </a:pPr>
+            <a:r>
+              <a:rPr sz="1500" b="0" i="0">
+                <a:solidFill>
+                  <a:srgbClr val="333333"/>
+                </a:solidFill>
+                <a:latin typeface="Calibri"/>
+              </a:rPr>
+              <a:t>–   </a:t>
+            </a:r>
+            <a:r>
+              <a:rPr sz="1500" b="1" i="0">
+                <a:solidFill>
+                  <a:srgbClr val="333333"/>
+                </a:solidFill>
+                <a:latin typeface="Calibri"/>
+              </a:rPr>
+              <a:t>Exito:</a:t>
+            </a:r>
+            <a:r>
+              <a:rPr sz="1500" b="0" i="0">
+                <a:solidFill>
+                  <a:srgbClr val="333333"/>
+                </a:solidFill>
+                <a:latin typeface="Calibri"/>
+              </a:rPr>
+              <a:t> «cita_hist» particionada por año: PK que </a:t>
+            </a:r>
+            <a:r>
+              <a:rPr sz="1500" b="1" i="0">
+                <a:solidFill>
+                  <a:srgbClr val="333333"/>
+                </a:solidFill>
+                <a:latin typeface="Calibri"/>
+              </a:rPr>
+              <a:t>incluye la columna de partición</a:t>
+            </a:r>
+            <a:r>
+              <a:rPr sz="1500" b="0" i="0">
+                <a:solidFill>
+                  <a:srgbClr val="333333"/>
+                </a:solidFill>
+                <a:latin typeface="Calibri"/>
+              </a:rPr>
+              <a:t>, las dos particiones sin solaparse, la migración completa y la </a:t>
+            </a:r>
+            <a:r>
+              <a:rPr sz="1500" b="1" i="0">
+                <a:solidFill>
+                  <a:srgbClr val="333333"/>
+                </a:solidFill>
+                <a:latin typeface="Calibri"/>
+              </a:rPr>
+              <a:t>poda</a:t>
+            </a:r>
+            <a:r>
+              <a:rPr sz="1500" b="0" i="0">
+                <a:solidFill>
+                  <a:srgbClr val="333333"/>
+                </a:solidFill>
+                <a:latin typeface="Calibri"/>
+              </a:rPr>
+              <a:t> evidenciada en el plan.</a:t>
+            </a:r>
+          </a:p>
+          <a:p>
+            <a:pPr>
+              <a:spcAft>
+                <a:spcPts val="800"/>
+              </a:spcAft>
+            </a:pPr>
+            <a:r>
+              <a:rPr sz="1500" b="0" i="0">
+                <a:solidFill>
+                  <a:srgbClr val="333333"/>
+                </a:solidFill>
+                <a:latin typeface="Calibri"/>
+              </a:rPr>
+              <a:t>–   </a:t>
+            </a:r>
+            <a:r>
+              <a:rPr sz="1500" b="1" i="0">
+                <a:solidFill>
+                  <a:srgbClr val="333333"/>
+                </a:solidFill>
+                <a:latin typeface="Calibri"/>
+              </a:rPr>
+              <a:t>Exito:</a:t>
+            </a:r>
+            <a:r>
+              <a:rPr sz="1500" b="0" i="0">
+                <a:solidFill>
+                  <a:srgbClr val="333333"/>
+                </a:solidFill>
+                <a:latin typeface="Calibri"/>
+              </a:rPr>
+              <a:t> La tabla de justificación con sus </a:t>
+            </a:r>
+            <a:r>
+              <a:rPr sz="1500" b="1" i="0">
+                <a:solidFill>
+                  <a:srgbClr val="333333"/>
+                </a:solidFill>
+                <a:latin typeface="Calibri"/>
+              </a:rPr>
+              <a:t>7 columnas</a:t>
+            </a:r>
+            <a:r>
+              <a:rPr sz="1500" b="0" i="0">
+                <a:solidFill>
+                  <a:srgbClr val="333333"/>
+                </a:solidFill>
+                <a:latin typeface="Calibri"/>
+              </a:rPr>
+              <a:t> y una fila por índice (mínimo 3), la regla de sobre-indexación y el veredicto de particionamiento con </a:t>
+            </a:r>
+            <a:r>
+              <a:rPr sz="1500" b="1" i="0">
+                <a:solidFill>
+                  <a:srgbClr val="333333"/>
+                </a:solidFill>
+                <a:latin typeface="Calibri"/>
+              </a:rPr>
+              <a:t>tus números</a:t>
+            </a:r>
+            <a:r>
+              <a:rPr sz="1500" b="0" i="0">
+                <a:solidFill>
+                  <a:srgbClr val="333333"/>
+                </a:solidFill>
+                <a:latin typeface="Calibri"/>
+              </a:rPr>
+              <a:t>.</a:t>
+            </a:r>
+          </a:p>
+          <a:p>
+            <a:pPr>
+              <a:spcAft>
+                <a:spcPts val="800"/>
+              </a:spcAft>
+            </a:pPr>
+            <a:r>
+              <a:rPr sz="1500" b="0" i="0">
+                <a:solidFill>
+                  <a:srgbClr val="333333"/>
+                </a:solidFill>
+                <a:latin typeface="Calibri"/>
+              </a:rPr>
+              <a:t>–   </a:t>
+            </a:r>
+            <a:r>
+              <a:rPr sz="1500" b="1" i="0">
+                <a:solidFill>
+                  <a:srgbClr val="333333"/>
+                </a:solidFill>
+                <a:latin typeface="Calibri"/>
+              </a:rPr>
+              <a:t>Exito:</a:t>
+            </a:r>
+            <a:r>
+              <a:rPr sz="1500" b="0" i="0">
+                <a:solidFill>
+                  <a:srgbClr val="333333"/>
+                </a:solidFill>
+                <a:latin typeface="Calibri"/>
+              </a:rPr>
+              <a:t> Entrega domingo 23:59.</a:t>
+            </a:r>
+          </a:p>
+        </p:txBody>
+      </p:sp>
+      <p:sp>
+        <p:nvSpPr>
+          <p:cNvPr id="6" name="TextBox 5"/>
           <p:cNvSpPr txBox="1"/>
           <p:nvPr/>
         </p:nvSpPr>
@@ -5317,7 +5226,7 @@
                 </a:solidFill>
                 <a:latin typeface="Calibri"/>
               </a:rPr>
-              <a:t>Criterios de exito / entregable</a:t>
+              <a:t>Taller PI VetCare — escenario / datos de partida</a:t>
             </a:r>
           </a:p>
         </p:txBody>
@@ -5356,7 +5265,7 @@
                 </a:solidFill>
                 <a:latin typeface="Calibri"/>
               </a:rPr>
-              <a:t>–   </a:t>
+              <a:t>–   Las preguntas 1 y 2 corren sobre una base </a:t>
             </a:r>
             <a:r>
               <a:rPr sz="1600" b="1" i="0">
@@ -5365,7 +5274,7 @@
                 </a:solidFill>
                 <a:latin typeface="Calibri"/>
               </a:rPr>
-              <a:t>Entregable:</a:t>
+              <a:t>con volumen</a:t>
             </a:r>
             <a:r>
               <a:rPr sz="1600" b="0" i="0">
@@ -5374,7 +5283,43 @@
                 </a:solidFill>
                 <a:latin typeface="Calibri"/>
               </a:rPr>
-              <a:t> Script CREATE INDEX + tabla justificacion consulta-&gt;indice</a:t>
+              <a:t>: 2.006 duenos, 5.008 mascotas, 16 veterinarios y </a:t>
+            </a:r>
+            <a:r>
+              <a:rPr sz="1600" b="1" i="0">
+                <a:solidFill>
+                  <a:srgbClr val="333333"/>
+                </a:solidFill>
+                <a:latin typeface="Calibri"/>
+              </a:rPr>
+              <a:t>30.010 citas</a:t>
+            </a:r>
+            <a:r>
+              <a:rPr sz="1600" b="0" i="0">
+                <a:solidFill>
+                  <a:srgbClr val="333333"/>
+                </a:solidFill>
+                <a:latin typeface="Calibri"/>
+              </a:rPr>
+              <a:t> entre el 2026-01-05 y el 2026-07-23. «ANALYZE» ya está corrido y </a:t>
+            </a:r>
+            <a:r>
+              <a:rPr sz="1600" b="1" i="0">
+                <a:solidFill>
+                  <a:srgbClr val="333333"/>
+                </a:solidFill>
+                <a:latin typeface="Calibri"/>
+              </a:rPr>
+              <a:t>no hay ningún índice</a:t>
+            </a:r>
+            <a:r>
+              <a:rPr sz="1600" b="0" i="0">
+                <a:solidFill>
+                  <a:srgbClr val="333333"/>
+                </a:solidFill>
+                <a:latin typeface="Calibri"/>
+              </a:rPr>
+              <a:t> más allá de las PK: los creas tú.</a:t>
             </a:r>
           </a:p>
           <a:p>
@@ -5390,7 +5335,25 @@
                 </a:solidFill>
                 <a:latin typeface="Calibri"/>
               </a:rPr>
-              <a:t>–   Evidencia en playground (enlace) o archivo SQL/PNG propio.</a:t>
+              <a:t>–   Las dos consultas frecuentes vienen </a:t>
+            </a:r>
+            <a:r>
+              <a:rPr sz="1600" b="1" i="0">
+                <a:solidFill>
+                  <a:srgbClr val="333333"/>
+                </a:solidFill>
+                <a:latin typeface="Calibri"/>
+              </a:rPr>
+              <a:t>escritas en el enunciado</a:t>
+            </a:r>
+            <a:r>
+              <a:rPr sz="1600" b="0" i="0">
+                <a:solidFill>
+                  <a:srgbClr val="333333"/>
+                </a:solidFill>
+                <a:latin typeface="Calibri"/>
+              </a:rPr>
+              <a:t> y no se cambian: la agenda del día filtra «cita» por rango de «fecha_hora» y por «estado = 'PROGRAMADA'»; la ficha del dueño filtra «mascota» por «id_dueno».</a:t>
             </a:r>
           </a:p>
           <a:p>
@@ -5406,7 +5369,61 @@
                 </a:solidFill>
                 <a:latin typeface="Calibri"/>
               </a:rPr>
-              <a:t>–   Actualizar checklist PI (que criterio de rubrica avanzo).</a:t>
+              <a:t>–   La pregunta 3 usa </a:t>
+            </a:r>
+            <a:r>
+              <a:rPr sz="1600" b="1" i="0">
+                <a:solidFill>
+                  <a:srgbClr val="333333"/>
+                </a:solidFill>
+                <a:latin typeface="Calibri"/>
+              </a:rPr>
+              <a:t>otra</a:t>
+            </a:r>
+            <a:r>
+              <a:rPr sz="1600" b="0" i="0">
+                <a:solidFill>
+                  <a:srgbClr val="333333"/>
+                </a:solidFill>
+                <a:latin typeface="Calibri"/>
+              </a:rPr>
+              <a:t> base, a propósito: </a:t>
+            </a:r>
+            <a:r>
+              <a:rPr sz="1600" b="1" i="0">
+                <a:solidFill>
+                  <a:srgbClr val="333333"/>
+                </a:solidFill>
+                <a:latin typeface="Calibri"/>
+              </a:rPr>
+              <a:t>5.010 citas</a:t>
+            </a:r>
+            <a:r>
+              <a:rPr sz="1600" b="0" i="0">
+                <a:solidFill>
+                  <a:srgbClr val="333333"/>
+                </a:solidFill>
+                <a:latin typeface="Calibri"/>
+              </a:rPr>
+              <a:t> repartidas entre enero de 2025 y diciembre de 2026, para que haya dos años que particionar. Si ves 5.010 donde esperabas 30.010, </a:t>
+            </a:r>
+            <a:r>
+              <a:rPr sz="1600" b="1" i="0">
+                <a:solidFill>
+                  <a:srgbClr val="333333"/>
+                </a:solidFill>
+                <a:latin typeface="Calibri"/>
+              </a:rPr>
+              <a:t>no es un error</a:t>
+            </a:r>
+            <a:r>
+              <a:rPr sz="1600" b="0" i="0">
+                <a:solidFill>
+                  <a:srgbClr val="333333"/>
+                </a:solidFill>
+                <a:latin typeface="Calibri"/>
+              </a:rPr>
+              <a:t>.</a:t>
             </a:r>
           </a:p>
           <a:p>
@@ -5431,7 +5448,7 @@
                 </a:solidFill>
                 <a:latin typeface="Calibri"/>
               </a:rPr>
-              <a:t>Entrega en ExamLab</a:t>
+              <a:t>Motor:</a:t>
             </a:r>
             <a:r>
               <a:rPr sz="1600" b="0" i="0">
@@ -5440,7 +5457,41 @@
                 </a:solidFill>
                 <a:latin typeface="Calibri"/>
               </a:rPr>
-              <a:t> (https://uniaj.examlab.workers.dev/) — domingo 23:59 cuando aplique taller.</a:t>
+              <a:t> PostgreSQL dentro de ExamLab, en el navegador. «EXPLAIN ANALYZE», los índices parciales, «PARTITION BY RANGE» y la poda de particiones corren de verdad; ahí se califica.</a:t>
+            </a:r>
+          </a:p>
+          <a:p>
+            <a:pPr>
+              <a:spcAft>
+                <a:spcPts val="800"/>
+              </a:spcAft>
+            </a:pPr>
+            <a:r>
+              <a:rPr sz="1600" b="0" i="0">
+                <a:solidFill>
+                  <a:srgbClr val="333333"/>
+                </a:solidFill>
+                <a:latin typeface="Calibri"/>
+              </a:rPr>
+              <a:t>–   Los nombres del curso son </a:t>
+            </a:r>
+            <a:r>
+              <a:rPr sz="1600" b="1" i="0">
+                <a:solidFill>
+                  <a:srgbClr val="333333"/>
+                </a:solidFill>
+                <a:latin typeface="Calibri"/>
+              </a:rPr>
+              <a:t>minúsculas y sin eñes</a:t>
+            </a:r>
+            <a:r>
+              <a:rPr sz="1600" b="0" i="0">
+                <a:solidFill>
+                  <a:srgbClr val="333333"/>
+                </a:solidFill>
+                <a:latin typeface="Calibri"/>
+              </a:rPr>
+              <a:t>: las tablas son «dueno», «mascota» y «cita», y la columna es «id_dueno». Un «Mascota(id_dueño)» no compila.</a:t>
             </a:r>
           </a:p>
         </p:txBody>
@@ -5621,7 +5672,7 @@
                 </a:solidFill>
                 <a:latin typeface="Calibri"/>
               </a:rPr>
-              <a:t>Para el PI esta semana</a:t>
+              <a:t>Taller PI VetCare — pasos guiados</a:t>
             </a:r>
           </a:p>
         </p:txBody>
@@ -5634,8 +5685,163 @@
         </p:nvSpPr>
         <p:spPr>
           <a:xfrm>
-            <a:off x="457200" y="1261872"/>
-            <a:ext cx="11277295" cy="1051560"/>
+            <a:off x="457200" y="1234440"/>
+            <a:ext cx="11277295" cy="950976"/>
+          </a:xfrm>
+          <a:prstGeom prst="roundRect">
+            <a:avLst>
+              <a:gd name="adj" fmla="val 12000"/>
+            </a:avLst>
+          </a:prstGeom>
+          <a:solidFill>
+            <a:srgbClr val="F2F2F2"/>
+          </a:solidFill>
+          <a:ln>
+            <a:noFill/>
+          </a:ln>
+        </p:spPr>
+        <p:style>
+          <a:lnRef idx="1">
+            <a:schemeClr val="accent1"/>
+          </a:lnRef>
+          <a:fillRef idx="3">
+            <a:schemeClr val="accent1"/>
+          </a:fillRef>
+          <a:effectRef idx="2">
+            <a:schemeClr val="accent1"/>
+          </a:effectRef>
+          <a:fontRef idx="minor">
+            <a:schemeClr val="lt1"/>
+          </a:fontRef>
+        </p:style>
+        <p:txBody>
+          <a:bodyPr rtlCol="0" anchor="ctr"/>
+          <a:lstStyle/>
+          <a:p>
+            <a:pPr algn="ctr"/>
+          </a:p>
+        </p:txBody>
+      </p:sp>
+      <p:sp>
+        <p:nvSpPr>
+          <p:cNvPr id="6" name="Rounded Rectangle 5"/>
+          <p:cNvSpPr/>
+          <p:nvPr/>
+        </p:nvSpPr>
+        <p:spPr>
+          <a:xfrm>
+            <a:off x="594360" y="1490472"/>
+            <a:ext cx="438912" cy="438912"/>
+          </a:xfrm>
+          <a:prstGeom prst="roundRect">
+            <a:avLst>
+              <a:gd name="adj" fmla="val 12000"/>
+            </a:avLst>
+          </a:prstGeom>
+          <a:solidFill>
+            <a:srgbClr val="095292"/>
+          </a:solidFill>
+          <a:ln>
+            <a:noFill/>
+          </a:ln>
+        </p:spPr>
+        <p:style>
+          <a:lnRef idx="1">
+            <a:schemeClr val="accent1"/>
+          </a:lnRef>
+          <a:fillRef idx="3">
+            <a:schemeClr val="accent1"/>
+          </a:fillRef>
+          <a:effectRef idx="2">
+            <a:schemeClr val="accent1"/>
+          </a:effectRef>
+          <a:fontRef idx="minor">
+            <a:schemeClr val="lt1"/>
+          </a:fontRef>
+        </p:style>
+        <p:txBody>
+          <a:bodyPr rtlCol="0" anchor="ctr"/>
+          <a:lstStyle/>
+          <a:p>
+            <a:pPr algn="ctr"/>
+          </a:p>
+        </p:txBody>
+      </p:sp>
+      <p:sp>
+        <p:nvSpPr>
+          <p:cNvPr id="7" name="TextBox 6"/>
+          <p:cNvSpPr txBox="1"/>
+          <p:nvPr/>
+        </p:nvSpPr>
+        <p:spPr>
+          <a:xfrm>
+            <a:off x="594360" y="1490472"/>
+            <a:ext cx="438912" cy="438912"/>
+          </a:xfrm>
+          <a:prstGeom prst="rect">
+            <a:avLst/>
+          </a:prstGeom>
+          <a:noFill/>
+        </p:spPr>
+        <p:txBody>
+          <a:bodyPr wrap="square" anchor="ctr"/>
+          <a:lstStyle/>
+          <a:p>
+            <a:pPr algn="ctr"/>
+            <a:r>
+              <a:rPr sz="1600" b="1" i="0">
+                <a:solidFill>
+                  <a:srgbClr val="FFFFFF"/>
+                </a:solidFill>
+                <a:latin typeface="Calibri"/>
+              </a:rPr>
+              <a:t>1</a:t>
+            </a:r>
+          </a:p>
+        </p:txBody>
+      </p:sp>
+      <p:sp>
+        <p:nvSpPr>
+          <p:cNvPr id="8" name="TextBox 7"/>
+          <p:cNvSpPr txBox="1"/>
+          <p:nvPr/>
+        </p:nvSpPr>
+        <p:spPr>
+          <a:xfrm>
+            <a:off x="1188720" y="1325880"/>
+            <a:ext cx="10271455" cy="786384"/>
+          </a:xfrm>
+          <a:prstGeom prst="rect">
+            <a:avLst/>
+          </a:prstGeom>
+          <a:noFill/>
+        </p:spPr>
+        <p:txBody>
+          <a:bodyPr wrap="square" anchor="ctr"/>
+          <a:lstStyle/>
+          <a:p>
+            <a:r>
+              <a:rPr sz="1500" b="1" i="0">
+                <a:solidFill>
+                  <a:srgbClr val="095292"/>
+                </a:solidFill>
+                <a:latin typeface="Calibri"/>
+              </a:rPr>
+              <a:t>Medir la linea base con EXPLAIN ANALYZE de las dos consultas frecuentes: hay que ver Seq Scan.</a:t>
+            </a:r>
+          </a:p>
+        </p:txBody>
+      </p:sp>
+      <p:sp>
+        <p:nvSpPr>
+          <p:cNvPr id="9" name="Rounded Rectangle 8"/>
+          <p:cNvSpPr/>
+          <p:nvPr/>
+        </p:nvSpPr>
+        <p:spPr>
+          <a:xfrm>
+            <a:off x="457200" y="2276856"/>
+            <a:ext cx="11277295" cy="950976"/>
           </a:xfrm>
           <a:prstGeom prst="roundRect">
             <a:avLst>
@@ -5673,20 +5879,22 @@
       </p:sp>
       <p:sp>
         <p:nvSpPr>
-          <p:cNvPr id="6" name="Rectangle 5"/>
+          <p:cNvPr id="10" name="Rounded Rectangle 9"/>
           <p:cNvSpPr/>
           <p:nvPr/>
         </p:nvSpPr>
         <p:spPr>
           <a:xfrm>
-            <a:off x="457200" y="1261872"/>
-            <a:ext cx="128016" cy="1051560"/>
-          </a:xfrm>
-          <a:prstGeom prst="rect">
-            <a:avLst/>
+            <a:off x="594360" y="2532888"/>
+            <a:ext cx="438912" cy="438912"/>
+          </a:xfrm>
+          <a:prstGeom prst="roundRect">
+            <a:avLst>
+              <a:gd name="adj" fmla="val 12000"/>
+            </a:avLst>
           </a:prstGeom>
           <a:solidFill>
-            <a:srgbClr val="269CCB"/>
+            <a:srgbClr val="095292"/>
           </a:solidFill>
           <a:ln>
             <a:noFill/>
@@ -5716,14 +5924,14 @@
       </p:sp>
       <p:sp>
         <p:nvSpPr>
-          <p:cNvPr id="7" name="TextBox 6"/>
+          <p:cNvPr id="11" name="TextBox 10"/>
           <p:cNvSpPr txBox="1"/>
           <p:nvPr/>
         </p:nvSpPr>
         <p:spPr>
           <a:xfrm>
-            <a:off x="777240" y="1399031"/>
-            <a:ext cx="10774375" cy="822959"/>
+            <a:off x="594360" y="2532888"/>
+            <a:ext cx="438912" cy="438912"/>
           </a:xfrm>
           <a:prstGeom prst="rect">
             <a:avLst/>
@@ -5731,49 +5939,64 @@
           <a:noFill/>
         </p:spPr>
         <p:txBody>
-          <a:bodyPr wrap="square">
-            <a:spAutoFit/>
-          </a:bodyPr>
-          <a:lstStyle/>
-          <a:p>
-            <a:r>
-              <a:rPr sz="1200" b="1" i="0">
-                <a:solidFill>
-                  <a:srgbClr val="269CCB"/>
-                </a:solidFill>
-                <a:latin typeface="Calibri"/>
-              </a:rPr>
-              <a:t>Info</a:t>
-            </a:r>
-          </a:p>
-          <a:p>
-            <a:pPr>
-              <a:spcBef>
-                <a:spcPts val="400"/>
-              </a:spcBef>
-            </a:pPr>
-            <a:r>
-              <a:rPr sz="1400" b="0" i="0">
-                <a:solidFill>
-                  <a:srgbClr val="333333"/>
-                </a:solidFill>
-                <a:latin typeface="Calibri"/>
-              </a:rPr>
-              <a:t>Hito: &gt;=2 indices justificados sobre tablas calientes del PI</a:t>
-            </a:r>
-          </a:p>
-        </p:txBody>
-      </p:sp>
-      <p:sp>
-        <p:nvSpPr>
-          <p:cNvPr id="8" name="Rounded Rectangle 7"/>
+          <a:bodyPr wrap="square" anchor="ctr"/>
+          <a:lstStyle/>
+          <a:p>
+            <a:pPr algn="ctr"/>
+            <a:r>
+              <a:rPr sz="1600" b="1" i="0">
+                <a:solidFill>
+                  <a:srgbClr val="FFFFFF"/>
+                </a:solidFill>
+                <a:latin typeface="Calibri"/>
+              </a:rPr>
+              <a:t>2</a:t>
+            </a:r>
+          </a:p>
+        </p:txBody>
+      </p:sp>
+      <p:sp>
+        <p:nvSpPr>
+          <p:cNvPr id="12" name="TextBox 11"/>
+          <p:cNvSpPr txBox="1"/>
+          <p:nvPr/>
+        </p:nvSpPr>
+        <p:spPr>
+          <a:xfrm>
+            <a:off x="1188720" y="2368296"/>
+            <a:ext cx="10271455" cy="786384"/>
+          </a:xfrm>
+          <a:prstGeom prst="rect">
+            <a:avLst/>
+          </a:prstGeom>
+          <a:noFill/>
+        </p:spPr>
+        <p:txBody>
+          <a:bodyPr wrap="square" anchor="ctr"/>
+          <a:lstStyle/>
+          <a:p>
+            <a:r>
+              <a:rPr sz="1500" b="1" i="0">
+                <a:solidFill>
+                  <a:srgbClr val="095292"/>
+                </a:solidFill>
+                <a:latin typeface="Calibri"/>
+              </a:rPr>
+              <a:t>Crear los tres indices con el nombre exacto, incluido el parcial idx_cita_programada_fecha, y correr ANALYZE.</a:t>
+            </a:r>
+          </a:p>
+        </p:txBody>
+      </p:sp>
+      <p:sp>
+        <p:nvSpPr>
+          <p:cNvPr id="13" name="Rounded Rectangle 12"/>
           <p:cNvSpPr/>
           <p:nvPr/>
         </p:nvSpPr>
         <p:spPr>
           <a:xfrm>
-            <a:off x="457200" y="2478024"/>
-            <a:ext cx="11277295" cy="1051560"/>
+            <a:off x="457200" y="3319272"/>
+            <a:ext cx="11277295" cy="950976"/>
           </a:xfrm>
           <a:prstGeom prst="roundRect">
             <a:avLst>
@@ -5781,7 +6004,7 @@
             </a:avLst>
           </a:prstGeom>
           <a:solidFill>
-            <a:srgbClr val="FFF8E1"/>
+            <a:srgbClr val="F2F2F2"/>
           </a:solidFill>
           <a:ln>
             <a:noFill/>
@@ -5811,20 +6034,22 @@
       </p:sp>
       <p:sp>
         <p:nvSpPr>
-          <p:cNvPr id="9" name="Rectangle 8"/>
+          <p:cNvPr id="14" name="Rounded Rectangle 13"/>
           <p:cNvSpPr/>
           <p:nvPr/>
         </p:nvSpPr>
         <p:spPr>
           <a:xfrm>
-            <a:off x="457200" y="2478024"/>
-            <a:ext cx="128016" cy="1051560"/>
-          </a:xfrm>
-          <a:prstGeom prst="rect">
-            <a:avLst/>
+            <a:off x="594360" y="3575304"/>
+            <a:ext cx="438912" cy="438912"/>
+          </a:xfrm>
+          <a:prstGeom prst="roundRect">
+            <a:avLst>
+              <a:gd name="adj" fmla="val 12000"/>
+            </a:avLst>
           </a:prstGeom>
           <a:solidFill>
-            <a:srgbClr val="FFD000"/>
+            <a:srgbClr val="095292"/>
           </a:solidFill>
           <a:ln>
             <a:noFill/>
@@ -5854,14 +6079,14 @@
       </p:sp>
       <p:sp>
         <p:nvSpPr>
-          <p:cNvPr id="10" name="TextBox 9"/>
+          <p:cNvPr id="15" name="TextBox 14"/>
           <p:cNvSpPr txBox="1"/>
           <p:nvPr/>
         </p:nvSpPr>
         <p:spPr>
           <a:xfrm>
-            <a:off x="777240" y="2615184"/>
-            <a:ext cx="10774375" cy="822959"/>
+            <a:off x="594360" y="3575304"/>
+            <a:ext cx="438912" cy="438912"/>
           </a:xfrm>
           <a:prstGeom prst="rect">
             <a:avLst/>
@@ -5869,49 +6094,64 @@
           <a:noFill/>
         </p:spPr>
         <p:txBody>
-          <a:bodyPr wrap="square">
-            <a:spAutoFit/>
-          </a:bodyPr>
-          <a:lstStyle/>
-          <a:p>
-            <a:r>
-              <a:rPr sz="1200" b="1" i="0">
-                <a:solidFill>
-                  <a:srgbClr val="FFD000"/>
-                </a:solidFill>
-                <a:latin typeface="Calibri"/>
-              </a:rPr>
-              <a:t>Aclaración</a:t>
-            </a:r>
-          </a:p>
-          <a:p>
-            <a:pPr>
-              <a:spcBef>
-                <a:spcPts val="400"/>
-              </a:spcBef>
-            </a:pPr>
-            <a:r>
-              <a:rPr sz="1400" b="0" i="0">
-                <a:solidFill>
-                  <a:srgbClr val="333333"/>
-                </a:solidFill>
-                <a:latin typeface="Calibri"/>
-              </a:rPr>
-              <a:t>Enunciado completo: Clases/Proyecto Integrador/ (VetCare DB).</a:t>
-            </a:r>
-          </a:p>
-        </p:txBody>
-      </p:sp>
-      <p:sp>
-        <p:nvSpPr>
-          <p:cNvPr id="11" name="Rounded Rectangle 10"/>
+          <a:bodyPr wrap="square" anchor="ctr"/>
+          <a:lstStyle/>
+          <a:p>
+            <a:pPr algn="ctr"/>
+            <a:r>
+              <a:rPr sz="1600" b="1" i="0">
+                <a:solidFill>
+                  <a:srgbClr val="FFFFFF"/>
+                </a:solidFill>
+                <a:latin typeface="Calibri"/>
+              </a:rPr>
+              <a:t>3</a:t>
+            </a:r>
+          </a:p>
+        </p:txBody>
+      </p:sp>
+      <p:sp>
+        <p:nvSpPr>
+          <p:cNvPr id="16" name="TextBox 15"/>
+          <p:cNvSpPr txBox="1"/>
+          <p:nvPr/>
+        </p:nvSpPr>
+        <p:spPr>
+          <a:xfrm>
+            <a:off x="1188720" y="3410712"/>
+            <a:ext cx="10271455" cy="786384"/>
+          </a:xfrm>
+          <a:prstGeom prst="rect">
+            <a:avLst/>
+          </a:prstGeom>
+          <a:noFill/>
+        </p:spPr>
+        <p:txBody>
+          <a:bodyPr wrap="square" anchor="ctr"/>
+          <a:lstStyle/>
+          <a:p>
+            <a:r>
+              <a:rPr sz="1500" b="1" i="0">
+                <a:solidFill>
+                  <a:srgbClr val="095292"/>
+                </a:solidFill>
+                <a:latin typeface="Calibri"/>
+              </a:rPr>
+              <a:t>Repetir los EXPLAIN y decir cual indice eligio el planeador y por que.</a:t>
+            </a:r>
+          </a:p>
+        </p:txBody>
+      </p:sp>
+      <p:sp>
+        <p:nvSpPr>
+          <p:cNvPr id="17" name="Rounded Rectangle 16"/>
           <p:cNvSpPr/>
           <p:nvPr/>
         </p:nvSpPr>
         <p:spPr>
           <a:xfrm>
-            <a:off x="457200" y="3694176"/>
-            <a:ext cx="11277295" cy="1051560"/>
+            <a:off x="457200" y="4361688"/>
+            <a:ext cx="11277295" cy="950976"/>
           </a:xfrm>
           <a:prstGeom prst="roundRect">
             <a:avLst>
@@ -5919,7 +6159,7 @@
             </a:avLst>
           </a:prstGeom>
           <a:solidFill>
-            <a:srgbClr val="FBE4E4"/>
+            <a:srgbClr val="E8F4FA"/>
           </a:solidFill>
           <a:ln>
             <a:noFill/>
@@ -5949,20 +6189,22 @@
       </p:sp>
       <p:sp>
         <p:nvSpPr>
-          <p:cNvPr id="12" name="Rectangle 11"/>
+          <p:cNvPr id="18" name="Rounded Rectangle 17"/>
           <p:cNvSpPr/>
           <p:nvPr/>
         </p:nvSpPr>
         <p:spPr>
           <a:xfrm>
-            <a:off x="457200" y="3694176"/>
-            <a:ext cx="128016" cy="1051560"/>
-          </a:xfrm>
-          <a:prstGeom prst="rect">
-            <a:avLst/>
+            <a:off x="594360" y="4617720"/>
+            <a:ext cx="438912" cy="438912"/>
+          </a:xfrm>
+          <a:prstGeom prst="roundRect">
+            <a:avLst>
+              <a:gd name="adj" fmla="val 12000"/>
+            </a:avLst>
           </a:prstGeom>
           <a:solidFill>
-            <a:srgbClr val="A02030"/>
+            <a:srgbClr val="095292"/>
           </a:solidFill>
           <a:ln>
             <a:noFill/>
@@ -5992,14 +6234,14 @@
       </p:sp>
       <p:sp>
         <p:nvSpPr>
-          <p:cNvPr id="13" name="TextBox 12"/>
+          <p:cNvPr id="19" name="TextBox 18"/>
           <p:cNvSpPr txBox="1"/>
           <p:nvPr/>
         </p:nvSpPr>
         <p:spPr>
           <a:xfrm>
-            <a:off x="777240" y="3831336"/>
-            <a:ext cx="10774375" cy="822959"/>
+            <a:off x="594360" y="4617720"/>
+            <a:ext cx="438912" cy="438912"/>
           </a:xfrm>
           <a:prstGeom prst="rect">
             <a:avLst/>
@@ -6007,42 +6249,212 @@
           <a:noFill/>
         </p:spPr>
         <p:txBody>
-          <a:bodyPr wrap="square">
-            <a:spAutoFit/>
-          </a:bodyPr>
-          <a:lstStyle/>
-          <a:p>
-            <a:r>
-              <a:rPr sz="1200" b="1" i="0">
-                <a:solidFill>
-                  <a:srgbClr val="A02030"/>
-                </a:solidFill>
-                <a:latin typeface="Calibri"/>
-              </a:rPr>
-              <a:t>Atención</a:t>
-            </a:r>
-          </a:p>
-          <a:p>
-            <a:pPr>
-              <a:spcBef>
-                <a:spcPts val="400"/>
-              </a:spcBef>
-            </a:pPr>
-            <a:r>
-              <a:rPr sz="1400" b="0" i="0">
-                <a:solidFill>
-                  <a:srgbClr val="333333"/>
-                </a:solidFill>
-                <a:latin typeface="Calibri"/>
-              </a:rPr>
-              <a:t>Taller de la semana en ExamLab (https://uniaj.examlab.workers.dev/): domingo 23:59 (regla del Acuerdo) cuando aplique.</a:t>
-            </a:r>
-          </a:p>
-        </p:txBody>
-      </p:sp>
-      <p:sp>
-        <p:nvSpPr>
-          <p:cNvPr id="14" name="TextBox 13"/>
+          <a:bodyPr wrap="square" anchor="ctr"/>
+          <a:lstStyle/>
+          <a:p>
+            <a:pPr algn="ctr"/>
+            <a:r>
+              <a:rPr sz="1600" b="1" i="0">
+                <a:solidFill>
+                  <a:srgbClr val="FFFFFF"/>
+                </a:solidFill>
+                <a:latin typeface="Calibri"/>
+              </a:rPr>
+              <a:t>4</a:t>
+            </a:r>
+          </a:p>
+        </p:txBody>
+      </p:sp>
+      <p:sp>
+        <p:nvSpPr>
+          <p:cNvPr id="20" name="TextBox 19"/>
+          <p:cNvSpPr txBox="1"/>
+          <p:nvPr/>
+        </p:nvSpPr>
+        <p:spPr>
+          <a:xfrm>
+            <a:off x="1188720" y="4453128"/>
+            <a:ext cx="10271455" cy="786384"/>
+          </a:xfrm>
+          <a:prstGeom prst="rect">
+            <a:avLst/>
+          </a:prstGeom>
+          <a:noFill/>
+        </p:spPr>
+        <p:txBody>
+          <a:bodyPr wrap="square" anchor="ctr"/>
+          <a:lstStyle/>
+          <a:p>
+            <a:r>
+              <a:rPr sz="1500" b="1" i="0">
+                <a:solidFill>
+                  <a:srgbClr val="095292"/>
+                </a:solidFill>
+                <a:latin typeface="Calibri"/>
+              </a:rPr>
+              <a:t>Construir cita_hist particionada por ano, migrar las citas y demostrar el enrutamiento y la poda.</a:t>
+            </a:r>
+          </a:p>
+        </p:txBody>
+      </p:sp>
+      <p:sp>
+        <p:nvSpPr>
+          <p:cNvPr id="21" name="Rounded Rectangle 20"/>
+          <p:cNvSpPr/>
+          <p:nvPr/>
+        </p:nvSpPr>
+        <p:spPr>
+          <a:xfrm>
+            <a:off x="457200" y="5404104"/>
+            <a:ext cx="11277295" cy="950976"/>
+          </a:xfrm>
+          <a:prstGeom prst="roundRect">
+            <a:avLst>
+              <a:gd name="adj" fmla="val 12000"/>
+            </a:avLst>
+          </a:prstGeom>
+          <a:solidFill>
+            <a:srgbClr val="F2F2F2"/>
+          </a:solidFill>
+          <a:ln>
+            <a:noFill/>
+          </a:ln>
+        </p:spPr>
+        <p:style>
+          <a:lnRef idx="1">
+            <a:schemeClr val="accent1"/>
+          </a:lnRef>
+          <a:fillRef idx="3">
+            <a:schemeClr val="accent1"/>
+          </a:fillRef>
+          <a:effectRef idx="2">
+            <a:schemeClr val="accent1"/>
+          </a:effectRef>
+          <a:fontRef idx="minor">
+            <a:schemeClr val="lt1"/>
+          </a:fontRef>
+        </p:style>
+        <p:txBody>
+          <a:bodyPr rtlCol="0" anchor="ctr"/>
+          <a:lstStyle/>
+          <a:p>
+            <a:pPr algn="ctr"/>
+          </a:p>
+        </p:txBody>
+      </p:sp>
+      <p:sp>
+        <p:nvSpPr>
+          <p:cNvPr id="22" name="Rounded Rectangle 21"/>
+          <p:cNvSpPr/>
+          <p:nvPr/>
+        </p:nvSpPr>
+        <p:spPr>
+          <a:xfrm>
+            <a:off x="594360" y="5660136"/>
+            <a:ext cx="438912" cy="438912"/>
+          </a:xfrm>
+          <a:prstGeom prst="roundRect">
+            <a:avLst>
+              <a:gd name="adj" fmla="val 12000"/>
+            </a:avLst>
+          </a:prstGeom>
+          <a:solidFill>
+            <a:srgbClr val="095292"/>
+          </a:solidFill>
+          <a:ln>
+            <a:noFill/>
+          </a:ln>
+        </p:spPr>
+        <p:style>
+          <a:lnRef idx="1">
+            <a:schemeClr val="accent1"/>
+          </a:lnRef>
+          <a:fillRef idx="3">
+            <a:schemeClr val="accent1"/>
+          </a:fillRef>
+          <a:effectRef idx="2">
+            <a:schemeClr val="accent1"/>
+          </a:effectRef>
+          <a:fontRef idx="minor">
+            <a:schemeClr val="lt1"/>
+          </a:fontRef>
+        </p:style>
+        <p:txBody>
+          <a:bodyPr rtlCol="0" anchor="ctr"/>
+          <a:lstStyle/>
+          <a:p>
+            <a:pPr algn="ctr"/>
+          </a:p>
+        </p:txBody>
+      </p:sp>
+      <p:sp>
+        <p:nvSpPr>
+          <p:cNvPr id="23" name="TextBox 22"/>
+          <p:cNvSpPr txBox="1"/>
+          <p:nvPr/>
+        </p:nvSpPr>
+        <p:spPr>
+          <a:xfrm>
+            <a:off x="594360" y="5660136"/>
+            <a:ext cx="438912" cy="438912"/>
+          </a:xfrm>
+          <a:prstGeom prst="rect">
+            <a:avLst/>
+          </a:prstGeom>
+          <a:noFill/>
+        </p:spPr>
+        <p:txBody>
+          <a:bodyPr wrap="square" anchor="ctr"/>
+          <a:lstStyle/>
+          <a:p>
+            <a:pPr algn="ctr"/>
+            <a:r>
+              <a:rPr sz="1600" b="1" i="0">
+                <a:solidFill>
+                  <a:srgbClr val="FFFFFF"/>
+                </a:solidFill>
+                <a:latin typeface="Calibri"/>
+              </a:rPr>
+              <a:t>5</a:t>
+            </a:r>
+          </a:p>
+        </p:txBody>
+      </p:sp>
+      <p:sp>
+        <p:nvSpPr>
+          <p:cNvPr id="24" name="TextBox 23"/>
+          <p:cNvSpPr txBox="1"/>
+          <p:nvPr/>
+        </p:nvSpPr>
+        <p:spPr>
+          <a:xfrm>
+            <a:off x="1188720" y="5495544"/>
+            <a:ext cx="10271455" cy="786384"/>
+          </a:xfrm>
+          <a:prstGeom prst="rect">
+            <a:avLst/>
+          </a:prstGeom>
+          <a:noFill/>
+        </p:spPr>
+        <p:txBody>
+          <a:bodyPr wrap="square" anchor="ctr"/>
+          <a:lstStyle/>
+          <a:p>
+            <a:r>
+              <a:rPr sz="1500" b="1" i="0">
+                <a:solidFill>
+                  <a:srgbClr val="095292"/>
+                </a:solidFill>
+                <a:latin typeface="Calibri"/>
+              </a:rPr>
+              <a:t>Llenar la tabla de justificacion consulta-&gt;indice (7 columnas) y el veredicto de particionamiento.</a:t>
+            </a:r>
+          </a:p>
+        </p:txBody>
+      </p:sp>
+      <p:sp>
+        <p:nvSpPr>
+          <p:cNvPr id="25" name="TextBox 24"/>
           <p:cNvSpPr txBox="1"/>
           <p:nvPr/>
         </p:nvSpPr>
@@ -6110,6 +6522,2530 @@
         <p:spPr>
           <a:xfrm>
             <a:off x="0" y="0"/>
+            <a:ext cx="12191695" cy="960120"/>
+          </a:xfrm>
+          <a:prstGeom prst="rect">
+            <a:avLst/>
+          </a:prstGeom>
+          <a:solidFill>
+            <a:srgbClr val="095292"/>
+          </a:solidFill>
+          <a:ln>
+            <a:noFill/>
+          </a:ln>
+        </p:spPr>
+        <p:style>
+          <a:lnRef idx="1">
+            <a:schemeClr val="accent1"/>
+          </a:lnRef>
+          <a:fillRef idx="3">
+            <a:schemeClr val="accent1"/>
+          </a:fillRef>
+          <a:effectRef idx="2">
+            <a:schemeClr val="accent1"/>
+          </a:effectRef>
+          <a:fontRef idx="minor">
+            <a:schemeClr val="lt1"/>
+          </a:fontRef>
+        </p:style>
+        <p:txBody>
+          <a:bodyPr rtlCol="0" anchor="ctr"/>
+          <a:lstStyle/>
+          <a:p>
+            <a:pPr algn="ctr"/>
+          </a:p>
+        </p:txBody>
+      </p:sp>
+      <p:sp>
+        <p:nvSpPr>
+          <p:cNvPr id="3" name="Rectangle 2"/>
+          <p:cNvSpPr/>
+          <p:nvPr/>
+        </p:nvSpPr>
+        <p:spPr>
+          <a:xfrm>
+            <a:off x="0" y="960120"/>
+            <a:ext cx="12191695" cy="41148"/>
+          </a:xfrm>
+          <a:prstGeom prst="rect">
+            <a:avLst/>
+          </a:prstGeom>
+          <a:solidFill>
+            <a:srgbClr val="FFD000"/>
+          </a:solidFill>
+          <a:ln>
+            <a:noFill/>
+          </a:ln>
+        </p:spPr>
+        <p:style>
+          <a:lnRef idx="1">
+            <a:schemeClr val="accent1"/>
+          </a:lnRef>
+          <a:fillRef idx="3">
+            <a:schemeClr val="accent1"/>
+          </a:fillRef>
+          <a:effectRef idx="2">
+            <a:schemeClr val="accent1"/>
+          </a:effectRef>
+          <a:fontRef idx="minor">
+            <a:schemeClr val="lt1"/>
+          </a:fontRef>
+        </p:style>
+        <p:txBody>
+          <a:bodyPr rtlCol="0" anchor="ctr"/>
+          <a:lstStyle/>
+          <a:p>
+            <a:pPr algn="ctr"/>
+          </a:p>
+        </p:txBody>
+      </p:sp>
+      <p:sp>
+        <p:nvSpPr>
+          <p:cNvPr id="4" name="TextBox 3"/>
+          <p:cNvSpPr txBox="1"/>
+          <p:nvPr/>
+        </p:nvSpPr>
+        <p:spPr>
+          <a:xfrm>
+            <a:off x="457200" y="164592"/>
+            <a:ext cx="11277295" cy="502920"/>
+          </a:xfrm>
+          <a:prstGeom prst="rect">
+            <a:avLst/>
+          </a:prstGeom>
+          <a:noFill/>
+        </p:spPr>
+        <p:txBody>
+          <a:bodyPr wrap="square">
+            <a:spAutoFit/>
+          </a:bodyPr>
+          <a:lstStyle/>
+          <a:p>
+            <a:r>
+              <a:rPr sz="2600" b="1" i="0">
+                <a:solidFill>
+                  <a:srgbClr val="FFFFFF"/>
+                </a:solidFill>
+                <a:latin typeface="Calibri"/>
+              </a:rPr>
+              <a:t>Taller PI VetCare — pistas (checklist vacio)</a:t>
+            </a:r>
+          </a:p>
+        </p:txBody>
+      </p:sp>
+      <p:sp>
+        <p:nvSpPr>
+          <p:cNvPr id="5" name="Rounded Rectangle 4"/>
+          <p:cNvSpPr/>
+          <p:nvPr/>
+        </p:nvSpPr>
+        <p:spPr>
+          <a:xfrm>
+            <a:off x="457200" y="1261872"/>
+            <a:ext cx="11277295" cy="566928"/>
+          </a:xfrm>
+          <a:prstGeom prst="roundRect">
+            <a:avLst>
+              <a:gd name="adj" fmla="val 12000"/>
+            </a:avLst>
+          </a:prstGeom>
+          <a:solidFill>
+            <a:srgbClr val="F2F2F2"/>
+          </a:solidFill>
+          <a:ln>
+            <a:noFill/>
+          </a:ln>
+        </p:spPr>
+        <p:style>
+          <a:lnRef idx="1">
+            <a:schemeClr val="accent1"/>
+          </a:lnRef>
+          <a:fillRef idx="3">
+            <a:schemeClr val="accent1"/>
+          </a:fillRef>
+          <a:effectRef idx="2">
+            <a:schemeClr val="accent1"/>
+          </a:effectRef>
+          <a:fontRef idx="minor">
+            <a:schemeClr val="lt1"/>
+          </a:fontRef>
+        </p:style>
+        <p:txBody>
+          <a:bodyPr rtlCol="0" anchor="ctr"/>
+          <a:lstStyle/>
+          <a:p>
+            <a:pPr algn="ctr"/>
+          </a:p>
+        </p:txBody>
+      </p:sp>
+      <p:sp>
+        <p:nvSpPr>
+          <p:cNvPr id="6" name="Rectangle 5"/>
+          <p:cNvSpPr/>
+          <p:nvPr/>
+        </p:nvSpPr>
+        <p:spPr>
+          <a:xfrm>
+            <a:off x="640080" y="1408175"/>
+            <a:ext cx="274320" cy="274320"/>
+          </a:xfrm>
+          <a:prstGeom prst="rect">
+            <a:avLst/>
+          </a:prstGeom>
+          <a:solidFill>
+            <a:srgbClr val="FFFFFF"/>
+          </a:solidFill>
+          <a:ln>
+            <a:solidFill>
+              <a:srgbClr val="333333"/>
+            </a:solidFill>
+          </a:ln>
+        </p:spPr>
+        <p:style>
+          <a:lnRef idx="1">
+            <a:schemeClr val="accent1"/>
+          </a:lnRef>
+          <a:fillRef idx="3">
+            <a:schemeClr val="accent1"/>
+          </a:fillRef>
+          <a:effectRef idx="2">
+            <a:schemeClr val="accent1"/>
+          </a:effectRef>
+          <a:fontRef idx="minor">
+            <a:schemeClr val="lt1"/>
+          </a:fontRef>
+        </p:style>
+        <p:txBody>
+          <a:bodyPr rtlCol="0" anchor="ctr"/>
+          <a:lstStyle/>
+          <a:p>
+            <a:pPr algn="ctr"/>
+          </a:p>
+        </p:txBody>
+      </p:sp>
+      <p:sp>
+        <p:nvSpPr>
+          <p:cNvPr id="7" name="Rectangle 6"/>
+          <p:cNvSpPr/>
+          <p:nvPr/>
+        </p:nvSpPr>
+        <p:spPr>
+          <a:xfrm>
+            <a:off x="640080" y="1408175"/>
+            <a:ext cx="73152" cy="274320"/>
+          </a:xfrm>
+          <a:prstGeom prst="rect">
+            <a:avLst/>
+          </a:prstGeom>
+          <a:solidFill>
+            <a:srgbClr val="269CCB"/>
+          </a:solidFill>
+          <a:ln>
+            <a:noFill/>
+          </a:ln>
+        </p:spPr>
+        <p:style>
+          <a:lnRef idx="1">
+            <a:schemeClr val="accent1"/>
+          </a:lnRef>
+          <a:fillRef idx="3">
+            <a:schemeClr val="accent1"/>
+          </a:fillRef>
+          <a:effectRef idx="2">
+            <a:schemeClr val="accent1"/>
+          </a:effectRef>
+          <a:fontRef idx="minor">
+            <a:schemeClr val="lt1"/>
+          </a:fontRef>
+        </p:style>
+        <p:txBody>
+          <a:bodyPr rtlCol="0" anchor="ctr"/>
+          <a:lstStyle/>
+          <a:p>
+            <a:pPr algn="ctr"/>
+          </a:p>
+        </p:txBody>
+      </p:sp>
+      <p:sp>
+        <p:nvSpPr>
+          <p:cNvPr id="8" name="TextBox 7"/>
+          <p:cNvSpPr txBox="1"/>
+          <p:nvPr/>
+        </p:nvSpPr>
+        <p:spPr>
+          <a:xfrm>
+            <a:off x="1097280" y="1353312"/>
+            <a:ext cx="10362895" cy="402336"/>
+          </a:xfrm>
+          <a:prstGeom prst="rect">
+            <a:avLst/>
+          </a:prstGeom>
+          <a:noFill/>
+        </p:spPr>
+        <p:txBody>
+          <a:bodyPr wrap="square" anchor="ctr"/>
+          <a:lstStyle/>
+          <a:p>
+            <a:r>
+              <a:rPr sz="1500" b="0" i="0">
+                <a:solidFill>
+                  <a:srgbClr val="333333"/>
+                </a:solidFill>
+                <a:latin typeface="Calibri"/>
+              </a:rPr>
+              <a:t>□ ¿Corriste los «EXPLAIN» </a:t>
+            </a:r>
+            <a:r>
+              <a:rPr sz="1500" b="1" i="0">
+                <a:solidFill>
+                  <a:srgbClr val="333333"/>
+                </a:solidFill>
+                <a:latin typeface="Calibri"/>
+              </a:rPr>
+              <a:t>antes</a:t>
+            </a:r>
+            <a:r>
+              <a:rPr sz="1500" b="0" i="0">
+                <a:solidFill>
+                  <a:srgbClr val="333333"/>
+                </a:solidFill>
+                <a:latin typeface="Calibri"/>
+              </a:rPr>
+              <a:t> de crear los índices? Sin la línea base con «Seq Scan» no hay con qué comparar el después.</a:t>
+            </a:r>
+          </a:p>
+        </p:txBody>
+      </p:sp>
+      <p:sp>
+        <p:nvSpPr>
+          <p:cNvPr id="9" name="Rounded Rectangle 8"/>
+          <p:cNvSpPr/>
+          <p:nvPr/>
+        </p:nvSpPr>
+        <p:spPr>
+          <a:xfrm>
+            <a:off x="457200" y="1938528"/>
+            <a:ext cx="11277295" cy="566928"/>
+          </a:xfrm>
+          <a:prstGeom prst="roundRect">
+            <a:avLst>
+              <a:gd name="adj" fmla="val 12000"/>
+            </a:avLst>
+          </a:prstGeom>
+          <a:solidFill>
+            <a:srgbClr val="F2F2F2"/>
+          </a:solidFill>
+          <a:ln>
+            <a:noFill/>
+          </a:ln>
+        </p:spPr>
+        <p:style>
+          <a:lnRef idx="1">
+            <a:schemeClr val="accent1"/>
+          </a:lnRef>
+          <a:fillRef idx="3">
+            <a:schemeClr val="accent1"/>
+          </a:fillRef>
+          <a:effectRef idx="2">
+            <a:schemeClr val="accent1"/>
+          </a:effectRef>
+          <a:fontRef idx="minor">
+            <a:schemeClr val="lt1"/>
+          </a:fontRef>
+        </p:style>
+        <p:txBody>
+          <a:bodyPr rtlCol="0" anchor="ctr"/>
+          <a:lstStyle/>
+          <a:p>
+            <a:pPr algn="ctr"/>
+          </a:p>
+        </p:txBody>
+      </p:sp>
+      <p:sp>
+        <p:nvSpPr>
+          <p:cNvPr id="10" name="Rectangle 9"/>
+          <p:cNvSpPr/>
+          <p:nvPr/>
+        </p:nvSpPr>
+        <p:spPr>
+          <a:xfrm>
+            <a:off x="640080" y="2084832"/>
+            <a:ext cx="274320" cy="274320"/>
+          </a:xfrm>
+          <a:prstGeom prst="rect">
+            <a:avLst/>
+          </a:prstGeom>
+          <a:solidFill>
+            <a:srgbClr val="FFFFFF"/>
+          </a:solidFill>
+          <a:ln>
+            <a:solidFill>
+              <a:srgbClr val="333333"/>
+            </a:solidFill>
+          </a:ln>
+        </p:spPr>
+        <p:style>
+          <a:lnRef idx="1">
+            <a:schemeClr val="accent1"/>
+          </a:lnRef>
+          <a:fillRef idx="3">
+            <a:schemeClr val="accent1"/>
+          </a:fillRef>
+          <a:effectRef idx="2">
+            <a:schemeClr val="accent1"/>
+          </a:effectRef>
+          <a:fontRef idx="minor">
+            <a:schemeClr val="lt1"/>
+          </a:fontRef>
+        </p:style>
+        <p:txBody>
+          <a:bodyPr rtlCol="0" anchor="ctr"/>
+          <a:lstStyle/>
+          <a:p>
+            <a:pPr algn="ctr"/>
+          </a:p>
+        </p:txBody>
+      </p:sp>
+      <p:sp>
+        <p:nvSpPr>
+          <p:cNvPr id="11" name="Rectangle 10"/>
+          <p:cNvSpPr/>
+          <p:nvPr/>
+        </p:nvSpPr>
+        <p:spPr>
+          <a:xfrm>
+            <a:off x="640080" y="2084832"/>
+            <a:ext cx="73152" cy="274320"/>
+          </a:xfrm>
+          <a:prstGeom prst="rect">
+            <a:avLst/>
+          </a:prstGeom>
+          <a:solidFill>
+            <a:srgbClr val="269CCB"/>
+          </a:solidFill>
+          <a:ln>
+            <a:noFill/>
+          </a:ln>
+        </p:spPr>
+        <p:style>
+          <a:lnRef idx="1">
+            <a:schemeClr val="accent1"/>
+          </a:lnRef>
+          <a:fillRef idx="3">
+            <a:schemeClr val="accent1"/>
+          </a:fillRef>
+          <a:effectRef idx="2">
+            <a:schemeClr val="accent1"/>
+          </a:effectRef>
+          <a:fontRef idx="minor">
+            <a:schemeClr val="lt1"/>
+          </a:fontRef>
+        </p:style>
+        <p:txBody>
+          <a:bodyPr rtlCol="0" anchor="ctr"/>
+          <a:lstStyle/>
+          <a:p>
+            <a:pPr algn="ctr"/>
+          </a:p>
+        </p:txBody>
+      </p:sp>
+      <p:sp>
+        <p:nvSpPr>
+          <p:cNvPr id="12" name="TextBox 11"/>
+          <p:cNvSpPr txBox="1"/>
+          <p:nvPr/>
+        </p:nvSpPr>
+        <p:spPr>
+          <a:xfrm>
+            <a:off x="1097280" y="2029968"/>
+            <a:ext cx="10362895" cy="402336"/>
+          </a:xfrm>
+          <a:prstGeom prst="rect">
+            <a:avLst/>
+          </a:prstGeom>
+          <a:noFill/>
+        </p:spPr>
+        <p:txBody>
+          <a:bodyPr wrap="square" anchor="ctr"/>
+          <a:lstStyle/>
+          <a:p>
+            <a:r>
+              <a:rPr sz="1500" b="0" i="0">
+                <a:solidFill>
+                  <a:srgbClr val="333333"/>
+                </a:solidFill>
+                <a:latin typeface="Calibri"/>
+              </a:rPr>
+              <a:t>□ ¿Los tres índices tienen el </a:t>
+            </a:r>
+            <a:r>
+              <a:rPr sz="1500" b="1" i="0">
+                <a:solidFill>
+                  <a:srgbClr val="333333"/>
+                </a:solidFill>
+                <a:latin typeface="Calibri"/>
+              </a:rPr>
+              <a:t>nombre exacto</a:t>
+            </a:r>
+            <a:r>
+              <a:rPr sz="1500" b="0" i="0">
+                <a:solidFill>
+                  <a:srgbClr val="333333"/>
+                </a:solidFill>
+                <a:latin typeface="Calibri"/>
+              </a:rPr>
+              <a:t> del enunciado, y el parcial lleva su cláusula «WHERE estado = 'PROGRAMADA'»?</a:t>
+            </a:r>
+          </a:p>
+        </p:txBody>
+      </p:sp>
+      <p:sp>
+        <p:nvSpPr>
+          <p:cNvPr id="13" name="Rounded Rectangle 12"/>
+          <p:cNvSpPr/>
+          <p:nvPr/>
+        </p:nvSpPr>
+        <p:spPr>
+          <a:xfrm>
+            <a:off x="457200" y="2615184"/>
+            <a:ext cx="11277295" cy="566928"/>
+          </a:xfrm>
+          <a:prstGeom prst="roundRect">
+            <a:avLst>
+              <a:gd name="adj" fmla="val 12000"/>
+            </a:avLst>
+          </a:prstGeom>
+          <a:solidFill>
+            <a:srgbClr val="F2F2F2"/>
+          </a:solidFill>
+          <a:ln>
+            <a:noFill/>
+          </a:ln>
+        </p:spPr>
+        <p:style>
+          <a:lnRef idx="1">
+            <a:schemeClr val="accent1"/>
+          </a:lnRef>
+          <a:fillRef idx="3">
+            <a:schemeClr val="accent1"/>
+          </a:fillRef>
+          <a:effectRef idx="2">
+            <a:schemeClr val="accent1"/>
+          </a:effectRef>
+          <a:fontRef idx="minor">
+            <a:schemeClr val="lt1"/>
+          </a:fontRef>
+        </p:style>
+        <p:txBody>
+          <a:bodyPr rtlCol="0" anchor="ctr"/>
+          <a:lstStyle/>
+          <a:p>
+            <a:pPr algn="ctr"/>
+          </a:p>
+        </p:txBody>
+      </p:sp>
+      <p:sp>
+        <p:nvSpPr>
+          <p:cNvPr id="14" name="Rectangle 13"/>
+          <p:cNvSpPr/>
+          <p:nvPr/>
+        </p:nvSpPr>
+        <p:spPr>
+          <a:xfrm>
+            <a:off x="640080" y="2761488"/>
+            <a:ext cx="274320" cy="274320"/>
+          </a:xfrm>
+          <a:prstGeom prst="rect">
+            <a:avLst/>
+          </a:prstGeom>
+          <a:solidFill>
+            <a:srgbClr val="FFFFFF"/>
+          </a:solidFill>
+          <a:ln>
+            <a:solidFill>
+              <a:srgbClr val="333333"/>
+            </a:solidFill>
+          </a:ln>
+        </p:spPr>
+        <p:style>
+          <a:lnRef idx="1">
+            <a:schemeClr val="accent1"/>
+          </a:lnRef>
+          <a:fillRef idx="3">
+            <a:schemeClr val="accent1"/>
+          </a:fillRef>
+          <a:effectRef idx="2">
+            <a:schemeClr val="accent1"/>
+          </a:effectRef>
+          <a:fontRef idx="minor">
+            <a:schemeClr val="lt1"/>
+          </a:fontRef>
+        </p:style>
+        <p:txBody>
+          <a:bodyPr rtlCol="0" anchor="ctr"/>
+          <a:lstStyle/>
+          <a:p>
+            <a:pPr algn="ctr"/>
+          </a:p>
+        </p:txBody>
+      </p:sp>
+      <p:sp>
+        <p:nvSpPr>
+          <p:cNvPr id="15" name="Rectangle 14"/>
+          <p:cNvSpPr/>
+          <p:nvPr/>
+        </p:nvSpPr>
+        <p:spPr>
+          <a:xfrm>
+            <a:off x="640080" y="2761488"/>
+            <a:ext cx="73152" cy="274320"/>
+          </a:xfrm>
+          <a:prstGeom prst="rect">
+            <a:avLst/>
+          </a:prstGeom>
+          <a:solidFill>
+            <a:srgbClr val="269CCB"/>
+          </a:solidFill>
+          <a:ln>
+            <a:noFill/>
+          </a:ln>
+        </p:spPr>
+        <p:style>
+          <a:lnRef idx="1">
+            <a:schemeClr val="accent1"/>
+          </a:lnRef>
+          <a:fillRef idx="3">
+            <a:schemeClr val="accent1"/>
+          </a:fillRef>
+          <a:effectRef idx="2">
+            <a:schemeClr val="accent1"/>
+          </a:effectRef>
+          <a:fontRef idx="minor">
+            <a:schemeClr val="lt1"/>
+          </a:fontRef>
+        </p:style>
+        <p:txBody>
+          <a:bodyPr rtlCol="0" anchor="ctr"/>
+          <a:lstStyle/>
+          <a:p>
+            <a:pPr algn="ctr"/>
+          </a:p>
+        </p:txBody>
+      </p:sp>
+      <p:sp>
+        <p:nvSpPr>
+          <p:cNvPr id="16" name="TextBox 15"/>
+          <p:cNvSpPr txBox="1"/>
+          <p:nvPr/>
+        </p:nvSpPr>
+        <p:spPr>
+          <a:xfrm>
+            <a:off x="1097280" y="2706624"/>
+            <a:ext cx="10362895" cy="402336"/>
+          </a:xfrm>
+          <a:prstGeom prst="rect">
+            <a:avLst/>
+          </a:prstGeom>
+          <a:noFill/>
+        </p:spPr>
+        <p:txBody>
+          <a:bodyPr wrap="square" anchor="ctr"/>
+          <a:lstStyle/>
+          <a:p>
+            <a:r>
+              <a:rPr sz="1500" b="0" i="0">
+                <a:solidFill>
+                  <a:srgbClr val="333333"/>
+                </a:solidFill>
+                <a:latin typeface="Calibri"/>
+              </a:rPr>
+              <a:t>□ ¿Corriste «ANALYZE cita;» y «ANALYZE mascota;» antes de volver a medir? Sin estadísticas frescas el planeador puede seguir eligiendo el barrido.</a:t>
+            </a:r>
+          </a:p>
+        </p:txBody>
+      </p:sp>
+      <p:sp>
+        <p:nvSpPr>
+          <p:cNvPr id="17" name="Rounded Rectangle 16"/>
+          <p:cNvSpPr/>
+          <p:nvPr/>
+        </p:nvSpPr>
+        <p:spPr>
+          <a:xfrm>
+            <a:off x="457200" y="3291840"/>
+            <a:ext cx="11277295" cy="566928"/>
+          </a:xfrm>
+          <a:prstGeom prst="roundRect">
+            <a:avLst>
+              <a:gd name="adj" fmla="val 12000"/>
+            </a:avLst>
+          </a:prstGeom>
+          <a:solidFill>
+            <a:srgbClr val="F2F2F2"/>
+          </a:solidFill>
+          <a:ln>
+            <a:noFill/>
+          </a:ln>
+        </p:spPr>
+        <p:style>
+          <a:lnRef idx="1">
+            <a:schemeClr val="accent1"/>
+          </a:lnRef>
+          <a:fillRef idx="3">
+            <a:schemeClr val="accent1"/>
+          </a:fillRef>
+          <a:effectRef idx="2">
+            <a:schemeClr val="accent1"/>
+          </a:effectRef>
+          <a:fontRef idx="minor">
+            <a:schemeClr val="lt1"/>
+          </a:fontRef>
+        </p:style>
+        <p:txBody>
+          <a:bodyPr rtlCol="0" anchor="ctr"/>
+          <a:lstStyle/>
+          <a:p>
+            <a:pPr algn="ctr"/>
+          </a:p>
+        </p:txBody>
+      </p:sp>
+      <p:sp>
+        <p:nvSpPr>
+          <p:cNvPr id="18" name="Rectangle 17"/>
+          <p:cNvSpPr/>
+          <p:nvPr/>
+        </p:nvSpPr>
+        <p:spPr>
+          <a:xfrm>
+            <a:off x="640080" y="3438144"/>
+            <a:ext cx="274320" cy="274320"/>
+          </a:xfrm>
+          <a:prstGeom prst="rect">
+            <a:avLst/>
+          </a:prstGeom>
+          <a:solidFill>
+            <a:srgbClr val="FFFFFF"/>
+          </a:solidFill>
+          <a:ln>
+            <a:solidFill>
+              <a:srgbClr val="333333"/>
+            </a:solidFill>
+          </a:ln>
+        </p:spPr>
+        <p:style>
+          <a:lnRef idx="1">
+            <a:schemeClr val="accent1"/>
+          </a:lnRef>
+          <a:fillRef idx="3">
+            <a:schemeClr val="accent1"/>
+          </a:fillRef>
+          <a:effectRef idx="2">
+            <a:schemeClr val="accent1"/>
+          </a:effectRef>
+          <a:fontRef idx="minor">
+            <a:schemeClr val="lt1"/>
+          </a:fontRef>
+        </p:style>
+        <p:txBody>
+          <a:bodyPr rtlCol="0" anchor="ctr"/>
+          <a:lstStyle/>
+          <a:p>
+            <a:pPr algn="ctr"/>
+          </a:p>
+        </p:txBody>
+      </p:sp>
+      <p:sp>
+        <p:nvSpPr>
+          <p:cNvPr id="19" name="Rectangle 18"/>
+          <p:cNvSpPr/>
+          <p:nvPr/>
+        </p:nvSpPr>
+        <p:spPr>
+          <a:xfrm>
+            <a:off x="640080" y="3438144"/>
+            <a:ext cx="73152" cy="274320"/>
+          </a:xfrm>
+          <a:prstGeom prst="rect">
+            <a:avLst/>
+          </a:prstGeom>
+          <a:solidFill>
+            <a:srgbClr val="269CCB"/>
+          </a:solidFill>
+          <a:ln>
+            <a:noFill/>
+          </a:ln>
+        </p:spPr>
+        <p:style>
+          <a:lnRef idx="1">
+            <a:schemeClr val="accent1"/>
+          </a:lnRef>
+          <a:fillRef idx="3">
+            <a:schemeClr val="accent1"/>
+          </a:fillRef>
+          <a:effectRef idx="2">
+            <a:schemeClr val="accent1"/>
+          </a:effectRef>
+          <a:fontRef idx="minor">
+            <a:schemeClr val="lt1"/>
+          </a:fontRef>
+        </p:style>
+        <p:txBody>
+          <a:bodyPr rtlCol="0" anchor="ctr"/>
+          <a:lstStyle/>
+          <a:p>
+            <a:pPr algn="ctr"/>
+          </a:p>
+        </p:txBody>
+      </p:sp>
+      <p:sp>
+        <p:nvSpPr>
+          <p:cNvPr id="20" name="TextBox 19"/>
+          <p:cNvSpPr txBox="1"/>
+          <p:nvPr/>
+        </p:nvSpPr>
+        <p:spPr>
+          <a:xfrm>
+            <a:off x="1097280" y="3383280"/>
+            <a:ext cx="10362895" cy="402336"/>
+          </a:xfrm>
+          <a:prstGeom prst="rect">
+            <a:avLst/>
+          </a:prstGeom>
+          <a:noFill/>
+        </p:spPr>
+        <p:txBody>
+          <a:bodyPr wrap="square" anchor="ctr"/>
+          <a:lstStyle/>
+          <a:p>
+            <a:r>
+              <a:rPr sz="1500" b="0" i="0">
+                <a:solidFill>
+                  <a:srgbClr val="333333"/>
+                </a:solidFill>
+                <a:latin typeface="Calibri"/>
+              </a:rPr>
+              <a:t>□ ¿Dijiste </a:t>
+            </a:r>
+            <a:r>
+              <a:rPr sz="1500" b="1" i="0">
+                <a:solidFill>
+                  <a:srgbClr val="333333"/>
+                </a:solidFill>
+                <a:latin typeface="Calibri"/>
+              </a:rPr>
+              <a:t>cuál</a:t>
+            </a:r>
+            <a:r>
+              <a:rPr sz="1500" b="0" i="0">
+                <a:solidFill>
+                  <a:srgbClr val="333333"/>
+                </a:solidFill>
+                <a:latin typeface="Calibri"/>
+              </a:rPr>
+              <a:t> de los dos índices sobre «fecha_hora» usó la agenda del día, y por qué ese y no el otro?</a:t>
+            </a:r>
+          </a:p>
+        </p:txBody>
+      </p:sp>
+      <p:sp>
+        <p:nvSpPr>
+          <p:cNvPr id="21" name="Rounded Rectangle 20"/>
+          <p:cNvSpPr/>
+          <p:nvPr/>
+        </p:nvSpPr>
+        <p:spPr>
+          <a:xfrm>
+            <a:off x="457200" y="3968496"/>
+            <a:ext cx="11277295" cy="566928"/>
+          </a:xfrm>
+          <a:prstGeom prst="roundRect">
+            <a:avLst>
+              <a:gd name="adj" fmla="val 12000"/>
+            </a:avLst>
+          </a:prstGeom>
+          <a:solidFill>
+            <a:srgbClr val="F2F2F2"/>
+          </a:solidFill>
+          <a:ln>
+            <a:noFill/>
+          </a:ln>
+        </p:spPr>
+        <p:style>
+          <a:lnRef idx="1">
+            <a:schemeClr val="accent1"/>
+          </a:lnRef>
+          <a:fillRef idx="3">
+            <a:schemeClr val="accent1"/>
+          </a:fillRef>
+          <a:effectRef idx="2">
+            <a:schemeClr val="accent1"/>
+          </a:effectRef>
+          <a:fontRef idx="minor">
+            <a:schemeClr val="lt1"/>
+          </a:fontRef>
+        </p:style>
+        <p:txBody>
+          <a:bodyPr rtlCol="0" anchor="ctr"/>
+          <a:lstStyle/>
+          <a:p>
+            <a:pPr algn="ctr"/>
+          </a:p>
+        </p:txBody>
+      </p:sp>
+      <p:sp>
+        <p:nvSpPr>
+          <p:cNvPr id="22" name="Rectangle 21"/>
+          <p:cNvSpPr/>
+          <p:nvPr/>
+        </p:nvSpPr>
+        <p:spPr>
+          <a:xfrm>
+            <a:off x="640080" y="4114800"/>
+            <a:ext cx="274320" cy="274320"/>
+          </a:xfrm>
+          <a:prstGeom prst="rect">
+            <a:avLst/>
+          </a:prstGeom>
+          <a:solidFill>
+            <a:srgbClr val="FFFFFF"/>
+          </a:solidFill>
+          <a:ln>
+            <a:solidFill>
+              <a:srgbClr val="333333"/>
+            </a:solidFill>
+          </a:ln>
+        </p:spPr>
+        <p:style>
+          <a:lnRef idx="1">
+            <a:schemeClr val="accent1"/>
+          </a:lnRef>
+          <a:fillRef idx="3">
+            <a:schemeClr val="accent1"/>
+          </a:fillRef>
+          <a:effectRef idx="2">
+            <a:schemeClr val="accent1"/>
+          </a:effectRef>
+          <a:fontRef idx="minor">
+            <a:schemeClr val="lt1"/>
+          </a:fontRef>
+        </p:style>
+        <p:txBody>
+          <a:bodyPr rtlCol="0" anchor="ctr"/>
+          <a:lstStyle/>
+          <a:p>
+            <a:pPr algn="ctr"/>
+          </a:p>
+        </p:txBody>
+      </p:sp>
+      <p:sp>
+        <p:nvSpPr>
+          <p:cNvPr id="23" name="Rectangle 22"/>
+          <p:cNvSpPr/>
+          <p:nvPr/>
+        </p:nvSpPr>
+        <p:spPr>
+          <a:xfrm>
+            <a:off x="640080" y="4114800"/>
+            <a:ext cx="73152" cy="274320"/>
+          </a:xfrm>
+          <a:prstGeom prst="rect">
+            <a:avLst/>
+          </a:prstGeom>
+          <a:solidFill>
+            <a:srgbClr val="269CCB"/>
+          </a:solidFill>
+          <a:ln>
+            <a:noFill/>
+          </a:ln>
+        </p:spPr>
+        <p:style>
+          <a:lnRef idx="1">
+            <a:schemeClr val="accent1"/>
+          </a:lnRef>
+          <a:fillRef idx="3">
+            <a:schemeClr val="accent1"/>
+          </a:fillRef>
+          <a:effectRef idx="2">
+            <a:schemeClr val="accent1"/>
+          </a:effectRef>
+          <a:fontRef idx="minor">
+            <a:schemeClr val="lt1"/>
+          </a:fontRef>
+        </p:style>
+        <p:txBody>
+          <a:bodyPr rtlCol="0" anchor="ctr"/>
+          <a:lstStyle/>
+          <a:p>
+            <a:pPr algn="ctr"/>
+          </a:p>
+        </p:txBody>
+      </p:sp>
+      <p:sp>
+        <p:nvSpPr>
+          <p:cNvPr id="24" name="TextBox 23"/>
+          <p:cNvSpPr txBox="1"/>
+          <p:nvPr/>
+        </p:nvSpPr>
+        <p:spPr>
+          <a:xfrm>
+            <a:off x="1097280" y="4059936"/>
+            <a:ext cx="10362895" cy="402336"/>
+          </a:xfrm>
+          <a:prstGeom prst="rect">
+            <a:avLst/>
+          </a:prstGeom>
+          <a:noFill/>
+        </p:spPr>
+        <p:txBody>
+          <a:bodyPr wrap="square" anchor="ctr"/>
+          <a:lstStyle/>
+          <a:p>
+            <a:r>
+              <a:rPr sz="1500" b="0" i="0">
+                <a:solidFill>
+                  <a:srgbClr val="333333"/>
+                </a:solidFill>
+                <a:latin typeface="Calibri"/>
+              </a:rPr>
+              <a:t>□ En la pregunta 2, ¿hiciste el «DROP INDEX» y volviste a medir </a:t>
+            </a:r>
+            <a:r>
+              <a:rPr sz="1500" b="1" i="0">
+                <a:solidFill>
+                  <a:srgbClr val="333333"/>
+                </a:solidFill>
+                <a:latin typeface="Calibri"/>
+              </a:rPr>
+              <a:t>Q2</a:t>
+            </a:r>
+            <a:r>
+              <a:rPr sz="1500" b="0" i="0">
+                <a:solidFill>
+                  <a:srgbClr val="333333"/>
+                </a:solidFill>
+                <a:latin typeface="Calibri"/>
+              </a:rPr>
+              <a:t>? La comparación es el punto del experimento, no crear los dos índices.</a:t>
+            </a:r>
+          </a:p>
+        </p:txBody>
+      </p:sp>
+      <p:sp>
+        <p:nvSpPr>
+          <p:cNvPr id="25" name="Rounded Rectangle 24"/>
+          <p:cNvSpPr/>
+          <p:nvPr/>
+        </p:nvSpPr>
+        <p:spPr>
+          <a:xfrm>
+            <a:off x="457200" y="4645152"/>
+            <a:ext cx="11277295" cy="566928"/>
+          </a:xfrm>
+          <a:prstGeom prst="roundRect">
+            <a:avLst>
+              <a:gd name="adj" fmla="val 12000"/>
+            </a:avLst>
+          </a:prstGeom>
+          <a:solidFill>
+            <a:srgbClr val="F2F2F2"/>
+          </a:solidFill>
+          <a:ln>
+            <a:noFill/>
+          </a:ln>
+        </p:spPr>
+        <p:style>
+          <a:lnRef idx="1">
+            <a:schemeClr val="accent1"/>
+          </a:lnRef>
+          <a:fillRef idx="3">
+            <a:schemeClr val="accent1"/>
+          </a:fillRef>
+          <a:effectRef idx="2">
+            <a:schemeClr val="accent1"/>
+          </a:effectRef>
+          <a:fontRef idx="minor">
+            <a:schemeClr val="lt1"/>
+          </a:fontRef>
+        </p:style>
+        <p:txBody>
+          <a:bodyPr rtlCol="0" anchor="ctr"/>
+          <a:lstStyle/>
+          <a:p>
+            <a:pPr algn="ctr"/>
+          </a:p>
+        </p:txBody>
+      </p:sp>
+      <p:sp>
+        <p:nvSpPr>
+          <p:cNvPr id="26" name="Rectangle 25"/>
+          <p:cNvSpPr/>
+          <p:nvPr/>
+        </p:nvSpPr>
+        <p:spPr>
+          <a:xfrm>
+            <a:off x="640080" y="4791456"/>
+            <a:ext cx="274320" cy="274320"/>
+          </a:xfrm>
+          <a:prstGeom prst="rect">
+            <a:avLst/>
+          </a:prstGeom>
+          <a:solidFill>
+            <a:srgbClr val="FFFFFF"/>
+          </a:solidFill>
+          <a:ln>
+            <a:solidFill>
+              <a:srgbClr val="333333"/>
+            </a:solidFill>
+          </a:ln>
+        </p:spPr>
+        <p:style>
+          <a:lnRef idx="1">
+            <a:schemeClr val="accent1"/>
+          </a:lnRef>
+          <a:fillRef idx="3">
+            <a:schemeClr val="accent1"/>
+          </a:fillRef>
+          <a:effectRef idx="2">
+            <a:schemeClr val="accent1"/>
+          </a:effectRef>
+          <a:fontRef idx="minor">
+            <a:schemeClr val="lt1"/>
+          </a:fontRef>
+        </p:style>
+        <p:txBody>
+          <a:bodyPr rtlCol="0" anchor="ctr"/>
+          <a:lstStyle/>
+          <a:p>
+            <a:pPr algn="ctr"/>
+          </a:p>
+        </p:txBody>
+      </p:sp>
+      <p:sp>
+        <p:nvSpPr>
+          <p:cNvPr id="27" name="Rectangle 26"/>
+          <p:cNvSpPr/>
+          <p:nvPr/>
+        </p:nvSpPr>
+        <p:spPr>
+          <a:xfrm>
+            <a:off x="640080" y="4791456"/>
+            <a:ext cx="73152" cy="274320"/>
+          </a:xfrm>
+          <a:prstGeom prst="rect">
+            <a:avLst/>
+          </a:prstGeom>
+          <a:solidFill>
+            <a:srgbClr val="269CCB"/>
+          </a:solidFill>
+          <a:ln>
+            <a:noFill/>
+          </a:ln>
+        </p:spPr>
+        <p:style>
+          <a:lnRef idx="1">
+            <a:schemeClr val="accent1"/>
+          </a:lnRef>
+          <a:fillRef idx="3">
+            <a:schemeClr val="accent1"/>
+          </a:fillRef>
+          <a:effectRef idx="2">
+            <a:schemeClr val="accent1"/>
+          </a:effectRef>
+          <a:fontRef idx="minor">
+            <a:schemeClr val="lt1"/>
+          </a:fontRef>
+        </p:style>
+        <p:txBody>
+          <a:bodyPr rtlCol="0" anchor="ctr"/>
+          <a:lstStyle/>
+          <a:p>
+            <a:pPr algn="ctr"/>
+          </a:p>
+        </p:txBody>
+      </p:sp>
+      <p:sp>
+        <p:nvSpPr>
+          <p:cNvPr id="28" name="TextBox 27"/>
+          <p:cNvSpPr txBox="1"/>
+          <p:nvPr/>
+        </p:nvSpPr>
+        <p:spPr>
+          <a:xfrm>
+            <a:off x="1097280" y="4736592"/>
+            <a:ext cx="10362895" cy="402336"/>
+          </a:xfrm>
+          <a:prstGeom prst="rect">
+            <a:avLst/>
+          </a:prstGeom>
+          <a:noFill/>
+        </p:spPr>
+        <p:txBody>
+          <a:bodyPr wrap="square" anchor="ctr"/>
+          <a:lstStyle/>
+          <a:p>
+            <a:r>
+              <a:rPr sz="1500" b="0" i="0">
+                <a:solidFill>
+                  <a:srgbClr val="333333"/>
+                </a:solidFill>
+                <a:latin typeface="Calibri"/>
+              </a:rPr>
+              <a:t>□ ¿La «-- CONCLUSION:» habla del orden de las columnas, o solo dice que el índice sirvió?</a:t>
+            </a:r>
+          </a:p>
+        </p:txBody>
+      </p:sp>
+      <p:sp>
+        <p:nvSpPr>
+          <p:cNvPr id="29" name="Rounded Rectangle 28"/>
+          <p:cNvSpPr/>
+          <p:nvPr/>
+        </p:nvSpPr>
+        <p:spPr>
+          <a:xfrm>
+            <a:off x="457200" y="5321808"/>
+            <a:ext cx="11277295" cy="566928"/>
+          </a:xfrm>
+          <a:prstGeom prst="roundRect">
+            <a:avLst>
+              <a:gd name="adj" fmla="val 12000"/>
+            </a:avLst>
+          </a:prstGeom>
+          <a:solidFill>
+            <a:srgbClr val="F2F2F2"/>
+          </a:solidFill>
+          <a:ln>
+            <a:noFill/>
+          </a:ln>
+        </p:spPr>
+        <p:style>
+          <a:lnRef idx="1">
+            <a:schemeClr val="accent1"/>
+          </a:lnRef>
+          <a:fillRef idx="3">
+            <a:schemeClr val="accent1"/>
+          </a:fillRef>
+          <a:effectRef idx="2">
+            <a:schemeClr val="accent1"/>
+          </a:effectRef>
+          <a:fontRef idx="minor">
+            <a:schemeClr val="lt1"/>
+          </a:fontRef>
+        </p:style>
+        <p:txBody>
+          <a:bodyPr rtlCol="0" anchor="ctr"/>
+          <a:lstStyle/>
+          <a:p>
+            <a:pPr algn="ctr"/>
+          </a:p>
+        </p:txBody>
+      </p:sp>
+      <p:sp>
+        <p:nvSpPr>
+          <p:cNvPr id="30" name="Rectangle 29"/>
+          <p:cNvSpPr/>
+          <p:nvPr/>
+        </p:nvSpPr>
+        <p:spPr>
+          <a:xfrm>
+            <a:off x="640080" y="5468112"/>
+            <a:ext cx="274320" cy="274320"/>
+          </a:xfrm>
+          <a:prstGeom prst="rect">
+            <a:avLst/>
+          </a:prstGeom>
+          <a:solidFill>
+            <a:srgbClr val="FFFFFF"/>
+          </a:solidFill>
+          <a:ln>
+            <a:solidFill>
+              <a:srgbClr val="333333"/>
+            </a:solidFill>
+          </a:ln>
+        </p:spPr>
+        <p:style>
+          <a:lnRef idx="1">
+            <a:schemeClr val="accent1"/>
+          </a:lnRef>
+          <a:fillRef idx="3">
+            <a:schemeClr val="accent1"/>
+          </a:fillRef>
+          <a:effectRef idx="2">
+            <a:schemeClr val="accent1"/>
+          </a:effectRef>
+          <a:fontRef idx="minor">
+            <a:schemeClr val="lt1"/>
+          </a:fontRef>
+        </p:style>
+        <p:txBody>
+          <a:bodyPr rtlCol="0" anchor="ctr"/>
+          <a:lstStyle/>
+          <a:p>
+            <a:pPr algn="ctr"/>
+          </a:p>
+        </p:txBody>
+      </p:sp>
+      <p:sp>
+        <p:nvSpPr>
+          <p:cNvPr id="31" name="Rectangle 30"/>
+          <p:cNvSpPr/>
+          <p:nvPr/>
+        </p:nvSpPr>
+        <p:spPr>
+          <a:xfrm>
+            <a:off x="640080" y="5468112"/>
+            <a:ext cx="73152" cy="274320"/>
+          </a:xfrm>
+          <a:prstGeom prst="rect">
+            <a:avLst/>
+          </a:prstGeom>
+          <a:solidFill>
+            <a:srgbClr val="269CCB"/>
+          </a:solidFill>
+          <a:ln>
+            <a:noFill/>
+          </a:ln>
+        </p:spPr>
+        <p:style>
+          <a:lnRef idx="1">
+            <a:schemeClr val="accent1"/>
+          </a:lnRef>
+          <a:fillRef idx="3">
+            <a:schemeClr val="accent1"/>
+          </a:fillRef>
+          <a:effectRef idx="2">
+            <a:schemeClr val="accent1"/>
+          </a:effectRef>
+          <a:fontRef idx="minor">
+            <a:schemeClr val="lt1"/>
+          </a:fontRef>
+        </p:style>
+        <p:txBody>
+          <a:bodyPr rtlCol="0" anchor="ctr"/>
+          <a:lstStyle/>
+          <a:p>
+            <a:pPr algn="ctr"/>
+          </a:p>
+        </p:txBody>
+      </p:sp>
+      <p:sp>
+        <p:nvSpPr>
+          <p:cNvPr id="32" name="TextBox 31"/>
+          <p:cNvSpPr txBox="1"/>
+          <p:nvPr/>
+        </p:nvSpPr>
+        <p:spPr>
+          <a:xfrm>
+            <a:off x="1097280" y="5413248"/>
+            <a:ext cx="10362895" cy="402336"/>
+          </a:xfrm>
+          <a:prstGeom prst="rect">
+            <a:avLst/>
+          </a:prstGeom>
+          <a:noFill/>
+        </p:spPr>
+        <p:txBody>
+          <a:bodyPr wrap="square" anchor="ctr"/>
+          <a:lstStyle/>
+          <a:p>
+            <a:r>
+              <a:rPr sz="1500" b="0" i="0">
+                <a:solidFill>
+                  <a:srgbClr val="333333"/>
+                </a:solidFill>
+                <a:latin typeface="Calibri"/>
+              </a:rPr>
+              <a:t>□ En «cita_hist», ¿la PK incluye «fecha_hora»? PostgreSQL </a:t>
+            </a:r>
+            <a:r>
+              <a:rPr sz="1500" b="1" i="0">
+                <a:solidFill>
+                  <a:srgbClr val="333333"/>
+                </a:solidFill>
+                <a:latin typeface="Calibri"/>
+              </a:rPr>
+              <a:t>rechaza</a:t>
+            </a:r>
+            <a:r>
+              <a:rPr sz="1500" b="0" i="0">
+                <a:solidFill>
+                  <a:srgbClr val="333333"/>
+                </a:solidFill>
+                <a:latin typeface="Calibri"/>
+              </a:rPr>
+              <a:t> una PK particionada que no contenga la columna de partición.</a:t>
+            </a:r>
+          </a:p>
+        </p:txBody>
+      </p:sp>
+      <p:sp>
+        <p:nvSpPr>
+          <p:cNvPr id="33" name="Rounded Rectangle 32"/>
+          <p:cNvSpPr/>
+          <p:nvPr/>
+        </p:nvSpPr>
+        <p:spPr>
+          <a:xfrm>
+            <a:off x="457200" y="5998464"/>
+            <a:ext cx="11277295" cy="566928"/>
+          </a:xfrm>
+          <a:prstGeom prst="roundRect">
+            <a:avLst>
+              <a:gd name="adj" fmla="val 12000"/>
+            </a:avLst>
+          </a:prstGeom>
+          <a:solidFill>
+            <a:srgbClr val="F2F2F2"/>
+          </a:solidFill>
+          <a:ln>
+            <a:noFill/>
+          </a:ln>
+        </p:spPr>
+        <p:style>
+          <a:lnRef idx="1">
+            <a:schemeClr val="accent1"/>
+          </a:lnRef>
+          <a:fillRef idx="3">
+            <a:schemeClr val="accent1"/>
+          </a:fillRef>
+          <a:effectRef idx="2">
+            <a:schemeClr val="accent1"/>
+          </a:effectRef>
+          <a:fontRef idx="minor">
+            <a:schemeClr val="lt1"/>
+          </a:fontRef>
+        </p:style>
+        <p:txBody>
+          <a:bodyPr rtlCol="0" anchor="ctr"/>
+          <a:lstStyle/>
+          <a:p>
+            <a:pPr algn="ctr"/>
+          </a:p>
+        </p:txBody>
+      </p:sp>
+      <p:sp>
+        <p:nvSpPr>
+          <p:cNvPr id="34" name="Rectangle 33"/>
+          <p:cNvSpPr/>
+          <p:nvPr/>
+        </p:nvSpPr>
+        <p:spPr>
+          <a:xfrm>
+            <a:off x="640080" y="6144768"/>
+            <a:ext cx="274320" cy="274320"/>
+          </a:xfrm>
+          <a:prstGeom prst="rect">
+            <a:avLst/>
+          </a:prstGeom>
+          <a:solidFill>
+            <a:srgbClr val="FFFFFF"/>
+          </a:solidFill>
+          <a:ln>
+            <a:solidFill>
+              <a:srgbClr val="333333"/>
+            </a:solidFill>
+          </a:ln>
+        </p:spPr>
+        <p:style>
+          <a:lnRef idx="1">
+            <a:schemeClr val="accent1"/>
+          </a:lnRef>
+          <a:fillRef idx="3">
+            <a:schemeClr val="accent1"/>
+          </a:fillRef>
+          <a:effectRef idx="2">
+            <a:schemeClr val="accent1"/>
+          </a:effectRef>
+          <a:fontRef idx="minor">
+            <a:schemeClr val="lt1"/>
+          </a:fontRef>
+        </p:style>
+        <p:txBody>
+          <a:bodyPr rtlCol="0" anchor="ctr"/>
+          <a:lstStyle/>
+          <a:p>
+            <a:pPr algn="ctr"/>
+          </a:p>
+        </p:txBody>
+      </p:sp>
+      <p:sp>
+        <p:nvSpPr>
+          <p:cNvPr id="35" name="Rectangle 34"/>
+          <p:cNvSpPr/>
+          <p:nvPr/>
+        </p:nvSpPr>
+        <p:spPr>
+          <a:xfrm>
+            <a:off x="640080" y="6144768"/>
+            <a:ext cx="73152" cy="274320"/>
+          </a:xfrm>
+          <a:prstGeom prst="rect">
+            <a:avLst/>
+          </a:prstGeom>
+          <a:solidFill>
+            <a:srgbClr val="269CCB"/>
+          </a:solidFill>
+          <a:ln>
+            <a:noFill/>
+          </a:ln>
+        </p:spPr>
+        <p:style>
+          <a:lnRef idx="1">
+            <a:schemeClr val="accent1"/>
+          </a:lnRef>
+          <a:fillRef idx="3">
+            <a:schemeClr val="accent1"/>
+          </a:fillRef>
+          <a:effectRef idx="2">
+            <a:schemeClr val="accent1"/>
+          </a:effectRef>
+          <a:fontRef idx="minor">
+            <a:schemeClr val="lt1"/>
+          </a:fontRef>
+        </p:style>
+        <p:txBody>
+          <a:bodyPr rtlCol="0" anchor="ctr"/>
+          <a:lstStyle/>
+          <a:p>
+            <a:pPr algn="ctr"/>
+          </a:p>
+        </p:txBody>
+      </p:sp>
+      <p:sp>
+        <p:nvSpPr>
+          <p:cNvPr id="36" name="TextBox 35"/>
+          <p:cNvSpPr txBox="1"/>
+          <p:nvPr/>
+        </p:nvSpPr>
+        <p:spPr>
+          <a:xfrm>
+            <a:off x="1097280" y="6089904"/>
+            <a:ext cx="10362895" cy="402336"/>
+          </a:xfrm>
+          <a:prstGeom prst="rect">
+            <a:avLst/>
+          </a:prstGeom>
+          <a:noFill/>
+        </p:spPr>
+        <p:txBody>
+          <a:bodyPr wrap="square" anchor="ctr"/>
+          <a:lstStyle/>
+          <a:p>
+            <a:r>
+              <a:rPr sz="1500" b="0" i="0">
+                <a:solidFill>
+                  <a:srgbClr val="333333"/>
+                </a:solidFill>
+                <a:latin typeface="Calibri"/>
+              </a:rPr>
+              <a:t>□ ¿El plan de la consulta de 2026 muestra </a:t>
+            </a:r>
+            <a:r>
+              <a:rPr sz="1500" b="1" i="0">
+                <a:solidFill>
+                  <a:srgbClr val="333333"/>
+                </a:solidFill>
+                <a:latin typeface="Calibri"/>
+              </a:rPr>
+              <a:t>una sola</a:t>
+            </a:r>
+            <a:r>
+              <a:rPr sz="1500" b="0" i="0">
+                <a:solidFill>
+                  <a:srgbClr val="333333"/>
+                </a:solidFill>
+                <a:latin typeface="Calibri"/>
+              </a:rPr>
+              <a:t> partición? Si aparecen las dos, no hubo poda y eso es lo que se califica.</a:t>
+            </a:r>
+          </a:p>
+        </p:txBody>
+      </p:sp>
+      <p:sp>
+        <p:nvSpPr>
+          <p:cNvPr id="37" name="TextBox 36"/>
+          <p:cNvSpPr txBox="1"/>
+          <p:nvPr/>
+        </p:nvSpPr>
+        <p:spPr>
+          <a:xfrm>
+            <a:off x="11185855" y="6473952"/>
+            <a:ext cx="640080" cy="274320"/>
+          </a:xfrm>
+          <a:prstGeom prst="rect">
+            <a:avLst/>
+          </a:prstGeom>
+          <a:noFill/>
+        </p:spPr>
+        <p:txBody>
+          <a:bodyPr wrap="square">
+            <a:spAutoFit/>
+          </a:bodyPr>
+          <a:lstStyle/>
+          <a:p>
+            <a:pPr algn="r"/>
+            <a:r>
+              <a:rPr sz="1100" b="0" i="0">
+                <a:solidFill>
+                  <a:srgbClr val="666666"/>
+                </a:solidFill>
+                <a:latin typeface="Calibri"/>
+              </a:rPr>
+              <a:t>15</a:t>
+            </a:r>
+          </a:p>
+        </p:txBody>
+      </p:sp>
+    </p:spTree>
+  </p:cSld>
+  <p:clrMapOvr>
+    <a:masterClrMapping/>
+  </p:clrMapOvr>
+</p:sld>
+</file>
+
+<file path=ppt/slides/slide16.xml><?xml version="1.0" encoding="utf-8"?>
+<p:sld xmlns:a="http://schemas.openxmlformats.org/drawingml/2006/main" xmlns:p="http://schemas.openxmlformats.org/presentationml/2006/main" xmlns:r="http://schemas.openxmlformats.org/officeDocument/2006/relationships">
+  <p:cSld>
+    <p:bg>
+      <p:bgPr>
+        <a:solidFill>
+          <a:srgbClr val="FFFFFF"/>
+        </a:solidFill>
+        <a:effectLst/>
+      </p:bgPr>
+    </p:bg>
+    <p:spTree>
+      <p:nvGrpSpPr>
+        <p:cNvPr id="1" name=""/>
+        <p:cNvGrpSpPr/>
+        <p:nvPr/>
+      </p:nvGrpSpPr>
+      <p:grpSpPr/>
+      <p:sp>
+        <p:nvSpPr>
+          <p:cNvPr id="2" name="Rectangle 1"/>
+          <p:cNvSpPr/>
+          <p:nvPr/>
+        </p:nvSpPr>
+        <p:spPr>
+          <a:xfrm>
+            <a:off x="0" y="0"/>
+            <a:ext cx="12191695" cy="960120"/>
+          </a:xfrm>
+          <a:prstGeom prst="rect">
+            <a:avLst/>
+          </a:prstGeom>
+          <a:solidFill>
+            <a:srgbClr val="095292"/>
+          </a:solidFill>
+          <a:ln>
+            <a:noFill/>
+          </a:ln>
+        </p:spPr>
+        <p:style>
+          <a:lnRef idx="1">
+            <a:schemeClr val="accent1"/>
+          </a:lnRef>
+          <a:fillRef idx="3">
+            <a:schemeClr val="accent1"/>
+          </a:fillRef>
+          <a:effectRef idx="2">
+            <a:schemeClr val="accent1"/>
+          </a:effectRef>
+          <a:fontRef idx="minor">
+            <a:schemeClr val="lt1"/>
+          </a:fontRef>
+        </p:style>
+        <p:txBody>
+          <a:bodyPr rtlCol="0" anchor="ctr"/>
+          <a:lstStyle/>
+          <a:p>
+            <a:pPr algn="ctr"/>
+          </a:p>
+        </p:txBody>
+      </p:sp>
+      <p:sp>
+        <p:nvSpPr>
+          <p:cNvPr id="3" name="Rectangle 2"/>
+          <p:cNvSpPr/>
+          <p:nvPr/>
+        </p:nvSpPr>
+        <p:spPr>
+          <a:xfrm>
+            <a:off x="0" y="960120"/>
+            <a:ext cx="12191695" cy="41148"/>
+          </a:xfrm>
+          <a:prstGeom prst="rect">
+            <a:avLst/>
+          </a:prstGeom>
+          <a:solidFill>
+            <a:srgbClr val="FFD000"/>
+          </a:solidFill>
+          <a:ln>
+            <a:noFill/>
+          </a:ln>
+        </p:spPr>
+        <p:style>
+          <a:lnRef idx="1">
+            <a:schemeClr val="accent1"/>
+          </a:lnRef>
+          <a:fillRef idx="3">
+            <a:schemeClr val="accent1"/>
+          </a:fillRef>
+          <a:effectRef idx="2">
+            <a:schemeClr val="accent1"/>
+          </a:effectRef>
+          <a:fontRef idx="minor">
+            <a:schemeClr val="lt1"/>
+          </a:fontRef>
+        </p:style>
+        <p:txBody>
+          <a:bodyPr rtlCol="0" anchor="ctr"/>
+          <a:lstStyle/>
+          <a:p>
+            <a:pPr algn="ctr"/>
+          </a:p>
+        </p:txBody>
+      </p:sp>
+      <p:sp>
+        <p:nvSpPr>
+          <p:cNvPr id="4" name="TextBox 3"/>
+          <p:cNvSpPr txBox="1"/>
+          <p:nvPr/>
+        </p:nvSpPr>
+        <p:spPr>
+          <a:xfrm>
+            <a:off x="457200" y="164592"/>
+            <a:ext cx="11277295" cy="502920"/>
+          </a:xfrm>
+          <a:prstGeom prst="rect">
+            <a:avLst/>
+          </a:prstGeom>
+          <a:noFill/>
+        </p:spPr>
+        <p:txBody>
+          <a:bodyPr wrap="square">
+            <a:spAutoFit/>
+          </a:bodyPr>
+          <a:lstStyle/>
+          <a:p>
+            <a:r>
+              <a:rPr sz="2600" b="1" i="0">
+                <a:solidFill>
+                  <a:srgbClr val="FFFFFF"/>
+                </a:solidFill>
+                <a:latin typeface="Calibri"/>
+              </a:rPr>
+              <a:t>Criterios de exito / entregable</a:t>
+            </a:r>
+          </a:p>
+        </p:txBody>
+      </p:sp>
+      <p:sp>
+        <p:nvSpPr>
+          <p:cNvPr id="5" name="TextBox 4"/>
+          <p:cNvSpPr txBox="1"/>
+          <p:nvPr/>
+        </p:nvSpPr>
+        <p:spPr>
+          <a:xfrm>
+            <a:off x="457200" y="1170432"/>
+            <a:ext cx="11277295" cy="5230368"/>
+          </a:xfrm>
+          <a:prstGeom prst="rect">
+            <a:avLst/>
+          </a:prstGeom>
+          <a:noFill/>
+        </p:spPr>
+        <p:txBody>
+          <a:bodyPr wrap="square">
+            <a:spAutoFit/>
+          </a:bodyPr>
+          <a:lstStyle/>
+          <a:p>
+            <a:pPr>
+              <a:spcAft>
+                <a:spcPts val="800"/>
+              </a:spcAft>
+            </a:pPr>
+            <a:r>
+              <a:rPr sz="1600" b="0" i="0">
+                <a:solidFill>
+                  <a:srgbClr val="333333"/>
+                </a:solidFill>
+                <a:latin typeface="Calibri"/>
+              </a:rPr>
+              <a:t>–   </a:t>
+            </a:r>
+            <a:r>
+              <a:rPr sz="1600" b="1" i="0">
+                <a:solidFill>
+                  <a:srgbClr val="333333"/>
+                </a:solidFill>
+                <a:latin typeface="Calibri"/>
+              </a:rPr>
+              <a:t>Entregable:</a:t>
+            </a:r>
+            <a:r>
+              <a:rPr sz="1600" b="0" i="0">
+                <a:solidFill>
+                  <a:srgbClr val="333333"/>
+                </a:solidFill>
+                <a:latin typeface="Calibri"/>
+              </a:rPr>
+              <a:t> Script CREATE INDEX + cita_hist particionada + tabla justificacion consulta-&gt;indice</a:t>
+            </a:r>
+          </a:p>
+          <a:p>
+            <a:pPr>
+              <a:spcAft>
+                <a:spcPts val="800"/>
+              </a:spcAft>
+            </a:pPr>
+            <a:r>
+              <a:rPr sz="1600" b="0" i="0">
+                <a:solidFill>
+                  <a:srgbClr val="333333"/>
+                </a:solidFill>
+                <a:latin typeface="Calibri"/>
+              </a:rPr>
+              <a:t>–   Evidencia: el SQL y su salida quedan guardados en cada pregunta de ExamLab.</a:t>
+            </a:r>
+          </a:p>
+          <a:p>
+            <a:pPr>
+              <a:spcAft>
+                <a:spcPts val="800"/>
+              </a:spcAft>
+            </a:pPr>
+            <a:r>
+              <a:rPr sz="1600" b="0" i="0">
+                <a:solidFill>
+                  <a:srgbClr val="333333"/>
+                </a:solidFill>
+                <a:latin typeface="Calibri"/>
+              </a:rPr>
+              <a:t>–   Conserva copia en tu carpeta del PI (los .sql que pide el entregable).</a:t>
+            </a:r>
+          </a:p>
+          <a:p>
+            <a:pPr>
+              <a:spcAft>
+                <a:spcPts val="800"/>
+              </a:spcAft>
+            </a:pPr>
+            <a:r>
+              <a:rPr sz="1600" b="0" i="0">
+                <a:solidFill>
+                  <a:srgbClr val="333333"/>
+                </a:solidFill>
+                <a:latin typeface="Calibri"/>
+              </a:rPr>
+              <a:t>–   Actualizar checklist PI (que criterio de rubrica avanzo).</a:t>
+            </a:r>
+          </a:p>
+          <a:p>
+            <a:pPr>
+              <a:spcAft>
+                <a:spcPts val="800"/>
+              </a:spcAft>
+            </a:pPr>
+            <a:r>
+              <a:rPr sz="1600" b="0" i="0">
+                <a:solidFill>
+                  <a:srgbClr val="333333"/>
+                </a:solidFill>
+                <a:latin typeface="Calibri"/>
+              </a:rPr>
+              <a:t>–   </a:t>
+            </a:r>
+            <a:r>
+              <a:rPr sz="1600" b="1" i="0">
+                <a:solidFill>
+                  <a:srgbClr val="333333"/>
+                </a:solidFill>
+                <a:latin typeface="Calibri"/>
+              </a:rPr>
+              <a:t>Entrega en ExamLab</a:t>
+            </a:r>
+            <a:r>
+              <a:rPr sz="1600" b="0" i="0">
+                <a:solidFill>
+                  <a:srgbClr val="333333"/>
+                </a:solidFill>
+                <a:latin typeface="Calibri"/>
+              </a:rPr>
+              <a:t> (https://uniaj.examlab.workers.dev/) — domingo 23:59 cuando aplique taller.</a:t>
+            </a:r>
+          </a:p>
+        </p:txBody>
+      </p:sp>
+      <p:sp>
+        <p:nvSpPr>
+          <p:cNvPr id="6" name="TextBox 5"/>
+          <p:cNvSpPr txBox="1"/>
+          <p:nvPr/>
+        </p:nvSpPr>
+        <p:spPr>
+          <a:xfrm>
+            <a:off x="11185855" y="6473952"/>
+            <a:ext cx="640080" cy="274320"/>
+          </a:xfrm>
+          <a:prstGeom prst="rect">
+            <a:avLst/>
+          </a:prstGeom>
+          <a:noFill/>
+        </p:spPr>
+        <p:txBody>
+          <a:bodyPr wrap="square">
+            <a:spAutoFit/>
+          </a:bodyPr>
+          <a:lstStyle/>
+          <a:p>
+            <a:pPr algn="r"/>
+            <a:r>
+              <a:rPr sz="1100" b="0" i="0">
+                <a:solidFill>
+                  <a:srgbClr val="666666"/>
+                </a:solidFill>
+                <a:latin typeface="Calibri"/>
+              </a:rPr>
+              <a:t>16</a:t>
+            </a:r>
+          </a:p>
+        </p:txBody>
+      </p:sp>
+    </p:spTree>
+  </p:cSld>
+  <p:clrMapOvr>
+    <a:masterClrMapping/>
+  </p:clrMapOvr>
+</p:sld>
+</file>
+
+<file path=ppt/slides/slide17.xml><?xml version="1.0" encoding="utf-8"?>
+<p:sld xmlns:a="http://schemas.openxmlformats.org/drawingml/2006/main" xmlns:p="http://schemas.openxmlformats.org/presentationml/2006/main" xmlns:r="http://schemas.openxmlformats.org/officeDocument/2006/relationships">
+  <p:cSld>
+    <p:bg>
+      <p:bgPr>
+        <a:solidFill>
+          <a:srgbClr val="FFFFFF"/>
+        </a:solidFill>
+        <a:effectLst/>
+      </p:bgPr>
+    </p:bg>
+    <p:spTree>
+      <p:nvGrpSpPr>
+        <p:cNvPr id="1" name=""/>
+        <p:cNvGrpSpPr/>
+        <p:nvPr/>
+      </p:nvGrpSpPr>
+      <p:grpSpPr/>
+      <p:sp>
+        <p:nvSpPr>
+          <p:cNvPr id="2" name="Rectangle 1"/>
+          <p:cNvSpPr/>
+          <p:nvPr/>
+        </p:nvSpPr>
+        <p:spPr>
+          <a:xfrm>
+            <a:off x="0" y="0"/>
+            <a:ext cx="12191695" cy="960120"/>
+          </a:xfrm>
+          <a:prstGeom prst="rect">
+            <a:avLst/>
+          </a:prstGeom>
+          <a:solidFill>
+            <a:srgbClr val="095292"/>
+          </a:solidFill>
+          <a:ln>
+            <a:noFill/>
+          </a:ln>
+        </p:spPr>
+        <p:style>
+          <a:lnRef idx="1">
+            <a:schemeClr val="accent1"/>
+          </a:lnRef>
+          <a:fillRef idx="3">
+            <a:schemeClr val="accent1"/>
+          </a:fillRef>
+          <a:effectRef idx="2">
+            <a:schemeClr val="accent1"/>
+          </a:effectRef>
+          <a:fontRef idx="minor">
+            <a:schemeClr val="lt1"/>
+          </a:fontRef>
+        </p:style>
+        <p:txBody>
+          <a:bodyPr rtlCol="0" anchor="ctr"/>
+          <a:lstStyle/>
+          <a:p>
+            <a:pPr algn="ctr"/>
+          </a:p>
+        </p:txBody>
+      </p:sp>
+      <p:sp>
+        <p:nvSpPr>
+          <p:cNvPr id="3" name="Rectangle 2"/>
+          <p:cNvSpPr/>
+          <p:nvPr/>
+        </p:nvSpPr>
+        <p:spPr>
+          <a:xfrm>
+            <a:off x="0" y="960120"/>
+            <a:ext cx="12191695" cy="41148"/>
+          </a:xfrm>
+          <a:prstGeom prst="rect">
+            <a:avLst/>
+          </a:prstGeom>
+          <a:solidFill>
+            <a:srgbClr val="FFD000"/>
+          </a:solidFill>
+          <a:ln>
+            <a:noFill/>
+          </a:ln>
+        </p:spPr>
+        <p:style>
+          <a:lnRef idx="1">
+            <a:schemeClr val="accent1"/>
+          </a:lnRef>
+          <a:fillRef idx="3">
+            <a:schemeClr val="accent1"/>
+          </a:fillRef>
+          <a:effectRef idx="2">
+            <a:schemeClr val="accent1"/>
+          </a:effectRef>
+          <a:fontRef idx="minor">
+            <a:schemeClr val="lt1"/>
+          </a:fontRef>
+        </p:style>
+        <p:txBody>
+          <a:bodyPr rtlCol="0" anchor="ctr"/>
+          <a:lstStyle/>
+          <a:p>
+            <a:pPr algn="ctr"/>
+          </a:p>
+        </p:txBody>
+      </p:sp>
+      <p:sp>
+        <p:nvSpPr>
+          <p:cNvPr id="4" name="TextBox 3"/>
+          <p:cNvSpPr txBox="1"/>
+          <p:nvPr/>
+        </p:nvSpPr>
+        <p:spPr>
+          <a:xfrm>
+            <a:off x="457200" y="164592"/>
+            <a:ext cx="11277295" cy="502920"/>
+          </a:xfrm>
+          <a:prstGeom prst="rect">
+            <a:avLst/>
+          </a:prstGeom>
+          <a:noFill/>
+        </p:spPr>
+        <p:txBody>
+          <a:bodyPr wrap="square">
+            <a:spAutoFit/>
+          </a:bodyPr>
+          <a:lstStyle/>
+          <a:p>
+            <a:r>
+              <a:rPr sz="2600" b="1" i="0">
+                <a:solidFill>
+                  <a:srgbClr val="FFFFFF"/>
+                </a:solidFill>
+                <a:latin typeface="Calibri"/>
+              </a:rPr>
+              <a:t>Para el PI esta semana</a:t>
+            </a:r>
+          </a:p>
+        </p:txBody>
+      </p:sp>
+      <p:sp>
+        <p:nvSpPr>
+          <p:cNvPr id="5" name="Rounded Rectangle 4"/>
+          <p:cNvSpPr/>
+          <p:nvPr/>
+        </p:nvSpPr>
+        <p:spPr>
+          <a:xfrm>
+            <a:off x="457200" y="1261872"/>
+            <a:ext cx="11277295" cy="1051560"/>
+          </a:xfrm>
+          <a:prstGeom prst="roundRect">
+            <a:avLst>
+              <a:gd name="adj" fmla="val 12000"/>
+            </a:avLst>
+          </a:prstGeom>
+          <a:solidFill>
+            <a:srgbClr val="E8F4FA"/>
+          </a:solidFill>
+          <a:ln>
+            <a:noFill/>
+          </a:ln>
+        </p:spPr>
+        <p:style>
+          <a:lnRef idx="1">
+            <a:schemeClr val="accent1"/>
+          </a:lnRef>
+          <a:fillRef idx="3">
+            <a:schemeClr val="accent1"/>
+          </a:fillRef>
+          <a:effectRef idx="2">
+            <a:schemeClr val="accent1"/>
+          </a:effectRef>
+          <a:fontRef idx="minor">
+            <a:schemeClr val="lt1"/>
+          </a:fontRef>
+        </p:style>
+        <p:txBody>
+          <a:bodyPr rtlCol="0" anchor="ctr"/>
+          <a:lstStyle/>
+          <a:p>
+            <a:pPr algn="ctr"/>
+          </a:p>
+        </p:txBody>
+      </p:sp>
+      <p:sp>
+        <p:nvSpPr>
+          <p:cNvPr id="6" name="Rectangle 5"/>
+          <p:cNvSpPr/>
+          <p:nvPr/>
+        </p:nvSpPr>
+        <p:spPr>
+          <a:xfrm>
+            <a:off x="457200" y="1261872"/>
+            <a:ext cx="128016" cy="1051560"/>
+          </a:xfrm>
+          <a:prstGeom prst="rect">
+            <a:avLst/>
+          </a:prstGeom>
+          <a:solidFill>
+            <a:srgbClr val="269CCB"/>
+          </a:solidFill>
+          <a:ln>
+            <a:noFill/>
+          </a:ln>
+        </p:spPr>
+        <p:style>
+          <a:lnRef idx="1">
+            <a:schemeClr val="accent1"/>
+          </a:lnRef>
+          <a:fillRef idx="3">
+            <a:schemeClr val="accent1"/>
+          </a:fillRef>
+          <a:effectRef idx="2">
+            <a:schemeClr val="accent1"/>
+          </a:effectRef>
+          <a:fontRef idx="minor">
+            <a:schemeClr val="lt1"/>
+          </a:fontRef>
+        </p:style>
+        <p:txBody>
+          <a:bodyPr rtlCol="0" anchor="ctr"/>
+          <a:lstStyle/>
+          <a:p>
+            <a:pPr algn="ctr"/>
+          </a:p>
+        </p:txBody>
+      </p:sp>
+      <p:sp>
+        <p:nvSpPr>
+          <p:cNvPr id="7" name="TextBox 6"/>
+          <p:cNvSpPr txBox="1"/>
+          <p:nvPr/>
+        </p:nvSpPr>
+        <p:spPr>
+          <a:xfrm>
+            <a:off x="777240" y="1399031"/>
+            <a:ext cx="10774375" cy="822959"/>
+          </a:xfrm>
+          <a:prstGeom prst="rect">
+            <a:avLst/>
+          </a:prstGeom>
+          <a:noFill/>
+        </p:spPr>
+        <p:txBody>
+          <a:bodyPr wrap="square">
+            <a:spAutoFit/>
+          </a:bodyPr>
+          <a:lstStyle/>
+          <a:p>
+            <a:r>
+              <a:rPr sz="1200" b="1" i="0">
+                <a:solidFill>
+                  <a:srgbClr val="269CCB"/>
+                </a:solidFill>
+                <a:latin typeface="Calibri"/>
+              </a:rPr>
+              <a:t>Info</a:t>
+            </a:r>
+          </a:p>
+          <a:p>
+            <a:pPr>
+              <a:spcBef>
+                <a:spcPts val="400"/>
+              </a:spcBef>
+            </a:pPr>
+            <a:r>
+              <a:rPr sz="1400" b="0" i="0">
+                <a:solidFill>
+                  <a:srgbClr val="333333"/>
+                </a:solidFill>
+                <a:latin typeface="Calibri"/>
+              </a:rPr>
+              <a:t>Hito: 3 indices justificados (uno parcial) + historico particionado por ano</a:t>
+            </a:r>
+          </a:p>
+        </p:txBody>
+      </p:sp>
+      <p:sp>
+        <p:nvSpPr>
+          <p:cNvPr id="8" name="Rounded Rectangle 7"/>
+          <p:cNvSpPr/>
+          <p:nvPr/>
+        </p:nvSpPr>
+        <p:spPr>
+          <a:xfrm>
+            <a:off x="457200" y="2478024"/>
+            <a:ext cx="11277295" cy="1051560"/>
+          </a:xfrm>
+          <a:prstGeom prst="roundRect">
+            <a:avLst>
+              <a:gd name="adj" fmla="val 12000"/>
+            </a:avLst>
+          </a:prstGeom>
+          <a:solidFill>
+            <a:srgbClr val="FFF8E1"/>
+          </a:solidFill>
+          <a:ln>
+            <a:noFill/>
+          </a:ln>
+        </p:spPr>
+        <p:style>
+          <a:lnRef idx="1">
+            <a:schemeClr val="accent1"/>
+          </a:lnRef>
+          <a:fillRef idx="3">
+            <a:schemeClr val="accent1"/>
+          </a:fillRef>
+          <a:effectRef idx="2">
+            <a:schemeClr val="accent1"/>
+          </a:effectRef>
+          <a:fontRef idx="minor">
+            <a:schemeClr val="lt1"/>
+          </a:fontRef>
+        </p:style>
+        <p:txBody>
+          <a:bodyPr rtlCol="0" anchor="ctr"/>
+          <a:lstStyle/>
+          <a:p>
+            <a:pPr algn="ctr"/>
+          </a:p>
+        </p:txBody>
+      </p:sp>
+      <p:sp>
+        <p:nvSpPr>
+          <p:cNvPr id="9" name="Rectangle 8"/>
+          <p:cNvSpPr/>
+          <p:nvPr/>
+        </p:nvSpPr>
+        <p:spPr>
+          <a:xfrm>
+            <a:off x="457200" y="2478024"/>
+            <a:ext cx="128016" cy="1051560"/>
+          </a:xfrm>
+          <a:prstGeom prst="rect">
+            <a:avLst/>
+          </a:prstGeom>
+          <a:solidFill>
+            <a:srgbClr val="FFD000"/>
+          </a:solidFill>
+          <a:ln>
+            <a:noFill/>
+          </a:ln>
+        </p:spPr>
+        <p:style>
+          <a:lnRef idx="1">
+            <a:schemeClr val="accent1"/>
+          </a:lnRef>
+          <a:fillRef idx="3">
+            <a:schemeClr val="accent1"/>
+          </a:fillRef>
+          <a:effectRef idx="2">
+            <a:schemeClr val="accent1"/>
+          </a:effectRef>
+          <a:fontRef idx="minor">
+            <a:schemeClr val="lt1"/>
+          </a:fontRef>
+        </p:style>
+        <p:txBody>
+          <a:bodyPr rtlCol="0" anchor="ctr"/>
+          <a:lstStyle/>
+          <a:p>
+            <a:pPr algn="ctr"/>
+          </a:p>
+        </p:txBody>
+      </p:sp>
+      <p:sp>
+        <p:nvSpPr>
+          <p:cNvPr id="10" name="TextBox 9"/>
+          <p:cNvSpPr txBox="1"/>
+          <p:nvPr/>
+        </p:nvSpPr>
+        <p:spPr>
+          <a:xfrm>
+            <a:off x="777240" y="2615184"/>
+            <a:ext cx="10774375" cy="822959"/>
+          </a:xfrm>
+          <a:prstGeom prst="rect">
+            <a:avLst/>
+          </a:prstGeom>
+          <a:noFill/>
+        </p:spPr>
+        <p:txBody>
+          <a:bodyPr wrap="square">
+            <a:spAutoFit/>
+          </a:bodyPr>
+          <a:lstStyle/>
+          <a:p>
+            <a:r>
+              <a:rPr sz="1200" b="1" i="0">
+                <a:solidFill>
+                  <a:srgbClr val="FFD000"/>
+                </a:solidFill>
+                <a:latin typeface="Calibri"/>
+              </a:rPr>
+              <a:t>Aclaración</a:t>
+            </a:r>
+          </a:p>
+          <a:p>
+            <a:pPr>
+              <a:spcBef>
+                <a:spcPts val="400"/>
+              </a:spcBef>
+            </a:pPr>
+            <a:r>
+              <a:rPr sz="1400" b="0" i="0">
+                <a:solidFill>
+                  <a:srgbClr val="333333"/>
+                </a:solidFill>
+                <a:latin typeface="Calibri"/>
+              </a:rPr>
+              <a:t>Enunciado completo: Clases/Proyecto Integrador/ (VetCare DB).</a:t>
+            </a:r>
+          </a:p>
+        </p:txBody>
+      </p:sp>
+      <p:sp>
+        <p:nvSpPr>
+          <p:cNvPr id="11" name="Rounded Rectangle 10"/>
+          <p:cNvSpPr/>
+          <p:nvPr/>
+        </p:nvSpPr>
+        <p:spPr>
+          <a:xfrm>
+            <a:off x="457200" y="3694176"/>
+            <a:ext cx="11277295" cy="1051560"/>
+          </a:xfrm>
+          <a:prstGeom prst="roundRect">
+            <a:avLst>
+              <a:gd name="adj" fmla="val 12000"/>
+            </a:avLst>
+          </a:prstGeom>
+          <a:solidFill>
+            <a:srgbClr val="FBE4E4"/>
+          </a:solidFill>
+          <a:ln>
+            <a:noFill/>
+          </a:ln>
+        </p:spPr>
+        <p:style>
+          <a:lnRef idx="1">
+            <a:schemeClr val="accent1"/>
+          </a:lnRef>
+          <a:fillRef idx="3">
+            <a:schemeClr val="accent1"/>
+          </a:fillRef>
+          <a:effectRef idx="2">
+            <a:schemeClr val="accent1"/>
+          </a:effectRef>
+          <a:fontRef idx="minor">
+            <a:schemeClr val="lt1"/>
+          </a:fontRef>
+        </p:style>
+        <p:txBody>
+          <a:bodyPr rtlCol="0" anchor="ctr"/>
+          <a:lstStyle/>
+          <a:p>
+            <a:pPr algn="ctr"/>
+          </a:p>
+        </p:txBody>
+      </p:sp>
+      <p:sp>
+        <p:nvSpPr>
+          <p:cNvPr id="12" name="Rectangle 11"/>
+          <p:cNvSpPr/>
+          <p:nvPr/>
+        </p:nvSpPr>
+        <p:spPr>
+          <a:xfrm>
+            <a:off x="457200" y="3694176"/>
+            <a:ext cx="128016" cy="1051560"/>
+          </a:xfrm>
+          <a:prstGeom prst="rect">
+            <a:avLst/>
+          </a:prstGeom>
+          <a:solidFill>
+            <a:srgbClr val="A02030"/>
+          </a:solidFill>
+          <a:ln>
+            <a:noFill/>
+          </a:ln>
+        </p:spPr>
+        <p:style>
+          <a:lnRef idx="1">
+            <a:schemeClr val="accent1"/>
+          </a:lnRef>
+          <a:fillRef idx="3">
+            <a:schemeClr val="accent1"/>
+          </a:fillRef>
+          <a:effectRef idx="2">
+            <a:schemeClr val="accent1"/>
+          </a:effectRef>
+          <a:fontRef idx="minor">
+            <a:schemeClr val="lt1"/>
+          </a:fontRef>
+        </p:style>
+        <p:txBody>
+          <a:bodyPr rtlCol="0" anchor="ctr"/>
+          <a:lstStyle/>
+          <a:p>
+            <a:pPr algn="ctr"/>
+          </a:p>
+        </p:txBody>
+      </p:sp>
+      <p:sp>
+        <p:nvSpPr>
+          <p:cNvPr id="13" name="TextBox 12"/>
+          <p:cNvSpPr txBox="1"/>
+          <p:nvPr/>
+        </p:nvSpPr>
+        <p:spPr>
+          <a:xfrm>
+            <a:off x="777240" y="3831336"/>
+            <a:ext cx="10774375" cy="822959"/>
+          </a:xfrm>
+          <a:prstGeom prst="rect">
+            <a:avLst/>
+          </a:prstGeom>
+          <a:noFill/>
+        </p:spPr>
+        <p:txBody>
+          <a:bodyPr wrap="square">
+            <a:spAutoFit/>
+          </a:bodyPr>
+          <a:lstStyle/>
+          <a:p>
+            <a:r>
+              <a:rPr sz="1200" b="1" i="0">
+                <a:solidFill>
+                  <a:srgbClr val="A02030"/>
+                </a:solidFill>
+                <a:latin typeface="Calibri"/>
+              </a:rPr>
+              <a:t>Atención</a:t>
+            </a:r>
+          </a:p>
+          <a:p>
+            <a:pPr>
+              <a:spcBef>
+                <a:spcPts val="400"/>
+              </a:spcBef>
+            </a:pPr>
+            <a:r>
+              <a:rPr sz="1400" b="0" i="0">
+                <a:solidFill>
+                  <a:srgbClr val="333333"/>
+                </a:solidFill>
+                <a:latin typeface="Calibri"/>
+              </a:rPr>
+              <a:t>Taller de la semana en ExamLab (https://uniaj.examlab.workers.dev/): domingo 23:59 (regla del Acuerdo) cuando aplique.</a:t>
+            </a:r>
+          </a:p>
+        </p:txBody>
+      </p:sp>
+      <p:sp>
+        <p:nvSpPr>
+          <p:cNvPr id="14" name="TextBox 13"/>
+          <p:cNvSpPr txBox="1"/>
+          <p:nvPr/>
+        </p:nvSpPr>
+        <p:spPr>
+          <a:xfrm>
+            <a:off x="11185855" y="6473952"/>
+            <a:ext cx="640080" cy="274320"/>
+          </a:xfrm>
+          <a:prstGeom prst="rect">
+            <a:avLst/>
+          </a:prstGeom>
+          <a:noFill/>
+        </p:spPr>
+        <p:txBody>
+          <a:bodyPr wrap="square">
+            <a:spAutoFit/>
+          </a:bodyPr>
+          <a:lstStyle/>
+          <a:p>
+            <a:pPr algn="r"/>
+            <a:r>
+              <a:rPr sz="1100" b="0" i="0">
+                <a:solidFill>
+                  <a:srgbClr val="666666"/>
+                </a:solidFill>
+                <a:latin typeface="Calibri"/>
+              </a:rPr>
+              <a:t>17</a:t>
+            </a:r>
+          </a:p>
+        </p:txBody>
+      </p:sp>
+    </p:spTree>
+  </p:cSld>
+  <p:clrMapOvr>
+    <a:masterClrMapping/>
+  </p:clrMapOvr>
+</p:sld>
+</file>
+
+<file path=ppt/slides/slide18.xml><?xml version="1.0" encoding="utf-8"?>
+<p:sld xmlns:a="http://schemas.openxmlformats.org/drawingml/2006/main" xmlns:p="http://schemas.openxmlformats.org/presentationml/2006/main" xmlns:r="http://schemas.openxmlformats.org/officeDocument/2006/relationships">
+  <p:cSld>
+    <p:bg>
+      <p:bgPr>
+        <a:solidFill>
+          <a:srgbClr val="FFFFFF"/>
+        </a:solidFill>
+        <a:effectLst/>
+      </p:bgPr>
+    </p:bg>
+    <p:spTree>
+      <p:nvGrpSpPr>
+        <p:cNvPr id="1" name=""/>
+        <p:cNvGrpSpPr/>
+        <p:nvPr/>
+      </p:nvGrpSpPr>
+      <p:grpSpPr/>
+      <p:sp>
+        <p:nvSpPr>
+          <p:cNvPr id="2" name="Rectangle 1"/>
+          <p:cNvSpPr/>
+          <p:nvPr/>
+        </p:nvSpPr>
+        <p:spPr>
+          <a:xfrm>
+            <a:off x="0" y="0"/>
             <a:ext cx="12191695" cy="164592"/>
           </a:xfrm>
           <a:prstGeom prst="rect">
@@ -6235,7 +9171,7 @@
                 </a:solidFill>
                 <a:latin typeface="Calibri"/>
               </a:rPr>
-              <a:t>&gt;=2 indices justificados sobre tablas calientes del PI</a:t>
+              <a:t>3 indices justificados (uno parcial) + historico particionado por ano</a:t>
             </a:r>
           </a:p>
           <a:p>
@@ -6251,7 +9187,7 @@
                 </a:solidFill>
                 <a:latin typeface="Calibri"/>
               </a:rPr>
-              <a:t>Entregable: Script CREATE INDEX + tabla justificacion consulta-&gt;indice</a:t>
+              <a:t>Entregable: Script CREATE INDEX + cita_hist particionada + tabla justificacion consulta-&gt;indice</a:t>
             </a:r>
           </a:p>
           <a:p>
@@ -6505,7 +9441,7 @@
                 </a:solidFill>
                 <a:latin typeface="Calibri"/>
               </a:rPr>
-              <a:t> &gt;=2 indices justificados sobre tablas calientes del PI</a:t>
+              <a:t> 3 indices justificados (uno parcial) + historico particionado por ano</a:t>
             </a:r>
           </a:p>
           <a:p>
@@ -6530,7 +9466,7 @@
                 </a:solidFill>
                 <a:latin typeface="Calibri"/>
               </a:rPr>
-              <a:t>DB Fiddle + draw.io (opcional)</a:t>
+              <a:t>ExamLab (PostgreSQL/PGlite)</a:t>
             </a:r>
             <a:r>
               <a:rPr sz="1600" b="0" i="0">
@@ -6591,7 +9527,7 @@
                 </a:solidFill>
                 <a:latin typeface="Calibri"/>
               </a:rPr>
-              <a:t> Script CREATE INDEX + tabla justificacion consulta-&gt;indice</a:t>
+              <a:t> Script CREATE INDEX + cita_hist particionada + tabla justificacion consulta-&gt;indice</a:t>
             </a:r>
           </a:p>
           <a:p>
@@ -7759,7 +10695,7 @@
                 </a:solidFill>
                 <a:latin typeface="Calibri"/>
               </a:rPr>
-              <a:t>–   Candidatos reales en VetCare: Cita(fecha_hora) para listar la agenda del dia, Mascota(id_dueno) porque cada…</a:t>
+              <a:t>–   Candidatos reales en VetCare: cita(fecha_hora) para listar la agenda del dia, mascota(id_dueno) porque cada…</a:t>
             </a:r>
           </a:p>
           <a:p>
@@ -7775,7 +10711,7 @@
                 </a:solidFill>
                 <a:latin typeface="Calibri"/>
               </a:rPr>
-              <a:t>–   Particionamiento (idea conceptual, no se implementa hoy): dividir fisicamente una tabla muy grande en…</a:t>
+              <a:t>–   Particionamiento (hoy SI se implementa, y es la pregunta 3 del taller): dividir una tabla logica en…</a:t>
             </a:r>
           </a:p>
         </p:txBody>
@@ -8115,7 +11051,7 @@
                 </a:solidFill>
                 <a:latin typeface="Calibri"/>
               </a:rPr>
-              <a:t>-- Consulta frecuente: la agenda del dia</a:t>
+              <a:t>-- Consulta frecuente: la agenda del dia (siempre PROGRAMADA)</a:t>
             </a:r>
           </a:p>
           <a:p>
@@ -8131,7 +11067,7 @@
                 </a:solidFill>
                 <a:latin typeface="Calibri"/>
               </a:rPr>
-              <a:t>SELECT ... FROM cita WHERE fecha_hora &gt;= :hoy;</a:t>
+              <a:t>SELECT ... FROM cita</a:t>
             </a:r>
           </a:p>
           <a:p>
@@ -8147,7 +11083,7 @@
                 </a:solidFill>
                 <a:latin typeface="Calibri"/>
               </a:rPr>
-              <a:t/>
+              <a:t> WHERE fecha_hora &gt;= :hoy AND estado = 'PROGRAMADA';</a:t>
             </a:r>
           </a:p>
           <a:p>
@@ -8163,7 +11099,7 @@
                 </a:solidFill>
                 <a:latin typeface="Calibri"/>
               </a:rPr>
-              <a:t>CREATE INDEX idx_cita_fecha ON cita(fecha_hora);</a:t>
+              <a:t/>
             </a:r>
           </a:p>
           <a:p>
@@ -8179,7 +11115,7 @@
                 </a:solidFill>
                 <a:latin typeface="Calibri"/>
               </a:rPr>
-              <a:t/>
+              <a:t>CREATE INDEX idx_cita_fecha_hora ON cita (fecha_hora);</a:t>
             </a:r>
           </a:p>
           <a:p>
@@ -8195,7 +11131,7 @@
                 </a:solidFill>
                 <a:latin typeface="Calibri"/>
               </a:rPr>
-              <a:t>-- Mal candidato: baja cardinalidad (solo 'S' o 'N')</a:t>
+              <a:t>CREATE INDEX idx_cita_programada_fecha ON cita (fecha_hora)</a:t>
             </a:r>
           </a:p>
           <a:p>
@@ -8211,6 +11147,54 @@
                 </a:solidFill>
                 <a:latin typeface="Calibri"/>
               </a:rPr>
+              <a:t>  WHERE estado = 'PROGRAMADA';        -- indice PARCIAL</a:t>
+            </a:r>
+          </a:p>
+          <a:p>
+            <a:pPr>
+              <a:spcAft>
+                <a:spcPts val="400"/>
+              </a:spcAft>
+            </a:pPr>
+            <a:r>
+              <a:rPr sz="1400" b="0" i="0">
+                <a:solidFill>
+                  <a:srgbClr val="FFFFFF"/>
+                </a:solidFill>
+                <a:latin typeface="Calibri"/>
+              </a:rPr>
+              <a:t/>
+            </a:r>
+          </a:p>
+          <a:p>
+            <a:pPr>
+              <a:spcAft>
+                <a:spcPts val="400"/>
+              </a:spcAft>
+            </a:pPr>
+            <a:r>
+              <a:rPr sz="1400" b="0" i="0">
+                <a:solidFill>
+                  <a:srgbClr val="FFFFFF"/>
+                </a:solidFill>
+                <a:latin typeface="Calibri"/>
+              </a:rPr>
+              <a:t>-- Mal candidato: baja cardinalidad (solo 'S' o 'N')</a:t>
+            </a:r>
+          </a:p>
+          <a:p>
+            <a:pPr>
+              <a:spcAft>
+                <a:spcPts val="400"/>
+              </a:spcAft>
+            </a:pPr>
+            <a:r>
+              <a:rPr sz="1400" b="0" i="0">
+                <a:solidFill>
+                  <a:srgbClr val="FFFFFF"/>
+                </a:solidFill>
+                <a:latin typeface="Calibri"/>
+              </a:rPr>
               <a:t>-- CREATE INDEX idx_mascota_activa ON mascota(activa);</a:t>
             </a:r>
           </a:p>
@@ -8246,7 +11230,7 @@
                 </a:solidFill>
                 <a:latin typeface="Calibri"/>
               </a:rPr>
-              <a:t>Cada indice acelera lecturas y encarece INSERT/UPDATE/DELETE. Indexar todo es un error.</a:t>
+              <a:t>Cada indice acelera lecturas y encarece INSERT/UPDATE/DELETE. El nombre se califica letra por letra.</a:t>
             </a:r>
           </a:p>
         </p:txBody>
@@ -8321,7 +11305,7 @@
         <p:spPr>
           <a:xfrm>
             <a:off x="0" y="0"/>
-            <a:ext cx="12191695" cy="960120"/>
+            <a:ext cx="12191695" cy="1170432"/>
           </a:xfrm>
           <a:prstGeom prst="rect">
             <a:avLst/>
@@ -8363,7 +11347,7 @@
         </p:nvSpPr>
         <p:spPr>
           <a:xfrm>
-            <a:off x="0" y="960120"/>
+            <a:off x="0" y="1170432"/>
             <a:ext cx="12191695" cy="41148"/>
           </a:xfrm>
           <a:prstGeom prst="rect">
@@ -8407,7 +11391,7 @@
         <p:spPr>
           <a:xfrm>
             <a:off x="457200" y="164592"/>
-            <a:ext cx="11277295" cy="502920"/>
+            <a:ext cx="11277295" cy="384048"/>
           </a:xfrm>
           <a:prstGeom prst="rect">
             <a:avLst/>
@@ -8427,7 +11411,7 @@
                 </a:solidFill>
                 <a:latin typeface="Calibri"/>
               </a:rPr>
-              <a:t>Demo del dia</a:t>
+              <a:t>Los cinco indices de hoy, con su nombre exacto</a:t>
             </a:r>
           </a:p>
         </p:txBody>
@@ -8440,8 +11424,42 @@
         </p:nvSpPr>
         <p:spPr>
           <a:xfrm>
-            <a:off x="457200" y="1170432"/>
-            <a:ext cx="11277295" cy="5230368"/>
+            <a:off x="457200" y="566928"/>
+            <a:ext cx="11277295" cy="411480"/>
+          </a:xfrm>
+          <a:prstGeom prst="rect">
+            <a:avLst/>
+          </a:prstGeom>
+          <a:noFill/>
+        </p:spPr>
+        <p:txBody>
+          <a:bodyPr wrap="square">
+            <a:spAutoFit/>
+          </a:bodyPr>
+          <a:lstStyle/>
+          <a:p>
+            <a:r>
+              <a:rPr sz="1400" b="0" i="0">
+                <a:solidFill>
+                  <a:srgbClr val="B8D8EE"/>
+                </a:solidFill>
+                <a:latin typeface="Calibri"/>
+              </a:rPr>
+              <a:t>Preguntas 1 y 2 del taller — 50 de los 100 puntos — y los nombres son los que se escriben en la plantilla del entregable</a:t>
+            </a:r>
+          </a:p>
+        </p:txBody>
+      </p:sp>
+      <p:sp>
+        <p:nvSpPr>
+          <p:cNvPr id="6" name="TextBox 5"/>
+          <p:cNvSpPr txBox="1"/>
+          <p:nvPr/>
+        </p:nvSpPr>
+        <p:spPr>
+          <a:xfrm>
+            <a:off x="457200" y="1380744"/>
+            <a:ext cx="11277295" cy="5020056"/>
           </a:xfrm>
           <a:prstGeom prst="rect">
             <a:avLst/>
@@ -8460,7 +11478,7 @@
               </a:spcAft>
             </a:pPr>
             <a:r>
-              <a:rPr sz="1600" b="0" i="0">
+              <a:rPr sz="1300" b="0" i="0">
                 <a:solidFill>
                   <a:srgbClr val="333333"/>
                 </a:solidFill>
@@ -8469,22 +11487,40 @@
               <a:t>–   </a:t>
             </a:r>
             <a:r>
-              <a:rPr sz="1600" b="1" i="0">
-                <a:solidFill>
-                  <a:srgbClr val="333333"/>
-                </a:solidFill>
-                <a:latin typeface="Calibri"/>
-              </a:rPr>
-              <a:t>Herramienta:</a:t>
-            </a:r>
-            <a:r>
-              <a:rPr sz="1600" b="0" i="0">
-                <a:solidFill>
-                  <a:srgbClr val="333333"/>
-                </a:solidFill>
-                <a:latin typeface="Calibri"/>
-              </a:rPr>
-              <a:t> DB Fiddle + draw.io (opcional)</a:t>
+              <a:rPr sz="1300" b="1" i="0">
+                <a:solidFill>
+                  <a:srgbClr val="333333"/>
+                </a:solidFill>
+                <a:latin typeface="Calibri"/>
+              </a:rPr>
+              <a:t>El nombre se califica.</a:t>
+            </a:r>
+            <a:r>
+              <a:rPr sz="1300" b="0" i="0">
+                <a:solidFill>
+                  <a:srgbClr val="333333"/>
+                </a:solidFill>
+                <a:latin typeface="Calibri"/>
+              </a:rPr>
+              <a:t> La actividad dice «nombres exactos» y los compara letra por letra: «idx_cita_fecha_hora», «idx_mascota_dueno», «idx_cita_programada_fecha» en la pregunta 1, y «idx_cita_estado_fecha» + «idx_cita_fecha_estado» en la 2. </a:t>
+            </a:r>
+            <a:r>
+              <a:rPr sz="1300" b="1" i="0">
+                <a:solidFill>
+                  <a:srgbClr val="333333"/>
+                </a:solidFill>
+                <a:latin typeface="Calibri"/>
+              </a:rPr>
+              <a:t>«idx_cita_fecha» no es ninguno de los cinco</a:t>
+            </a:r>
+            <a:r>
+              <a:rPr sz="1300" b="0" i="0">
+                <a:solidFill>
+                  <a:srgbClr val="333333"/>
+                </a:solidFill>
+                <a:latin typeface="Calibri"/>
+              </a:rPr>
+              <a:t>: el sufijo es «_fecha_hora», como la columna.</a:t>
             </a:r>
           </a:p>
           <a:p>
@@ -8494,7 +11530,7 @@
               </a:spcAft>
             </a:pPr>
             <a:r>
-              <a:rPr sz="1600" b="0" i="0">
+              <a:rPr sz="1300" b="0" i="0">
                 <a:solidFill>
                   <a:srgbClr val="333333"/>
                 </a:solidFill>
@@ -8503,22 +11539,40 @@
               <a:t>–   </a:t>
             </a:r>
             <a:r>
-              <a:rPr sz="1600" b="1" i="0">
-                <a:solidFill>
-                  <a:srgbClr val="333333"/>
-                </a:solidFill>
-                <a:latin typeface="Calibri"/>
-              </a:rPr>
-              <a:t>Demo:</a:t>
-            </a:r>
-            <a:r>
-              <a:rPr sz="1600" b="0" i="0">
-                <a:solidFill>
-                  <a:srgbClr val="333333"/>
-                </a:solidFill>
-                <a:latin typeface="Calibri"/>
-              </a:rPr>
-              <a:t> CREATE INDEX idx_cita_fecha; consulta que lo usaria.</a:t>
+              <a:rPr sz="1300" b="1" i="0">
+                <a:solidFill>
+                  <a:srgbClr val="333333"/>
+                </a:solidFill>
+                <a:latin typeface="Calibri"/>
+              </a:rPr>
+              <a:t>Simple o compuesto.</a:t>
+            </a:r>
+            <a:r>
+              <a:rPr sz="1300" b="0" i="0">
+                <a:solidFill>
+                  <a:srgbClr val="333333"/>
+                </a:solidFill>
+                <a:latin typeface="Calibri"/>
+              </a:rPr>
+              <a:t> Los tres primeros son de una columna; los dos ultimos llevan las mismas dos columnas </a:t>
+            </a:r>
+            <a:r>
+              <a:rPr sz="1300" b="1" i="0">
+                <a:solidFill>
+                  <a:srgbClr val="333333"/>
+                </a:solidFill>
+                <a:latin typeface="Calibri"/>
+              </a:rPr>
+              <a:t>en orden inverso</a:t>
+            </a:r>
+            <a:r>
+              <a:rPr sz="1300" b="0" i="0">
+                <a:solidFill>
+                  <a:srgbClr val="333333"/>
+                </a:solidFill>
+                <a:latin typeface="Calibri"/>
+              </a:rPr>
+              <a:t>, y existen precisamente para que se vea que el orden cambia el resultado.</a:t>
             </a:r>
           </a:p>
           <a:p>
@@ -8528,13 +11582,67 @@
               </a:spcAft>
             </a:pPr>
             <a:r>
-              <a:rPr sz="1600" b="0" i="0">
-                <a:solidFill>
-                  <a:srgbClr val="333333"/>
-                </a:solidFill>
-                <a:latin typeface="Calibri"/>
-              </a:rPr>
-              <a:t>–   Sigan el mismo dominio VetCare (no inventen otro caso).</a:t>
+              <a:rPr sz="1300" b="0" i="0">
+                <a:solidFill>
+                  <a:srgbClr val="333333"/>
+                </a:solidFill>
+                <a:latin typeface="Calibri"/>
+              </a:rPr>
+              <a:t>–   </a:t>
+            </a:r>
+            <a:r>
+              <a:rPr sz="1300" b="1" i="0">
+                <a:solidFill>
+                  <a:srgbClr val="333333"/>
+                </a:solidFill>
+                <a:latin typeface="Calibri"/>
+              </a:rPr>
+              <a:t>La secuencia que hay que respetar.</a:t>
+            </a:r>
+            <a:r>
+              <a:rPr sz="1300" b="0" i="0">
+                <a:solidFill>
+                  <a:srgbClr val="333333"/>
+                </a:solidFill>
+                <a:latin typeface="Calibri"/>
+              </a:rPr>
+              <a:t> «EXPLAIN ANALYZE» </a:t>
+            </a:r>
+            <a:r>
+              <a:rPr sz="1300" b="1" i="0">
+                <a:solidFill>
+                  <a:srgbClr val="333333"/>
+                </a:solidFill>
+                <a:latin typeface="Calibri"/>
+              </a:rPr>
+              <a:t>antes</a:t>
+            </a:r>
+            <a:r>
+              <a:rPr sz="1300" b="0" i="0">
+                <a:solidFill>
+                  <a:srgbClr val="333333"/>
+                </a:solidFill>
+                <a:latin typeface="Calibri"/>
+              </a:rPr>
+              <a:t> (tiene que salir «Seq Scan») -&gt; «CREATE INDEX» -&gt; </a:t>
+            </a:r>
+            <a:r>
+              <a:rPr sz="1300" b="1" i="0">
+                <a:solidFill>
+                  <a:srgbClr val="333333"/>
+                </a:solidFill>
+                <a:latin typeface="Calibri"/>
+              </a:rPr>
+              <a:t>«ANALYZE cita;»</a:t>
+            </a:r>
+            <a:r>
+              <a:rPr sz="1300" b="0" i="0">
+                <a:solidFill>
+                  <a:srgbClr val="333333"/>
+                </a:solidFill>
+                <a:latin typeface="Calibri"/>
+              </a:rPr>
+              <a:t> -&gt; el mismo «EXPLAIN» otra vez. Sin el «ANALYZE» intermedio el planeador sigue con las estadisticas viejas y puede ignorar el indice que acabas de crear: la mitad de los «no me sirvio» del taller son este paso saltado.</a:t>
             </a:r>
           </a:p>
           <a:p>
@@ -8544,20 +11652,90 @@
               </a:spcAft>
             </a:pPr>
             <a:r>
-              <a:rPr sz="1600" b="0" i="0">
-                <a:solidFill>
-                  <a:srgbClr val="333333"/>
-                </a:solidFill>
-                <a:latin typeface="Calibri"/>
-              </a:rPr>
-              <a:t>–   Al final de la demo: dejar enlace/script compartible al grupo.</a:t>
-            </a:r>
-          </a:p>
-        </p:txBody>
-      </p:sp>
-      <p:sp>
-        <p:nvSpPr>
-          <p:cNvPr id="6" name="TextBox 5"/>
+              <a:rPr sz="1300" b="0" i="0">
+                <a:solidFill>
+                  <a:srgbClr val="333333"/>
+                </a:solidFill>
+                <a:latin typeface="Calibri"/>
+              </a:rPr>
+              <a:t>–   </a:t>
+            </a:r>
+            <a:r>
+              <a:rPr sz="1300" b="1" i="0">
+                <a:solidFill>
+                  <a:srgbClr val="333333"/>
+                </a:solidFill>
+                <a:latin typeface="Calibri"/>
+              </a:rPr>
+              <a:t>La evidencia de que existen.</a:t>
+            </a:r>
+            <a:r>
+              <a:rPr sz="1300" b="0" i="0">
+                <a:solidFill>
+                  <a:srgbClr val="333333"/>
+                </a:solidFill>
+                <a:latin typeface="Calibri"/>
+              </a:rPr>
+              <a:t> «SELECT indexname, tablename, indexdef FROM pg_indexes WHERE tablename IN ('cita','mascota') ORDER BY tablename, indexname;» — «indexdef» devuelve el «CREATE INDEX» completo, asi que ahi se ve tambien el «WHERE» del parcial.</a:t>
+            </a:r>
+          </a:p>
+          <a:p>
+            <a:pPr>
+              <a:spcAft>
+                <a:spcPts val="800"/>
+              </a:spcAft>
+            </a:pPr>
+            <a:r>
+              <a:rPr sz="1300" b="0" i="0">
+                <a:solidFill>
+                  <a:srgbClr val="333333"/>
+                </a:solidFill>
+                <a:latin typeface="Calibri"/>
+              </a:rPr>
+              <a:t>–   </a:t>
+            </a:r>
+            <a:r>
+              <a:rPr sz="1300" b="1" i="0">
+                <a:solidFill>
+                  <a:srgbClr val="333333"/>
+                </a:solidFill>
+                <a:latin typeface="Calibri"/>
+              </a:rPr>
+              <a:t>Y el experimento del orden.</a:t>
+            </a:r>
+            <a:r>
+              <a:rPr sz="1300" b="0" i="0">
+                <a:solidFill>
+                  <a:srgbClr val="333333"/>
+                </a:solidFill>
+                <a:latin typeface="Calibri"/>
+              </a:rPr>
+              <a:t> Con los dos compuestos creados se miden tres consultas: estado + rango de fecha, solo rango, solo estado. Despues se hace «DROP INDEX idx_cita_fecha_estado» y se vuelve a medir la del rango solo. </a:t>
+            </a:r>
+            <a:r>
+              <a:rPr sz="1300" b="1" i="0">
+                <a:solidFill>
+                  <a:srgbClr val="333333"/>
+                </a:solidFill>
+                <a:latin typeface="Calibri"/>
+              </a:rPr>
+              <a:t>La columna de igualdad va primero y la de rango al final</a:t>
+            </a:r>
+            <a:r>
+              <a:rPr sz="1300" b="0" i="0">
+                <a:solidFill>
+                  <a:srgbClr val="333333"/>
+                </a:solidFill>
+                <a:latin typeface="Calibri"/>
+              </a:rPr>
+              <a:t>; un indice cuya columna lider no aparece en el «WHERE» normalmente no se usa.</a:t>
+            </a:r>
+          </a:p>
+        </p:txBody>
+      </p:sp>
+      <p:sp>
+        <p:nvSpPr>
+          <p:cNvPr id="7" name="TextBox 6"/>
           <p:cNvSpPr txBox="1"/>
           <p:nvPr/>
         </p:nvSpPr>
@@ -8731,7 +11909,7 @@
                 </a:solidFill>
                 <a:latin typeface="Calibri"/>
               </a:rPr>
-              <a:t>Herramientas de hoy</a:t>
+              <a:t>El indice parcial: el mismo beneficio, una fraccion del tamano</a:t>
             </a:r>
           </a:p>
         </p:txBody>
@@ -8765,176 +11943,21 @@
                 </a:solidFill>
                 <a:latin typeface="Calibri"/>
               </a:rPr>
-              <a:t>Gratis · navegador o free tier</a:t>
-            </a:r>
-          </a:p>
-        </p:txBody>
-      </p:sp>
-      <p:sp>
-        <p:nvSpPr>
-          <p:cNvPr id="6" name="Rounded Rectangle 5"/>
-          <p:cNvSpPr/>
-          <p:nvPr/>
-        </p:nvSpPr>
-        <p:spPr>
-          <a:xfrm>
-            <a:off x="457200" y="1591056"/>
-            <a:ext cx="3624986" cy="2331720"/>
-          </a:xfrm>
-          <a:prstGeom prst="roundRect">
-            <a:avLst>
-              <a:gd name="adj" fmla="val 12000"/>
-            </a:avLst>
-          </a:prstGeom>
-          <a:solidFill>
-            <a:srgbClr val="F2F2F2"/>
-          </a:solidFill>
-          <a:ln>
-            <a:noFill/>
-          </a:ln>
-        </p:spPr>
-        <p:style>
-          <a:lnRef idx="1">
-            <a:schemeClr val="accent1"/>
-          </a:lnRef>
-          <a:fillRef idx="3">
-            <a:schemeClr val="accent1"/>
-          </a:fillRef>
-          <a:effectRef idx="2">
-            <a:schemeClr val="accent1"/>
-          </a:effectRef>
-          <a:fontRef idx="minor">
-            <a:schemeClr val="lt1"/>
-          </a:fontRef>
-        </p:style>
-        <p:txBody>
-          <a:bodyPr rtlCol="0" anchor="ctr"/>
-          <a:lstStyle/>
-          <a:p>
-            <a:pPr algn="ctr"/>
-          </a:p>
-        </p:txBody>
-      </p:sp>
-      <p:sp>
-        <p:nvSpPr>
-          <p:cNvPr id="7" name="Rectangle 6"/>
-          <p:cNvSpPr/>
-          <p:nvPr/>
-        </p:nvSpPr>
-        <p:spPr>
-          <a:xfrm>
-            <a:off x="457200" y="1591056"/>
-            <a:ext cx="3624986" cy="64008"/>
-          </a:xfrm>
-          <a:prstGeom prst="rect">
-            <a:avLst/>
-          </a:prstGeom>
-          <a:solidFill>
-            <a:srgbClr val="095292"/>
-          </a:solidFill>
-          <a:ln>
-            <a:noFill/>
-          </a:ln>
-        </p:spPr>
-        <p:style>
-          <a:lnRef idx="1">
-            <a:schemeClr val="accent1"/>
-          </a:lnRef>
-          <a:fillRef idx="3">
-            <a:schemeClr val="accent1"/>
-          </a:fillRef>
-          <a:effectRef idx="2">
-            <a:schemeClr val="accent1"/>
-          </a:effectRef>
-          <a:fontRef idx="minor">
-            <a:schemeClr val="lt1"/>
-          </a:fontRef>
-        </p:style>
-        <p:txBody>
-          <a:bodyPr rtlCol="0" anchor="ctr"/>
-          <a:lstStyle/>
-          <a:p>
-            <a:pPr algn="ctr"/>
-          </a:p>
-        </p:txBody>
-      </p:sp>
-      <p:sp>
-        <p:nvSpPr>
-          <p:cNvPr id="8" name="Rectangle 7"/>
-          <p:cNvSpPr/>
-          <p:nvPr/>
-        </p:nvSpPr>
-        <p:spPr>
-          <a:xfrm>
-            <a:off x="457200" y="1655064"/>
-            <a:ext cx="3624986" cy="27432"/>
-          </a:xfrm>
-          <a:prstGeom prst="rect">
-            <a:avLst/>
-          </a:prstGeom>
-          <a:solidFill>
-            <a:srgbClr val="FFD000"/>
-          </a:solidFill>
-          <a:ln>
-            <a:noFill/>
-          </a:ln>
-        </p:spPr>
-        <p:style>
-          <a:lnRef idx="1">
-            <a:schemeClr val="accent1"/>
-          </a:lnRef>
-          <a:fillRef idx="3">
-            <a:schemeClr val="accent1"/>
-          </a:fillRef>
-          <a:effectRef idx="2">
-            <a:schemeClr val="accent1"/>
-          </a:effectRef>
-          <a:fontRef idx="minor">
-            <a:schemeClr val="lt1"/>
-          </a:fontRef>
-        </p:style>
-        <p:txBody>
-          <a:bodyPr rtlCol="0" anchor="ctr"/>
-          <a:lstStyle/>
-          <a:p>
-            <a:pPr algn="ctr"/>
-          </a:p>
-        </p:txBody>
-      </p:sp>
-      <p:pic>
-        <p:nvPicPr>
-          <p:cNvPr id="9" name="Picture 8" descr="dbfiddle.png"/>
-          <p:cNvPicPr>
-            <a:picLocks noChangeAspect="1"/>
-          </p:cNvPicPr>
-          <p:nvPr/>
-        </p:nvPicPr>
-        <p:blipFill>
-          <a:blip r:embed="rId2"/>
-          <a:stretch>
-            <a:fillRect/>
-          </a:stretch>
-        </p:blipFill>
-        <p:spPr>
-          <a:xfrm>
-            <a:off x="1643329" y="1847087"/>
-            <a:ext cx="1252728" cy="1252728"/>
-          </a:xfrm>
-          <a:prstGeom prst="rect">
-            <a:avLst/>
-          </a:prstGeom>
-        </p:spPr>
-      </p:pic>
-      <p:sp>
-        <p:nvSpPr>
-          <p:cNvPr id="10" name="TextBox 9"/>
+              <a:t>La pregunta 1 lo exige por nombre y su rubrica descuenta si falta; la pregunta 4 lo vuelve a cobrar como afirmacion correcta</a:t>
+            </a:r>
+          </a:p>
+        </p:txBody>
+      </p:sp>
+      <p:sp>
+        <p:nvSpPr>
+          <p:cNvPr id="6" name="TextBox 5"/>
           <p:cNvSpPr txBox="1"/>
           <p:nvPr/>
         </p:nvSpPr>
         <p:spPr>
           <a:xfrm>
-            <a:off x="530352" y="3191256"/>
-            <a:ext cx="3478682" cy="621792"/>
+            <a:off x="457200" y="1380744"/>
+            <a:ext cx="11277295" cy="5020056"/>
           </a:xfrm>
           <a:prstGeom prst="rect">
             <a:avLst/>
@@ -8942,449 +11965,311 @@
           <a:noFill/>
         </p:spPr>
         <p:txBody>
-          <a:bodyPr wrap="square" anchor="t"/>
-          <a:lstStyle/>
-          <a:p>
-            <a:pPr algn="ctr"/>
+          <a:bodyPr wrap="square">
+            <a:spAutoFit/>
+          </a:bodyPr>
+          <a:lstStyle/>
+          <a:p>
+            <a:pPr>
+              <a:spcAft>
+                <a:spcPts val="800"/>
+              </a:spcAft>
+            </a:pPr>
+            <a:r>
+              <a:rPr sz="1300" b="0" i="0">
+                <a:solidFill>
+                  <a:srgbClr val="333333"/>
+                </a:solidFill>
+                <a:latin typeface="Calibri"/>
+              </a:rPr>
+              <a:t>–   </a:t>
+            </a:r>
             <a:r>
               <a:rPr sz="1300" b="1" i="0">
                 <a:solidFill>
-                  <a:srgbClr val="095292"/>
-                </a:solidFill>
-                <a:latin typeface="Calibri"/>
-              </a:rPr>
-              <a:t>DB Fiddle</a:t>
-            </a:r>
-          </a:p>
-          <a:p>
-            <a:pPr algn="ctr">
-              <a:spcBef>
-                <a:spcPts val="200"/>
-              </a:spcBef>
+                  <a:srgbClr val="333333"/>
+                </a:solidFill>
+                <a:latin typeface="Calibri"/>
+              </a:rPr>
+              <a:t>Que es.</a:t>
+            </a:r>
+            <a:r>
+              <a:rPr sz="1300" b="0" i="0">
+                <a:solidFill>
+                  <a:srgbClr val="333333"/>
+                </a:solidFill>
+                <a:latin typeface="Calibri"/>
+              </a:rPr>
+              <a:t> Un indice que solo contiene las filas que cumplen una condicion: «CREATE INDEX idx_cita_programada_fecha ON cita (fecha_hora) WHERE estado = 'PROGRAMADA';». El «WHERE» no es el de la consulta: es </a:t>
+            </a:r>
+            <a:r>
+              <a:rPr sz="1300" b="1" i="0">
+                <a:solidFill>
+                  <a:srgbClr val="333333"/>
+                </a:solidFill>
+                <a:latin typeface="Calibri"/>
+              </a:rPr>
+              <a:t>parte de la definicion del indice</a:t>
+            </a:r>
+            <a:r>
+              <a:rPr sz="1300" b="0" i="0">
+                <a:solidFill>
+                  <a:srgbClr val="333333"/>
+                </a:solidFill>
+                <a:latin typeface="Calibri"/>
+              </a:rPr>
+              <a:t> y decide que filas entran en el arbol.</a:t>
+            </a:r>
+          </a:p>
+          <a:p>
+            <a:pPr>
+              <a:spcAft>
+                <a:spcPts val="800"/>
+              </a:spcAft>
             </a:pPr>
             <a:r>
-              <a:rPr sz="1000" b="0" i="0">
-                <a:solidFill>
-                  <a:srgbClr val="666666"/>
-                </a:solidFill>
-                <a:latin typeface="Calibri"/>
-              </a:rPr>
-              <a:t>CREATE INDEX</a:t>
-            </a:r>
-          </a:p>
-        </p:txBody>
-      </p:sp>
-      <p:sp>
-        <p:nvSpPr>
-          <p:cNvPr id="11" name="Rounded Rectangle 10"/>
-          <p:cNvSpPr/>
-          <p:nvPr/>
-        </p:nvSpPr>
-        <p:spPr>
-          <a:xfrm>
-            <a:off x="4283354" y="1591056"/>
-            <a:ext cx="3624986" cy="2331720"/>
-          </a:xfrm>
-          <a:prstGeom prst="roundRect">
-            <a:avLst>
-              <a:gd name="adj" fmla="val 12000"/>
-            </a:avLst>
-          </a:prstGeom>
-          <a:solidFill>
-            <a:srgbClr val="F2F2F2"/>
-          </a:solidFill>
-          <a:ln>
-            <a:noFill/>
-          </a:ln>
-        </p:spPr>
-        <p:style>
-          <a:lnRef idx="1">
-            <a:schemeClr val="accent1"/>
-          </a:lnRef>
-          <a:fillRef idx="3">
-            <a:schemeClr val="accent1"/>
-          </a:fillRef>
-          <a:effectRef idx="2">
-            <a:schemeClr val="accent1"/>
-          </a:effectRef>
-          <a:fontRef idx="minor">
-            <a:schemeClr val="lt1"/>
-          </a:fontRef>
-        </p:style>
-        <p:txBody>
-          <a:bodyPr rtlCol="0" anchor="ctr"/>
-          <a:lstStyle/>
-          <a:p>
-            <a:pPr algn="ctr"/>
-          </a:p>
-        </p:txBody>
-      </p:sp>
-      <p:sp>
-        <p:nvSpPr>
-          <p:cNvPr id="12" name="Rectangle 11"/>
-          <p:cNvSpPr/>
-          <p:nvPr/>
-        </p:nvSpPr>
-        <p:spPr>
-          <a:xfrm>
-            <a:off x="4283354" y="1591056"/>
-            <a:ext cx="3624986" cy="64008"/>
-          </a:xfrm>
-          <a:prstGeom prst="rect">
-            <a:avLst/>
-          </a:prstGeom>
-          <a:solidFill>
-            <a:srgbClr val="095292"/>
-          </a:solidFill>
-          <a:ln>
-            <a:noFill/>
-          </a:ln>
-        </p:spPr>
-        <p:style>
-          <a:lnRef idx="1">
-            <a:schemeClr val="accent1"/>
-          </a:lnRef>
-          <a:fillRef idx="3">
-            <a:schemeClr val="accent1"/>
-          </a:fillRef>
-          <a:effectRef idx="2">
-            <a:schemeClr val="accent1"/>
-          </a:effectRef>
-          <a:fontRef idx="minor">
-            <a:schemeClr val="lt1"/>
-          </a:fontRef>
-        </p:style>
-        <p:txBody>
-          <a:bodyPr rtlCol="0" anchor="ctr"/>
-          <a:lstStyle/>
-          <a:p>
-            <a:pPr algn="ctr"/>
-          </a:p>
-        </p:txBody>
-      </p:sp>
-      <p:sp>
-        <p:nvSpPr>
-          <p:cNvPr id="13" name="Rectangle 12"/>
-          <p:cNvSpPr/>
-          <p:nvPr/>
-        </p:nvSpPr>
-        <p:spPr>
-          <a:xfrm>
-            <a:off x="4283354" y="1655064"/>
-            <a:ext cx="3624986" cy="27432"/>
-          </a:xfrm>
-          <a:prstGeom prst="rect">
-            <a:avLst/>
-          </a:prstGeom>
-          <a:solidFill>
-            <a:srgbClr val="FFD000"/>
-          </a:solidFill>
-          <a:ln>
-            <a:noFill/>
-          </a:ln>
-        </p:spPr>
-        <p:style>
-          <a:lnRef idx="1">
-            <a:schemeClr val="accent1"/>
-          </a:lnRef>
-          <a:fillRef idx="3">
-            <a:schemeClr val="accent1"/>
-          </a:fillRef>
-          <a:effectRef idx="2">
-            <a:schemeClr val="accent1"/>
-          </a:effectRef>
-          <a:fontRef idx="minor">
-            <a:schemeClr val="lt1"/>
-          </a:fontRef>
-        </p:style>
-        <p:txBody>
-          <a:bodyPr rtlCol="0" anchor="ctr"/>
-          <a:lstStyle/>
-          <a:p>
-            <a:pPr algn="ctr"/>
-          </a:p>
-        </p:txBody>
-      </p:sp>
-      <p:pic>
-        <p:nvPicPr>
-          <p:cNvPr id="14" name="Picture 13" descr="drawio.png"/>
-          <p:cNvPicPr>
-            <a:picLocks noChangeAspect="1"/>
-          </p:cNvPicPr>
-          <p:nvPr/>
-        </p:nvPicPr>
-        <p:blipFill>
-          <a:blip r:embed="rId3"/>
-          <a:stretch>
-            <a:fillRect/>
-          </a:stretch>
-        </p:blipFill>
-        <p:spPr>
-          <a:xfrm>
-            <a:off x="5469483" y="1847087"/>
-            <a:ext cx="1252728" cy="1252728"/>
-          </a:xfrm>
-          <a:prstGeom prst="rect">
-            <a:avLst/>
-          </a:prstGeom>
-        </p:spPr>
-      </p:pic>
-      <p:sp>
-        <p:nvSpPr>
-          <p:cNvPr id="15" name="TextBox 14"/>
-          <p:cNvSpPr txBox="1"/>
-          <p:nvPr/>
-        </p:nvSpPr>
-        <p:spPr>
-          <a:xfrm>
-            <a:off x="4356506" y="3191256"/>
-            <a:ext cx="3478682" cy="621792"/>
-          </a:xfrm>
-          <a:prstGeom prst="rect">
-            <a:avLst/>
-          </a:prstGeom>
-          <a:noFill/>
-        </p:spPr>
-        <p:txBody>
-          <a:bodyPr wrap="square" anchor="t"/>
-          <a:lstStyle/>
-          <a:p>
-            <a:pPr algn="ctr"/>
+              <a:rPr sz="1300" b="0" i="0">
+                <a:solidFill>
+                  <a:srgbClr val="333333"/>
+                </a:solidFill>
+                <a:latin typeface="Calibri"/>
+              </a:rPr>
+              <a:t>–   </a:t>
+            </a:r>
             <a:r>
               <a:rPr sz="1300" b="1" i="0">
                 <a:solidFill>
-                  <a:srgbClr val="095292"/>
-                </a:solidFill>
-                <a:latin typeface="Calibri"/>
-              </a:rPr>
-              <a:t>draw.io</a:t>
-            </a:r>
-          </a:p>
-          <a:p>
-            <a:pPr algn="ctr">
-              <a:spcBef>
-                <a:spcPts val="200"/>
-              </a:spcBef>
+                  <a:srgbClr val="333333"/>
+                </a:solidFill>
+                <a:latin typeface="Calibri"/>
+              </a:rPr>
+              <a:t>Cuanto se ahorra, con los datos de hoy.</a:t>
+            </a:r>
+            <a:r>
+              <a:rPr sz="1300" b="0" i="0">
+                <a:solidFill>
+                  <a:srgbClr val="333333"/>
+                </a:solidFill>
+                <a:latin typeface="Calibri"/>
+              </a:rPr>
+              <a:t> De las 30.010 citas sembradas, </a:t>
+            </a:r>
+            <a:r>
+              <a:rPr sz="1300" b="1" i="0">
+                <a:solidFill>
+                  <a:srgbClr val="333333"/>
+                </a:solidFill>
+                <a:latin typeface="Calibri"/>
+              </a:rPr>
+              <a:t>18.187</a:t>
+            </a:r>
+            <a:r>
+              <a:rPr sz="1300" b="0" i="0">
+                <a:solidFill>
+                  <a:srgbClr val="333333"/>
+                </a:solidFill>
+                <a:latin typeface="Calibri"/>
+              </a:rPr>
+              <a:t> estan «PROGRAMADA» (el 61 %): el indice completo indexa 30.010 entradas y el parcial 18.187, cuatro de cada diez menos. Menos entradas es menos disco, menos cache ocupada y menos trabajo en cada escritura de una cita </a:t>
+            </a:r>
+            <a:r>
+              <a:rPr sz="1300" b="1" i="0">
+                <a:solidFill>
+                  <a:srgbClr val="333333"/>
+                </a:solidFill>
+                <a:latin typeface="Calibri"/>
+              </a:rPr>
+              <a:t>que no este programada</a:t>
+            </a:r>
+            <a:r>
+              <a:rPr sz="1300" b="0" i="0">
+                <a:solidFill>
+                  <a:srgbClr val="333333"/>
+                </a:solidFill>
+                <a:latin typeface="Calibri"/>
+              </a:rPr>
+              <a:t>.</a:t>
+            </a:r>
+          </a:p>
+          <a:p>
+            <a:pPr>
+              <a:spcAft>
+                <a:spcPts val="800"/>
+              </a:spcAft>
             </a:pPr>
             <a:r>
-              <a:rPr sz="1000" b="0" i="0">
-                <a:solidFill>
-                  <a:srgbClr val="666666"/>
-                </a:solidFill>
-                <a:latin typeface="Calibri"/>
-              </a:rPr>
-              <a:t>Tabla caliente</a:t>
-            </a:r>
-          </a:p>
-        </p:txBody>
-      </p:sp>
-      <p:sp>
-        <p:nvSpPr>
-          <p:cNvPr id="16" name="Rounded Rectangle 15"/>
-          <p:cNvSpPr/>
-          <p:nvPr/>
-        </p:nvSpPr>
-        <p:spPr>
-          <a:xfrm>
-            <a:off x="8109508" y="1591056"/>
-            <a:ext cx="3624986" cy="2331720"/>
-          </a:xfrm>
-          <a:prstGeom prst="roundRect">
-            <a:avLst>
-              <a:gd name="adj" fmla="val 12000"/>
-            </a:avLst>
-          </a:prstGeom>
-          <a:solidFill>
-            <a:srgbClr val="F2F2F2"/>
-          </a:solidFill>
-          <a:ln>
-            <a:noFill/>
-          </a:ln>
-        </p:spPr>
-        <p:style>
-          <a:lnRef idx="1">
-            <a:schemeClr val="accent1"/>
-          </a:lnRef>
-          <a:fillRef idx="3">
-            <a:schemeClr val="accent1"/>
-          </a:fillRef>
-          <a:effectRef idx="2">
-            <a:schemeClr val="accent1"/>
-          </a:effectRef>
-          <a:fontRef idx="minor">
-            <a:schemeClr val="lt1"/>
-          </a:fontRef>
-        </p:style>
-        <p:txBody>
-          <a:bodyPr rtlCol="0" anchor="ctr"/>
-          <a:lstStyle/>
-          <a:p>
-            <a:pPr algn="ctr"/>
-          </a:p>
-        </p:txBody>
-      </p:sp>
-      <p:sp>
-        <p:nvSpPr>
-          <p:cNvPr id="17" name="Rectangle 16"/>
-          <p:cNvSpPr/>
-          <p:nvPr/>
-        </p:nvSpPr>
-        <p:spPr>
-          <a:xfrm>
-            <a:off x="8109508" y="1591056"/>
-            <a:ext cx="3624986" cy="64008"/>
-          </a:xfrm>
-          <a:prstGeom prst="rect">
-            <a:avLst/>
-          </a:prstGeom>
-          <a:solidFill>
-            <a:srgbClr val="095292"/>
-          </a:solidFill>
-          <a:ln>
-            <a:noFill/>
-          </a:ln>
-        </p:spPr>
-        <p:style>
-          <a:lnRef idx="1">
-            <a:schemeClr val="accent1"/>
-          </a:lnRef>
-          <a:fillRef idx="3">
-            <a:schemeClr val="accent1"/>
-          </a:fillRef>
-          <a:effectRef idx="2">
-            <a:schemeClr val="accent1"/>
-          </a:effectRef>
-          <a:fontRef idx="minor">
-            <a:schemeClr val="lt1"/>
-          </a:fontRef>
-        </p:style>
-        <p:txBody>
-          <a:bodyPr rtlCol="0" anchor="ctr"/>
-          <a:lstStyle/>
-          <a:p>
-            <a:pPr algn="ctr"/>
-          </a:p>
-        </p:txBody>
-      </p:sp>
-      <p:sp>
-        <p:nvSpPr>
-          <p:cNvPr id="18" name="Rectangle 17"/>
-          <p:cNvSpPr/>
-          <p:nvPr/>
-        </p:nvSpPr>
-        <p:spPr>
-          <a:xfrm>
-            <a:off x="8109508" y="1655064"/>
-            <a:ext cx="3624986" cy="27432"/>
-          </a:xfrm>
-          <a:prstGeom prst="rect">
-            <a:avLst/>
-          </a:prstGeom>
-          <a:solidFill>
-            <a:srgbClr val="FFD000"/>
-          </a:solidFill>
-          <a:ln>
-            <a:noFill/>
-          </a:ln>
-        </p:spPr>
-        <p:style>
-          <a:lnRef idx="1">
-            <a:schemeClr val="accent1"/>
-          </a:lnRef>
-          <a:fillRef idx="3">
-            <a:schemeClr val="accent1"/>
-          </a:fillRef>
-          <a:effectRef idx="2">
-            <a:schemeClr val="accent1"/>
-          </a:effectRef>
-          <a:fontRef idx="minor">
-            <a:schemeClr val="lt1"/>
-          </a:fontRef>
-        </p:style>
-        <p:txBody>
-          <a:bodyPr rtlCol="0" anchor="ctr"/>
-          <a:lstStyle/>
-          <a:p>
-            <a:pPr algn="ctr"/>
-          </a:p>
-        </p:txBody>
-      </p:sp>
-      <p:pic>
-        <p:nvPicPr>
-          <p:cNvPr id="19" name="Picture 18" descr="google_docs.png"/>
-          <p:cNvPicPr>
-            <a:picLocks noChangeAspect="1"/>
-          </p:cNvPicPr>
-          <p:nvPr/>
-        </p:nvPicPr>
-        <p:blipFill>
-          <a:blip r:embed="rId4"/>
-          <a:stretch>
-            <a:fillRect/>
-          </a:stretch>
-        </p:blipFill>
-        <p:spPr>
-          <a:xfrm>
-            <a:off x="9295638" y="1847087"/>
-            <a:ext cx="1252728" cy="1252728"/>
-          </a:xfrm>
-          <a:prstGeom prst="rect">
-            <a:avLst/>
-          </a:prstGeom>
-        </p:spPr>
-      </p:pic>
-      <p:sp>
-        <p:nvSpPr>
-          <p:cNvPr id="20" name="TextBox 19"/>
-          <p:cNvSpPr txBox="1"/>
-          <p:nvPr/>
-        </p:nvSpPr>
-        <p:spPr>
-          <a:xfrm>
-            <a:off x="8182660" y="3191256"/>
-            <a:ext cx="3478682" cy="621792"/>
-          </a:xfrm>
-          <a:prstGeom prst="rect">
-            <a:avLst/>
-          </a:prstGeom>
-          <a:noFill/>
-        </p:spPr>
-        <p:txBody>
-          <a:bodyPr wrap="square" anchor="t"/>
-          <a:lstStyle/>
-          <a:p>
-            <a:pPr algn="ctr"/>
+              <a:rPr sz="1300" b="0" i="0">
+                <a:solidFill>
+                  <a:srgbClr val="333333"/>
+                </a:solidFill>
+                <a:latin typeface="Calibri"/>
+              </a:rPr>
+              <a:t>–   </a:t>
+            </a:r>
             <a:r>
               <a:rPr sz="1300" b="1" i="0">
                 <a:solidFill>
-                  <a:srgbClr val="095292"/>
-                </a:solidFill>
-                <a:latin typeface="Calibri"/>
-              </a:rPr>
-              <a:t>Google Docs</a:t>
-            </a:r>
-          </a:p>
-          <a:p>
-            <a:pPr algn="ctr">
-              <a:spcBef>
-                <a:spcPts val="200"/>
-              </a:spcBef>
+                  <a:srgbClr val="333333"/>
+                </a:solidFill>
+                <a:latin typeface="Calibri"/>
+              </a:rPr>
+              <a:t>La condicion para que sirva.</a:t>
+            </a:r>
+            <a:r>
+              <a:rPr sz="1300" b="0" i="0">
+                <a:solidFill>
+                  <a:srgbClr val="333333"/>
+                </a:solidFill>
+                <a:latin typeface="Calibri"/>
+              </a:rPr>
+              <a:t> El planeador solo lo usa si puede demostrar que la consulta </a:t>
+            </a:r>
+            <a:r>
+              <a:rPr sz="1300" b="1" i="0">
+                <a:solidFill>
+                  <a:srgbClr val="333333"/>
+                </a:solidFill>
+                <a:latin typeface="Calibri"/>
+              </a:rPr>
+              <a:t>trae la misma condicion</a:t>
+            </a:r>
+            <a:r>
+              <a:rPr sz="1300" b="0" i="0">
+                <a:solidFill>
+                  <a:srgbClr val="333333"/>
+                </a:solidFill>
+                <a:latin typeface="Calibri"/>
+              </a:rPr>
+              <a:t> del indice. «WHERE estado = 'PROGRAMADA' AND fecha_hora &gt;= ...» si lo aprovecha; la misma consulta sin el filtro de estado </a:t>
+            </a:r>
+            <a:r>
+              <a:rPr sz="1300" b="1" i="0">
+                <a:solidFill>
+                  <a:srgbClr val="333333"/>
+                </a:solidFill>
+                <a:latin typeface="Calibri"/>
+              </a:rPr>
+              <a:t>no</a:t>
+            </a:r>
+            <a:r>
+              <a:rPr sz="1300" b="0" i="0">
+                <a:solidFill>
+                  <a:srgbClr val="333333"/>
+                </a:solidFill>
+                <a:latin typeface="Calibri"/>
+              </a:rPr>
+              <a:t>, porque el indice no contiene las filas atendidas ni las canceladas.</a:t>
+            </a:r>
+          </a:p>
+          <a:p>
+            <a:pPr>
+              <a:spcAft>
+                <a:spcPts val="800"/>
+              </a:spcAft>
             </a:pPr>
             <a:r>
-              <a:rPr sz="1000" b="0" i="0">
-                <a:solidFill>
-                  <a:srgbClr val="666666"/>
-                </a:solidFill>
-                <a:latin typeface="Calibri"/>
-              </a:rPr>
-              <a:t>Justificacion</a:t>
-            </a:r>
-          </a:p>
-        </p:txBody>
-      </p:sp>
-      <p:sp>
-        <p:nvSpPr>
-          <p:cNvPr id="21" name="TextBox 20"/>
+              <a:rPr sz="1300" b="0" i="0">
+                <a:solidFill>
+                  <a:srgbClr val="333333"/>
+                </a:solidFill>
+                <a:latin typeface="Calibri"/>
+              </a:rPr>
+              <a:t>–   </a:t>
+            </a:r>
+            <a:r>
+              <a:rPr sz="1300" b="1" i="0">
+                <a:solidFill>
+                  <a:srgbClr val="333333"/>
+                </a:solidFill>
+                <a:latin typeface="Calibri"/>
+              </a:rPr>
+              <a:t>El caso de VetCare que lo justifica.</a:t>
+            </a:r>
+            <a:r>
+              <a:rPr sz="1300" b="0" i="0">
+                <a:solidFill>
+                  <a:srgbClr val="333333"/>
+                </a:solidFill>
+                <a:latin typeface="Calibri"/>
+              </a:rPr>
+              <a:t> La agenda del dia de la recepcion </a:t>
+            </a:r>
+            <a:r>
+              <a:rPr sz="1300" b="1" i="0">
+                <a:solidFill>
+                  <a:srgbClr val="333333"/>
+                </a:solidFill>
+                <a:latin typeface="Calibri"/>
+              </a:rPr>
+              <a:t>siempre</a:t>
+            </a:r>
+            <a:r>
+              <a:rPr sz="1300" b="0" i="0">
+                <a:solidFill>
+                  <a:srgbClr val="333333"/>
+                </a:solidFill>
+                <a:latin typeface="Calibri"/>
+              </a:rPr>
+              <a:t> filtra por «PROGRAMADA»: nadie abre la pantalla para ver las citas que ya se atendieron. Cuando el filtro es parte del caso de uso y no del capricho de una consulta, el parcial es la respuesta correcta.</a:t>
+            </a:r>
+          </a:p>
+          <a:p>
+            <a:pPr>
+              <a:spcAft>
+                <a:spcPts val="800"/>
+              </a:spcAft>
+            </a:pPr>
+            <a:r>
+              <a:rPr sz="1300" b="0" i="0">
+                <a:solidFill>
+                  <a:srgbClr val="333333"/>
+                </a:solidFill>
+                <a:latin typeface="Calibri"/>
+              </a:rPr>
+              <a:t>–   </a:t>
+            </a:r>
+            <a:r>
+              <a:rPr sz="1300" b="1" i="0">
+                <a:solidFill>
+                  <a:srgbClr val="333333"/>
+                </a:solidFill>
+                <a:latin typeface="Calibri"/>
+              </a:rPr>
+              <a:t>Cual de los dos elige.</a:t>
+            </a:r>
+            <a:r>
+              <a:rPr sz="1300" b="0" i="0">
+                <a:solidFill>
+                  <a:srgbClr val="333333"/>
+                </a:solidFill>
+                <a:latin typeface="Calibri"/>
+              </a:rPr>
+              <a:t> Con «idx_cita_fecha_hora» y «idx_cita_programada_fecha» compitiendo por la misma consulta, el plan nombra al ganador: hay que leer el «Index Scan using ...» y </a:t>
+            </a:r>
+            <a:r>
+              <a:rPr sz="1300" b="1" i="0">
+                <a:solidFill>
+                  <a:srgbClr val="333333"/>
+                </a:solidFill>
+                <a:latin typeface="Calibri"/>
+              </a:rPr>
+              <a:t>escribir cual salio</a:t>
+            </a:r>
+            <a:r>
+              <a:rPr sz="1300" b="0" i="0">
+                <a:solidFill>
+                  <a:srgbClr val="333333"/>
+                </a:solidFill>
+                <a:latin typeface="Calibri"/>
+              </a:rPr>
+              <a:t>, porque la rubrica descuenta si no se comenta.</a:t>
+            </a:r>
+          </a:p>
+        </p:txBody>
+      </p:sp>
+      <p:sp>
+        <p:nvSpPr>
+          <p:cNvPr id="7" name="TextBox 6"/>
           <p:cNvSpPr txBox="1"/>
           <p:nvPr/>
         </p:nvSpPr>
@@ -9452,7 +12337,7 @@
         <p:spPr>
           <a:xfrm>
             <a:off x="0" y="0"/>
-            <a:ext cx="12191695" cy="960120"/>
+            <a:ext cx="12191695" cy="1170432"/>
           </a:xfrm>
           <a:prstGeom prst="rect">
             <a:avLst/>
@@ -9494,7 +12379,7 @@
         </p:nvSpPr>
         <p:spPr>
           <a:xfrm>
-            <a:off x="0" y="960120"/>
+            <a:off x="0" y="1170432"/>
             <a:ext cx="12191695" cy="41148"/>
           </a:xfrm>
           <a:prstGeom prst="rect">
@@ -9538,7 +12423,7 @@
         <p:spPr>
           <a:xfrm>
             <a:off x="457200" y="164592"/>
-            <a:ext cx="11277295" cy="502920"/>
+            <a:ext cx="11277295" cy="384048"/>
           </a:xfrm>
           <a:prstGeom prst="rect">
             <a:avLst/>
@@ -9558,7 +12443,7 @@
                 </a:solidFill>
                 <a:latin typeface="Calibri"/>
               </a:rPr>
-              <a:t>Taller PI VetCare — contexto / por que importa</a:t>
+              <a:t>Particionar hoy de verdad: rango por ano, poda y archivado</a:t>
             </a:r>
           </a:p>
         </p:txBody>
@@ -9571,8 +12456,42 @@
         </p:nvSpPr>
         <p:spPr>
           <a:xfrm>
-            <a:off x="457200" y="1170432"/>
-            <a:ext cx="11277295" cy="5230368"/>
+            <a:off x="457200" y="566928"/>
+            <a:ext cx="11277295" cy="411480"/>
+          </a:xfrm>
+          <a:prstGeom prst="rect">
+            <a:avLst/>
+          </a:prstGeom>
+          <a:noFill/>
+        </p:spPr>
+        <p:txBody>
+          <a:bodyPr wrap="square">
+            <a:spAutoFit/>
+          </a:bodyPr>
+          <a:lstStyle/>
+          <a:p>
+            <a:r>
+              <a:rPr sz="1400" b="0" i="0">
+                <a:solidFill>
+                  <a:srgbClr val="B8D8EE"/>
+                </a:solidFill>
+                <a:latin typeface="Calibri"/>
+              </a:rPr>
+              <a:t>Es la pregunta 3 completa —20 de los 100 puntos— y el segundo parrafo de la pregunta 5: hoy se implementa, no se cuenta</a:t>
+            </a:r>
+          </a:p>
+        </p:txBody>
+      </p:sp>
+      <p:sp>
+        <p:nvSpPr>
+          <p:cNvPr id="6" name="TextBox 5"/>
+          <p:cNvSpPr txBox="1"/>
+          <p:nvPr/>
+        </p:nvSpPr>
+        <p:spPr>
+          <a:xfrm>
+            <a:off x="457200" y="1380744"/>
+            <a:ext cx="11277295" cy="5020056"/>
           </a:xfrm>
           <a:prstGeom prst="rect">
             <a:avLst/>
@@ -9591,7 +12510,7 @@
               </a:spcAft>
             </a:pPr>
             <a:r>
-              <a:rPr sz="1600" b="0" i="0">
+              <a:rPr sz="1300" b="0" i="0">
                 <a:solidFill>
                   <a:srgbClr val="333333"/>
                 </a:solidFill>
@@ -9600,22 +12519,40 @@
               <a:t>–   </a:t>
             </a:r>
             <a:r>
-              <a:rPr sz="1600" b="1" i="0">
-                <a:solidFill>
-                  <a:srgbClr val="333333"/>
-                </a:solidFill>
-                <a:latin typeface="Calibri"/>
-              </a:rPr>
-              <a:t>Por qué importa al PI:</a:t>
-            </a:r>
-            <a:r>
-              <a:rPr sz="1600" b="0" i="0">
-                <a:solidFill>
-                  <a:srgbClr val="333333"/>
-                </a:solidFill>
-                <a:latin typeface="Calibri"/>
-              </a:rPr>
-              <a:t> indices aceleran lecturas frecuentes.</a:t>
+              <a:rPr sz="1300" b="1" i="0">
+                <a:solidFill>
+                  <a:srgbClr val="333333"/>
+                </a:solidFill>
+                <a:latin typeface="Calibri"/>
+              </a:rPr>
+              <a:t>El DDL, en tres sentencias.</a:t>
+            </a:r>
+            <a:r>
+              <a:rPr sz="1300" b="0" i="0">
+                <a:solidFill>
+                  <a:srgbClr val="333333"/>
+                </a:solidFill>
+                <a:latin typeface="Calibri"/>
+              </a:rPr>
+              <a:t> «CREATE TABLE cita_hist (... ) PARTITION BY RANGE (fecha_hora);» y despues una particion por ano: «CREATE TABLE cita_hist_2025 PARTITION OF cita_hist FOR VALUES FROM (TIMESTAMP '2025-01-01') TO (TIMESTAMP '2026-01-01');». El rango es </a:t>
+            </a:r>
+            <a:r>
+              <a:rPr sz="1300" b="1" i="0">
+                <a:solidFill>
+                  <a:srgbClr val="333333"/>
+                </a:solidFill>
+                <a:latin typeface="Calibri"/>
+              </a:rPr>
+              <a:t>cerrado por abajo y abierto por arriba</a:t>
+            </a:r>
+            <a:r>
+              <a:rPr sz="1300" b="0" i="0">
+                <a:solidFill>
+                  <a:srgbClr val="333333"/>
+                </a:solidFill>
+                <a:latin typeface="Calibri"/>
+              </a:rPr>
+              <a:t>, asi que el «TO» de una particion es el «FROM» de la siguiente y nunca se solapan.</a:t>
             </a:r>
           </a:p>
           <a:p>
@@ -9625,20 +12562,230 @@
               </a:spcAft>
             </a:pPr>
             <a:r>
-              <a:rPr sz="1600" b="0" i="0">
-                <a:solidFill>
-                  <a:srgbClr val="333333"/>
-                </a:solidFill>
-                <a:latin typeface="Calibri"/>
-              </a:rPr>
-              <a:t>–   Sobre-indexar castiga escrituras.</a:t>
-            </a:r>
-          </a:p>
-        </p:txBody>
-      </p:sp>
-      <p:sp>
-        <p:nvSpPr>
-          <p:cNvPr id="6" name="TextBox 5"/>
+              <a:rPr sz="1300" b="0" i="0">
+                <a:solidFill>
+                  <a:srgbClr val="333333"/>
+                </a:solidFill>
+                <a:latin typeface="Calibri"/>
+              </a:rPr>
+              <a:t>–   </a:t>
+            </a:r>
+            <a:r>
+              <a:rPr sz="1300" b="1" i="0">
+                <a:solidFill>
+                  <a:srgbClr val="333333"/>
+                </a:solidFill>
+                <a:latin typeface="Calibri"/>
+              </a:rPr>
+              <a:t>La trampa que cuesta la pregunta.</a:t>
+            </a:r>
+            <a:r>
+              <a:rPr sz="1300" b="0" i="0">
+                <a:solidFill>
+                  <a:srgbClr val="333333"/>
+                </a:solidFill>
+                <a:latin typeface="Calibri"/>
+              </a:rPr>
+              <a:t> En una tabla particionada la clave primaria </a:t>
+            </a:r>
+            <a:r>
+              <a:rPr sz="1300" b="1" i="0">
+                <a:solidFill>
+                  <a:srgbClr val="333333"/>
+                </a:solidFill>
+                <a:latin typeface="Calibri"/>
+              </a:rPr>
+              <a:t>debe incluir la columna de particion</a:t>
+            </a:r>
+            <a:r>
+              <a:rPr sz="1300" b="0" i="0">
+                <a:solidFill>
+                  <a:srgbClr val="333333"/>
+                </a:solidFill>
+                <a:latin typeface="Calibri"/>
+              </a:rPr>
+              <a:t>: «PRIMARY KEY (id_cita, fecha_hora)». Un «PRIMARY KEY (id_cita)» a secas no compila, y el error del motor no dice «te falta la columna de particion» con esas palabras.</a:t>
+            </a:r>
+          </a:p>
+          <a:p>
+            <a:pPr>
+              <a:spcAft>
+                <a:spcPts val="800"/>
+              </a:spcAft>
+            </a:pPr>
+            <a:r>
+              <a:rPr sz="1300" b="0" i="0">
+                <a:solidFill>
+                  <a:srgbClr val="333333"/>
+                </a:solidFill>
+                <a:latin typeface="Calibri"/>
+              </a:rPr>
+              <a:t>–   </a:t>
+            </a:r>
+            <a:r>
+              <a:rPr sz="1300" b="1" i="0">
+                <a:solidFill>
+                  <a:srgbClr val="333333"/>
+                </a:solidFill>
+                <a:latin typeface="Calibri"/>
+              </a:rPr>
+              <a:t>La prueba de que el reparto ocurrio.</a:t>
+            </a:r>
+            <a:r>
+              <a:rPr sz="1300" b="0" i="0">
+                <a:solidFill>
+                  <a:srgbClr val="333333"/>
+                </a:solidFill>
+                <a:latin typeface="Calibri"/>
+              </a:rPr>
+              <a:t> «SELECT tableoid::regclass AS particion, COUNT(*), MIN(fecha_hora), MAX(fecha_hora) FROM cita_hist GROUP BY 1 ORDER BY 1;» — «tableoid» es la columna de sistema que dice </a:t>
+            </a:r>
+            <a:r>
+              <a:rPr sz="1300" b="1" i="0">
+                <a:solidFill>
+                  <a:srgbClr val="333333"/>
+                </a:solidFill>
+                <a:latin typeface="Calibri"/>
+              </a:rPr>
+              <a:t>en que tabla fisica vive cada fila</a:t>
+            </a:r>
+            <a:r>
+              <a:rPr sz="1300" b="0" i="0">
+                <a:solidFill>
+                  <a:srgbClr val="333333"/>
+                </a:solidFill>
+                <a:latin typeface="Calibri"/>
+              </a:rPr>
+              <a:t>, y «::regclass» la traduce a nombre. Sin esta consulta no hay evidencia del enrutamiento, solo un «INSERT» que no dio error.</a:t>
+            </a:r>
+          </a:p>
+          <a:p>
+            <a:pPr>
+              <a:spcAft>
+                <a:spcPts val="800"/>
+              </a:spcAft>
+            </a:pPr>
+            <a:r>
+              <a:rPr sz="1300" b="0" i="0">
+                <a:solidFill>
+                  <a:srgbClr val="333333"/>
+                </a:solidFill>
+                <a:latin typeface="Calibri"/>
+              </a:rPr>
+              <a:t>–   </a:t>
+            </a:r>
+            <a:r>
+              <a:rPr sz="1300" b="1" i="0">
+                <a:solidFill>
+                  <a:srgbClr val="333333"/>
+                </a:solidFill>
+                <a:latin typeface="Calibri"/>
+              </a:rPr>
+              <a:t>La poda, que es lo unico que mejora hoy.</a:t>
+            </a:r>
+            <a:r>
+              <a:rPr sz="1300" b="0" i="0">
+                <a:solidFill>
+                  <a:srgbClr val="333333"/>
+                </a:solidFill>
+                <a:latin typeface="Calibri"/>
+              </a:rPr>
+              <a:t> En «EXPLAIN ANALYZE» de una consulta acotada a 2026 el plan tiene que mencionar </a:t>
+            </a:r>
+            <a:r>
+              <a:rPr sz="1300" b="1" i="0">
+                <a:solidFill>
+                  <a:srgbClr val="333333"/>
+                </a:solidFill>
+                <a:latin typeface="Calibri"/>
+              </a:rPr>
+              <a:t>solo «cita_hist_2026»</a:t>
+            </a:r>
+            <a:r>
+              <a:rPr sz="1300" b="0" i="0">
+                <a:solidFill>
+                  <a:srgbClr val="333333"/>
+                </a:solidFill>
+                <a:latin typeface="Calibri"/>
+              </a:rPr>
+              <a:t>. Con 5.010 filas el tiempo no baja de forma apreciable y hay que decirlo: lo que se demuestra es que el motor </a:t>
+            </a:r>
+            <a:r>
+              <a:rPr sz="1300" b="1" i="0">
+                <a:solidFill>
+                  <a:srgbClr val="333333"/>
+                </a:solidFill>
+                <a:latin typeface="Calibri"/>
+              </a:rPr>
+              <a:t>descarta particiones enteras</a:t>
+            </a:r>
+            <a:r>
+              <a:rPr sz="1300" b="0" i="0">
+                <a:solidFill>
+                  <a:srgbClr val="333333"/>
+                </a:solidFill>
+                <a:latin typeface="Calibri"/>
+              </a:rPr>
+              <a:t> antes de leer.</a:t>
+            </a:r>
+          </a:p>
+          <a:p>
+            <a:pPr>
+              <a:spcAft>
+                <a:spcPts val="800"/>
+              </a:spcAft>
+            </a:pPr>
+            <a:r>
+              <a:rPr sz="1300" b="0" i="0">
+                <a:solidFill>
+                  <a:srgbClr val="333333"/>
+                </a:solidFill>
+                <a:latin typeface="Calibri"/>
+              </a:rPr>
+              <a:t>–   </a:t>
+            </a:r>
+            <a:r>
+              <a:rPr sz="1300" b="1" i="0">
+                <a:solidFill>
+                  <a:srgbClr val="333333"/>
+                </a:solidFill>
+                <a:latin typeface="Calibri"/>
+              </a:rPr>
+              <a:t>Y el beneficio real, que es de mantenimiento.</a:t>
+            </a:r>
+            <a:r>
+              <a:rPr sz="1300" b="0" i="0">
+                <a:solidFill>
+                  <a:srgbClr val="333333"/>
+                </a:solidFill>
+                <a:latin typeface="Calibri"/>
+              </a:rPr>
+              <a:t> Archivar 2025 es «DROP TABLE cita_hist_2025», una operacion de </a:t>
+            </a:r>
+            <a:r>
+              <a:rPr sz="1300" b="1" i="0">
+                <a:solidFill>
+                  <a:srgbClr val="333333"/>
+                </a:solidFill>
+                <a:latin typeface="Calibri"/>
+              </a:rPr>
+              <a:t>metadatos</a:t>
+            </a:r>
+            <a:r>
+              <a:rPr sz="1300" b="0" i="0">
+                <a:solidFill>
+                  <a:srgbClr val="333333"/>
+                </a:solidFill>
+                <a:latin typeface="Calibri"/>
+              </a:rPr>
+              <a:t> que tarda un instante. El «DELETE FROM cita WHERE fecha_hora &lt; ...» equivalente toca millones de filas, infla el registro de transacciones y sostiene bloqueos largos — el contraste conecta directo con la Clase 8.</a:t>
+            </a:r>
+          </a:p>
+        </p:txBody>
+      </p:sp>
+      <p:sp>
+        <p:nvSpPr>
+          <p:cNvPr id="7" name="TextBox 6"/>
           <p:cNvSpPr txBox="1"/>
           <p:nvPr/>
         </p:nvSpPr>
@@ -9812,7 +12959,7 @@
                 </a:solidFill>
                 <a:latin typeface="Calibri"/>
               </a:rPr>
-              <a:t>Taller PI VetCare — objetivo y criterios</a:t>
+              <a:t>Demo del dia</a:t>
             </a:r>
           </a:p>
         </p:txBody>
@@ -9845,7 +12992,7 @@
               </a:spcAft>
             </a:pPr>
             <a:r>
-              <a:rPr sz="1500" b="0" i="0">
+              <a:rPr sz="1600" b="0" i="0">
                 <a:solidFill>
                   <a:srgbClr val="333333"/>
                 </a:solidFill>
@@ -9854,22 +13001,22 @@
               <a:t>–   </a:t>
             </a:r>
             <a:r>
-              <a:rPr sz="1500" b="1" i="0">
-                <a:solidFill>
-                  <a:srgbClr val="333333"/>
-                </a:solidFill>
-                <a:latin typeface="Calibri"/>
-              </a:rPr>
-              <a:t>Objetivo:</a:t>
-            </a:r>
-            <a:r>
-              <a:rPr sz="1500" b="0" i="0">
-                <a:solidFill>
-                  <a:srgbClr val="333333"/>
-                </a:solidFill>
-                <a:latin typeface="Calibri"/>
-              </a:rPr>
-              <a:t> &gt;=2 indices justificados en tablas calientes.</a:t>
+              <a:rPr sz="1600" b="1" i="0">
+                <a:solidFill>
+                  <a:srgbClr val="333333"/>
+                </a:solidFill>
+                <a:latin typeface="Calibri"/>
+              </a:rPr>
+              <a:t>Herramienta:</a:t>
+            </a:r>
+            <a:r>
+              <a:rPr sz="1600" b="0" i="0">
+                <a:solidFill>
+                  <a:srgbClr val="333333"/>
+                </a:solidFill>
+                <a:latin typeface="Calibri"/>
+              </a:rPr>
+              <a:t> ExamLab (PostgreSQL/PGlite)</a:t>
             </a:r>
           </a:p>
           <a:p>
@@ -9879,7 +13026,7 @@
               </a:spcAft>
             </a:pPr>
             <a:r>
-              <a:rPr sz="1500" b="0" i="0">
+              <a:rPr sz="1600" b="0" i="0">
                 <a:solidFill>
                   <a:srgbClr val="333333"/>
                 </a:solidFill>
@@ -9888,22 +13035,22 @@
               <a:t>–   </a:t>
             </a:r>
             <a:r>
-              <a:rPr sz="1500" b="1" i="0">
-                <a:solidFill>
-                  <a:srgbClr val="333333"/>
-                </a:solidFill>
-                <a:latin typeface="Calibri"/>
-              </a:rPr>
-              <a:t>Exito:</a:t>
-            </a:r>
-            <a:r>
-              <a:rPr sz="1500" b="0" i="0">
-                <a:solidFill>
-                  <a:srgbClr val="333333"/>
-                </a:solidFill>
-                <a:latin typeface="Calibri"/>
-              </a:rPr>
-              <a:t> 2 CREATE INDEX.</a:t>
+              <a:rPr sz="1600" b="1" i="0">
+                <a:solidFill>
+                  <a:srgbClr val="333333"/>
+                </a:solidFill>
+                <a:latin typeface="Calibri"/>
+              </a:rPr>
+              <a:t>Demo:</a:t>
+            </a:r>
+            <a:r>
+              <a:rPr sz="1600" b="0" i="0">
+                <a:solidFill>
+                  <a:srgbClr val="333333"/>
+                </a:solidFill>
+                <a:latin typeface="Calibri"/>
+              </a:rPr>
+              <a:t> EXPLAIN ANALYZE con Seq Scan, CREATE INDEX idx_cita_fecha_hora, ANALYZE, y el mismo EXPLAIN mostrando Index Scan.</a:t>
             </a:r>
           </a:p>
           <a:p>
@@ -9913,31 +13060,13 @@
               </a:spcAft>
             </a:pPr>
             <a:r>
-              <a:rPr sz="1500" b="0" i="0">
-                <a:solidFill>
-                  <a:srgbClr val="333333"/>
-                </a:solidFill>
-                <a:latin typeface="Calibri"/>
-              </a:rPr>
-              <a:t>–   </a:t>
-            </a:r>
-            <a:r>
-              <a:rPr sz="1500" b="1" i="0">
-                <a:solidFill>
-                  <a:srgbClr val="333333"/>
-                </a:solidFill>
-                <a:latin typeface="Calibri"/>
-              </a:rPr>
-              <a:t>Exito:</a:t>
-            </a:r>
-            <a:r>
-              <a:rPr sz="1500" b="0" i="0">
-                <a:solidFill>
-                  <a:srgbClr val="333333"/>
-                </a:solidFill>
-                <a:latin typeface="Calibri"/>
-              </a:rPr>
-              <a:t> Justificación.</a:t>
+              <a:rPr sz="1600" b="0" i="0">
+                <a:solidFill>
+                  <a:srgbClr val="333333"/>
+                </a:solidFill>
+                <a:latin typeface="Calibri"/>
+              </a:rPr>
+              <a:t>–   Sigan el mismo dominio VetCare (no inventen otro caso).</a:t>
             </a:r>
           </a:p>
           <a:p>
@@ -9947,65 +13076,13 @@
               </a:spcAft>
             </a:pPr>
             <a:r>
-              <a:rPr sz="1500" b="0" i="0">
-                <a:solidFill>
-                  <a:srgbClr val="333333"/>
-                </a:solidFill>
-                <a:latin typeface="Calibri"/>
-              </a:rPr>
-              <a:t>–   </a:t>
-            </a:r>
-            <a:r>
-              <a:rPr sz="1500" b="1" i="0">
-                <a:solidFill>
-                  <a:srgbClr val="333333"/>
-                </a:solidFill>
-                <a:latin typeface="Calibri"/>
-              </a:rPr>
-              <a:t>Exito:</a:t>
-            </a:r>
-            <a:r>
-              <a:rPr sz="1500" b="0" i="0">
-                <a:solidFill>
-                  <a:srgbClr val="333333"/>
-                </a:solidFill>
-                <a:latin typeface="Calibri"/>
-              </a:rPr>
-              <a:t> Riesgo sobre-indexar.</a:t>
-            </a:r>
-          </a:p>
-          <a:p>
-            <a:pPr>
-              <a:spcAft>
-                <a:spcPts val="800"/>
-              </a:spcAft>
-            </a:pPr>
-            <a:r>
-              <a:rPr sz="1500" b="0" i="0">
-                <a:solidFill>
-                  <a:srgbClr val="333333"/>
-                </a:solidFill>
-                <a:latin typeface="Calibri"/>
-              </a:rPr>
-              <a:t>–   </a:t>
-            </a:r>
-            <a:r>
-              <a:rPr sz="1500" b="1" i="0">
-                <a:solidFill>
-                  <a:srgbClr val="333333"/>
-                </a:solidFill>
-                <a:latin typeface="Calibri"/>
-              </a:rPr>
-              <a:t>Exito:</a:t>
-            </a:r>
-            <a:r>
-              <a:rPr sz="1500" b="0" i="0">
-                <a:solidFill>
-                  <a:srgbClr val="333333"/>
-                </a:solidFill>
-                <a:latin typeface="Calibri"/>
-              </a:rPr>
-              <a:t> Diagrama opcional.</a:t>
+              <a:rPr sz="1600" b="0" i="0">
+                <a:solidFill>
+                  <a:srgbClr val="333333"/>
+                </a:solidFill>
+                <a:latin typeface="Calibri"/>
+              </a:rPr>
+              <a:t>–   Al final de la demo: dejar enlace/script compartible al grupo.</a:t>
             </a:r>
           </a:p>
         </p:txBody>

--- a/Bases de Datos II/Clases/Clase 7 - Indices y particionamiento/Presentacion.pptx
+++ b/Bases de Datos II/Clases/Clase 7 - Indices y particionamiento/Presentacion.pptx
@@ -4279,7 +4279,7 @@
               </a:spcAft>
             </a:pPr>
             <a:r>
-              <a:rPr sz="1600" b="0" i="0">
+              <a:rPr sz="2000" b="0" i="0">
                 <a:solidFill>
                   <a:srgbClr val="333333"/>
                 </a:solidFill>
@@ -4288,7 +4288,7 @@
               <a:t>–   </a:t>
             </a:r>
             <a:r>
-              <a:rPr sz="1600" b="1" i="0">
+              <a:rPr sz="2000" b="1" i="0">
                 <a:solidFill>
                   <a:srgbClr val="333333"/>
                 </a:solidFill>
@@ -4297,7 +4297,7 @@
               <a:t>Por qué importa al PI:</a:t>
             </a:r>
             <a:r>
-              <a:rPr sz="1600" b="0" i="0">
+              <a:rPr sz="2000" b="0" i="0">
                 <a:solidFill>
                   <a:srgbClr val="333333"/>
                 </a:solidFill>
@@ -4306,7 +4306,7 @@
               <a:t> la rúbrica pide índices </a:t>
             </a:r>
             <a:r>
-              <a:rPr sz="1600" b="1" i="0">
+              <a:rPr sz="2000" b="1" i="0">
                 <a:solidFill>
                   <a:srgbClr val="333333"/>
                 </a:solidFill>
@@ -4315,7 +4315,7 @@
               <a:t>justificados</a:t>
             </a:r>
             <a:r>
-              <a:rPr sz="1600" b="0" i="0">
+              <a:rPr sz="2000" b="0" i="0">
                 <a:solidFill>
                   <a:srgbClr val="333333"/>
                 </a:solidFill>
@@ -4331,7 +4331,7 @@
               </a:spcAft>
             </a:pPr>
             <a:r>
-              <a:rPr sz="1600" b="0" i="0">
+              <a:rPr sz="2000" b="0" i="0">
                 <a:solidFill>
                   <a:srgbClr val="333333"/>
                 </a:solidFill>
@@ -4340,7 +4340,7 @@
               <a:t>–   La agenda del día y la ficha del dueño son las dos pantallas que Huellitas abre </a:t>
             </a:r>
             <a:r>
-              <a:rPr sz="1600" b="1" i="0">
+              <a:rPr sz="2000" b="1" i="0">
                 <a:solidFill>
                   <a:srgbClr val="333333"/>
                 </a:solidFill>
@@ -4349,7 +4349,7 @@
               <a:t>todo el día</a:t>
             </a:r>
             <a:r>
-              <a:rPr sz="1600" b="0" i="0">
+              <a:rPr sz="2000" b="0" i="0">
                 <a:solidFill>
                   <a:srgbClr val="333333"/>
                 </a:solidFill>
@@ -4365,7 +4365,7 @@
               </a:spcAft>
             </a:pPr>
             <a:r>
-              <a:rPr sz="1600" b="0" i="0">
+              <a:rPr sz="2000" b="0" i="0">
                 <a:solidFill>
                   <a:srgbClr val="333333"/>
                 </a:solidFill>
@@ -4374,7 +4374,7 @@
               <a:t>–   Indexar de más también cuesta: cada índice se mantiene en </a:t>
             </a:r>
             <a:r>
-              <a:rPr sz="1600" b="1" i="0">
+              <a:rPr sz="2000" b="1" i="0">
                 <a:solidFill>
                   <a:srgbClr val="333333"/>
                 </a:solidFill>
@@ -4383,7 +4383,7 @@
               <a:t>cada cita agendada</a:t>
             </a:r>
             <a:r>
-              <a:rPr sz="1600" b="0" i="0">
+              <a:rPr sz="2000" b="0" i="0">
                 <a:solidFill>
                   <a:srgbClr val="333333"/>
                 </a:solidFill>
@@ -4392,7 +4392,7 @@
               <a:t>. Por eso hoy el </a:t>
             </a:r>
             <a:r>
-              <a:rPr sz="1600" b="1" i="0">
+              <a:rPr sz="2000" b="1" i="0">
                 <a:solidFill>
                   <a:srgbClr val="333333"/>
                 </a:solidFill>
@@ -4401,7 +4401,7 @@
               <a:t>veredicto</a:t>
             </a:r>
             <a:r>
-              <a:rPr sz="1600" b="0" i="0">
+              <a:rPr sz="2000" b="0" i="0">
                 <a:solidFill>
                   <a:srgbClr val="333333"/>
                 </a:solidFill>
@@ -4621,7 +4621,7 @@
               </a:spcAft>
             </a:pPr>
             <a:r>
-              <a:rPr sz="1500" b="0" i="0">
+              <a:rPr sz="1700" b="0" i="0">
                 <a:solidFill>
                   <a:srgbClr val="333333"/>
                 </a:solidFill>
@@ -4630,7 +4630,7 @@
               <a:t>–   </a:t>
             </a:r>
             <a:r>
-              <a:rPr sz="1500" b="1" i="0">
+              <a:rPr sz="1700" b="1" i="0">
                 <a:solidFill>
                   <a:srgbClr val="333333"/>
                 </a:solidFill>
@@ -4639,7 +4639,7 @@
               <a:t>Objetivo:</a:t>
             </a:r>
             <a:r>
-              <a:rPr sz="1500" b="0" i="0">
+              <a:rPr sz="1700" b="0" i="0">
                 <a:solidFill>
                   <a:srgbClr val="333333"/>
                 </a:solidFill>
@@ -4655,7 +4655,7 @@
               </a:spcAft>
             </a:pPr>
             <a:r>
-              <a:rPr sz="1500" b="0" i="0">
+              <a:rPr sz="1700" b="0" i="0">
                 <a:solidFill>
                   <a:srgbClr val="333333"/>
                 </a:solidFill>
@@ -4664,7 +4664,7 @@
               <a:t>–   </a:t>
             </a:r>
             <a:r>
-              <a:rPr sz="1500" b="1" i="0">
+              <a:rPr sz="1700" b="1" i="0">
                 <a:solidFill>
                   <a:srgbClr val="333333"/>
                 </a:solidFill>
@@ -4673,7 +4673,7 @@
               <a:t>Exito:</a:t>
             </a:r>
             <a:r>
-              <a:rPr sz="1500" b="0" i="0">
+              <a:rPr sz="1700" b="0" i="0">
                 <a:solidFill>
                   <a:srgbClr val="333333"/>
                 </a:solidFill>
@@ -4682,7 +4682,7 @@
               <a:t> La línea base medida </a:t>
             </a:r>
             <a:r>
-              <a:rPr sz="1500" b="1" i="0">
+              <a:rPr sz="1700" b="1" i="0">
                 <a:solidFill>
                   <a:srgbClr val="333333"/>
                 </a:solidFill>
@@ -4691,7 +4691,7 @@
               <a:t>antes</a:t>
             </a:r>
             <a:r>
-              <a:rPr sz="1500" b="0" i="0">
+              <a:rPr sz="1700" b="0" i="0">
                 <a:solidFill>
                   <a:srgbClr val="333333"/>
                 </a:solidFill>
@@ -4707,7 +4707,7 @@
               </a:spcAft>
             </a:pPr>
             <a:r>
-              <a:rPr sz="1500" b="0" i="0">
+              <a:rPr sz="1700" b="0" i="0">
                 <a:solidFill>
                   <a:srgbClr val="333333"/>
                 </a:solidFill>
@@ -4716,7 +4716,7 @@
               <a:t>–   </a:t>
             </a:r>
             <a:r>
-              <a:rPr sz="1500" b="1" i="0">
+              <a:rPr sz="1700" b="1" i="0">
                 <a:solidFill>
                   <a:srgbClr val="333333"/>
                 </a:solidFill>
@@ -4725,7 +4725,7 @@
               <a:t>Exito:</a:t>
             </a:r>
             <a:r>
-              <a:rPr sz="1500" b="0" i="0">
+              <a:rPr sz="1700" b="0" i="0">
                 <a:solidFill>
                   <a:srgbClr val="333333"/>
                 </a:solidFill>
@@ -4734,7 +4734,7 @@
               <a:t> Los </a:t>
             </a:r>
             <a:r>
-              <a:rPr sz="1500" b="1" i="0">
+              <a:rPr sz="1700" b="1" i="0">
                 <a:solidFill>
                   <a:srgbClr val="333333"/>
                 </a:solidFill>
@@ -4743,7 +4743,7 @@
               <a:t>tres</a:t>
             </a:r>
             <a:r>
-              <a:rPr sz="1500" b="0" i="0">
+              <a:rPr sz="1700" b="0" i="0">
                 <a:solidFill>
                   <a:srgbClr val="333333"/>
                 </a:solidFill>
@@ -4752,7 +4752,7 @@
               <a:t> índices con el nombre exacto — «idx_cita_fecha_hora», «idx_mascota_dueno» y el </a:t>
             </a:r>
             <a:r>
-              <a:rPr sz="1500" b="1" i="0">
+              <a:rPr sz="1700" b="1" i="0">
                 <a:solidFill>
                   <a:srgbClr val="333333"/>
                 </a:solidFill>
@@ -4761,7 +4761,7 @@
               <a:t>parcial</a:t>
             </a:r>
             <a:r>
-              <a:rPr sz="1500" b="0" i="0">
+              <a:rPr sz="1700" b="0" i="0">
                 <a:solidFill>
                   <a:srgbClr val="333333"/>
                 </a:solidFill>
@@ -4777,7 +4777,7 @@
               </a:spcAft>
             </a:pPr>
             <a:r>
-              <a:rPr sz="1500" b="0" i="0">
+              <a:rPr sz="1700" b="0" i="0">
                 <a:solidFill>
                   <a:srgbClr val="333333"/>
                 </a:solidFill>
@@ -4786,7 +4786,7 @@
               <a:t>–   </a:t>
             </a:r>
             <a:r>
-              <a:rPr sz="1500" b="1" i="0">
+              <a:rPr sz="1700" b="1" i="0">
                 <a:solidFill>
                   <a:srgbClr val="333333"/>
                 </a:solidFill>
@@ -4795,7 +4795,7 @@
               <a:t>Exito:</a:t>
             </a:r>
             <a:r>
-              <a:rPr sz="1500" b="0" i="0">
+              <a:rPr sz="1700" b="0" i="0">
                 <a:solidFill>
                   <a:srgbClr val="333333"/>
                 </a:solidFill>
@@ -4804,7 +4804,7 @@
               <a:t> Los «EXPLAIN» repetidos mostrando «Index Scan» o «Bitmap Index Scan», y dicho </a:t>
             </a:r>
             <a:r>
-              <a:rPr sz="1500" b="1" i="0">
+              <a:rPr sz="1700" b="1" i="0">
                 <a:solidFill>
                   <a:srgbClr val="333333"/>
                 </a:solidFill>
@@ -4813,7 +4813,7 @@
               <a:t>cuál</a:t>
             </a:r>
             <a:r>
-              <a:rPr sz="1500" b="0" i="0">
+              <a:rPr sz="1700" b="0" i="0">
                 <a:solidFill>
                   <a:srgbClr val="333333"/>
                 </a:solidFill>
@@ -4829,7 +4829,7 @@
               </a:spcAft>
             </a:pPr>
             <a:r>
-              <a:rPr sz="1500" b="0" i="0">
+              <a:rPr sz="1700" b="0" i="0">
                 <a:solidFill>
                   <a:srgbClr val="333333"/>
                 </a:solidFill>
@@ -4838,7 +4838,7 @@
               <a:t>–   </a:t>
             </a:r>
             <a:r>
-              <a:rPr sz="1500" b="1" i="0">
+              <a:rPr sz="1700" b="1" i="0">
                 <a:solidFill>
                   <a:srgbClr val="333333"/>
                 </a:solidFill>
@@ -4847,7 +4847,7 @@
               <a:t>Exito:</a:t>
             </a:r>
             <a:r>
-              <a:rPr sz="1500" b="0" i="0">
+              <a:rPr sz="1700" b="0" i="0">
                 <a:solidFill>
                   <a:srgbClr val="333333"/>
                 </a:solidFill>
@@ -4856,7 +4856,7 @@
               <a:t> El experimento del orden de columnas: los dos índices compuestos, las </a:t>
             </a:r>
             <a:r>
-              <a:rPr sz="1500" b="1" i="0">
+              <a:rPr sz="1700" b="1" i="0">
                 <a:solidFill>
                   <a:srgbClr val="333333"/>
                 </a:solidFill>
@@ -4865,7 +4865,7 @@
               <a:t>tres</a:t>
             </a:r>
             <a:r>
-              <a:rPr sz="1500" b="0" i="0">
+              <a:rPr sz="1700" b="0" i="0">
                 <a:solidFill>
                   <a:srgbClr val="333333"/>
                 </a:solidFill>
@@ -4881,7 +4881,7 @@
               </a:spcAft>
             </a:pPr>
             <a:r>
-              <a:rPr sz="1500" b="0" i="0">
+              <a:rPr sz="1700" b="0" i="0">
                 <a:solidFill>
                   <a:srgbClr val="333333"/>
                 </a:solidFill>
@@ -4890,7 +4890,7 @@
               <a:t>–   </a:t>
             </a:r>
             <a:r>
-              <a:rPr sz="1500" b="1" i="0">
+              <a:rPr sz="1700" b="1" i="0">
                 <a:solidFill>
                   <a:srgbClr val="333333"/>
                 </a:solidFill>
@@ -4899,7 +4899,7 @@
               <a:t>Exito:</a:t>
             </a:r>
             <a:r>
-              <a:rPr sz="1500" b="0" i="0">
+              <a:rPr sz="1700" b="0" i="0">
                 <a:solidFill>
                   <a:srgbClr val="333333"/>
                 </a:solidFill>
@@ -4908,7 +4908,7 @@
               <a:t> «cita_hist» particionada por año: PK que </a:t>
             </a:r>
             <a:r>
-              <a:rPr sz="1500" b="1" i="0">
+              <a:rPr sz="1700" b="1" i="0">
                 <a:solidFill>
                   <a:srgbClr val="333333"/>
                 </a:solidFill>
@@ -4917,7 +4917,7 @@
               <a:t>incluye la columna de partición</a:t>
             </a:r>
             <a:r>
-              <a:rPr sz="1500" b="0" i="0">
+              <a:rPr sz="1700" b="0" i="0">
                 <a:solidFill>
                   <a:srgbClr val="333333"/>
                 </a:solidFill>
@@ -4926,7 +4926,7 @@
               <a:t>, las dos particiones sin solaparse, la migración completa y la </a:t>
             </a:r>
             <a:r>
-              <a:rPr sz="1500" b="1" i="0">
+              <a:rPr sz="1700" b="1" i="0">
                 <a:solidFill>
                   <a:srgbClr val="333333"/>
                 </a:solidFill>
@@ -4935,7 +4935,7 @@
               <a:t>poda</a:t>
             </a:r>
             <a:r>
-              <a:rPr sz="1500" b="0" i="0">
+              <a:rPr sz="1700" b="0" i="0">
                 <a:solidFill>
                   <a:srgbClr val="333333"/>
                 </a:solidFill>
@@ -4951,7 +4951,7 @@
               </a:spcAft>
             </a:pPr>
             <a:r>
-              <a:rPr sz="1500" b="0" i="0">
+              <a:rPr sz="1700" b="0" i="0">
                 <a:solidFill>
                   <a:srgbClr val="333333"/>
                 </a:solidFill>
@@ -4960,7 +4960,7 @@
               <a:t>–   </a:t>
             </a:r>
             <a:r>
-              <a:rPr sz="1500" b="1" i="0">
+              <a:rPr sz="1700" b="1" i="0">
                 <a:solidFill>
                   <a:srgbClr val="333333"/>
                 </a:solidFill>
@@ -4969,7 +4969,7 @@
               <a:t>Exito:</a:t>
             </a:r>
             <a:r>
-              <a:rPr sz="1500" b="0" i="0">
+              <a:rPr sz="1700" b="0" i="0">
                 <a:solidFill>
                   <a:srgbClr val="333333"/>
                 </a:solidFill>
@@ -4978,7 +4978,7 @@
               <a:t> La tabla de justificación con sus </a:t>
             </a:r>
             <a:r>
-              <a:rPr sz="1500" b="1" i="0">
+              <a:rPr sz="1700" b="1" i="0">
                 <a:solidFill>
                   <a:srgbClr val="333333"/>
                 </a:solidFill>
@@ -4987,7 +4987,7 @@
               <a:t>7 columnas</a:t>
             </a:r>
             <a:r>
-              <a:rPr sz="1500" b="0" i="0">
+              <a:rPr sz="1700" b="0" i="0">
                 <a:solidFill>
                   <a:srgbClr val="333333"/>
                 </a:solidFill>
@@ -4996,7 +4996,7 @@
               <a:t> y una fila por índice (mínimo 3), la regla de sobre-indexación y el veredicto de particionamiento con </a:t>
             </a:r>
             <a:r>
-              <a:rPr sz="1500" b="1" i="0">
+              <a:rPr sz="1700" b="1" i="0">
                 <a:solidFill>
                   <a:srgbClr val="333333"/>
                 </a:solidFill>
@@ -5005,7 +5005,7 @@
               <a:t>tus números</a:t>
             </a:r>
             <a:r>
-              <a:rPr sz="1500" b="0" i="0">
+              <a:rPr sz="1700" b="0" i="0">
                 <a:solidFill>
                   <a:srgbClr val="333333"/>
                 </a:solidFill>
@@ -5021,7 +5021,7 @@
               </a:spcAft>
             </a:pPr>
             <a:r>
-              <a:rPr sz="1500" b="0" i="0">
+              <a:rPr sz="1700" b="0" i="0">
                 <a:solidFill>
                   <a:srgbClr val="333333"/>
                 </a:solidFill>
@@ -5030,7 +5030,7 @@
               <a:t>–   </a:t>
             </a:r>
             <a:r>
-              <a:rPr sz="1500" b="1" i="0">
+              <a:rPr sz="1700" b="1" i="0">
                 <a:solidFill>
                   <a:srgbClr val="333333"/>
                 </a:solidFill>
@@ -5039,7 +5039,7 @@
               <a:t>Exito:</a:t>
             </a:r>
             <a:r>
-              <a:rPr sz="1500" b="0" i="0">
+              <a:rPr sz="1700" b="0" i="0">
                 <a:solidFill>
                   <a:srgbClr val="333333"/>
                 </a:solidFill>
@@ -5259,7 +5259,7 @@
               </a:spcAft>
             </a:pPr>
             <a:r>
-              <a:rPr sz="1600" b="0" i="0">
+              <a:rPr sz="2000" b="0" i="0">
                 <a:solidFill>
                   <a:srgbClr val="333333"/>
                 </a:solidFill>
@@ -5268,7 +5268,7 @@
               <a:t>–   Las preguntas 1 y 2 corren sobre una base </a:t>
             </a:r>
             <a:r>
-              <a:rPr sz="1600" b="1" i="0">
+              <a:rPr sz="2000" b="1" i="0">
                 <a:solidFill>
                   <a:srgbClr val="333333"/>
                 </a:solidFill>
@@ -5277,7 +5277,7 @@
               <a:t>con volumen</a:t>
             </a:r>
             <a:r>
-              <a:rPr sz="1600" b="0" i="0">
+              <a:rPr sz="2000" b="0" i="0">
                 <a:solidFill>
                   <a:srgbClr val="333333"/>
                 </a:solidFill>
@@ -5286,7 +5286,7 @@
               <a:t>: 2.006 duenos, 5.008 mascotas, 16 veterinarios y </a:t>
             </a:r>
             <a:r>
-              <a:rPr sz="1600" b="1" i="0">
+              <a:rPr sz="2000" b="1" i="0">
                 <a:solidFill>
                   <a:srgbClr val="333333"/>
                 </a:solidFill>
@@ -5295,7 +5295,7 @@
               <a:t>30.010 citas</a:t>
             </a:r>
             <a:r>
-              <a:rPr sz="1600" b="0" i="0">
+              <a:rPr sz="2000" b="0" i="0">
                 <a:solidFill>
                   <a:srgbClr val="333333"/>
                 </a:solidFill>
@@ -5304,7 +5304,7 @@
               <a:t> entre el 2026-01-05 y el 2026-07-23. «ANALYZE» ya está corrido y </a:t>
             </a:r>
             <a:r>
-              <a:rPr sz="1600" b="1" i="0">
+              <a:rPr sz="2000" b="1" i="0">
                 <a:solidFill>
                   <a:srgbClr val="333333"/>
                 </a:solidFill>
@@ -5313,7 +5313,7 @@
               <a:t>no hay ningún índice</a:t>
             </a:r>
             <a:r>
-              <a:rPr sz="1600" b="0" i="0">
+              <a:rPr sz="2000" b="0" i="0">
                 <a:solidFill>
                   <a:srgbClr val="333333"/>
                 </a:solidFill>
@@ -5329,7 +5329,7 @@
               </a:spcAft>
             </a:pPr>
             <a:r>
-              <a:rPr sz="1600" b="0" i="0">
+              <a:rPr sz="2000" b="0" i="0">
                 <a:solidFill>
                   <a:srgbClr val="333333"/>
                 </a:solidFill>
@@ -5338,7 +5338,7 @@
               <a:t>–   Las dos consultas frecuentes vienen </a:t>
             </a:r>
             <a:r>
-              <a:rPr sz="1600" b="1" i="0">
+              <a:rPr sz="2000" b="1" i="0">
                 <a:solidFill>
                   <a:srgbClr val="333333"/>
                 </a:solidFill>
@@ -5347,7 +5347,7 @@
               <a:t>escritas en el enunciado</a:t>
             </a:r>
             <a:r>
-              <a:rPr sz="1600" b="0" i="0">
+              <a:rPr sz="2000" b="0" i="0">
                 <a:solidFill>
                   <a:srgbClr val="333333"/>
                 </a:solidFill>
@@ -5363,7 +5363,7 @@
               </a:spcAft>
             </a:pPr>
             <a:r>
-              <a:rPr sz="1600" b="0" i="0">
+              <a:rPr sz="2000" b="0" i="0">
                 <a:solidFill>
                   <a:srgbClr val="333333"/>
                 </a:solidFill>
@@ -5372,7 +5372,7 @@
               <a:t>–   La pregunta 3 usa </a:t>
             </a:r>
             <a:r>
-              <a:rPr sz="1600" b="1" i="0">
+              <a:rPr sz="2000" b="1" i="0">
                 <a:solidFill>
                   <a:srgbClr val="333333"/>
                 </a:solidFill>
@@ -5381,7 +5381,7 @@
               <a:t>otra</a:t>
             </a:r>
             <a:r>
-              <a:rPr sz="1600" b="0" i="0">
+              <a:rPr sz="2000" b="0" i="0">
                 <a:solidFill>
                   <a:srgbClr val="333333"/>
                 </a:solidFill>
@@ -5390,7 +5390,7 @@
               <a:t> base, a propósito: </a:t>
             </a:r>
             <a:r>
-              <a:rPr sz="1600" b="1" i="0">
+              <a:rPr sz="2000" b="1" i="0">
                 <a:solidFill>
                   <a:srgbClr val="333333"/>
                 </a:solidFill>
@@ -5399,7 +5399,7 @@
               <a:t>5.010 citas</a:t>
             </a:r>
             <a:r>
-              <a:rPr sz="1600" b="0" i="0">
+              <a:rPr sz="2000" b="0" i="0">
                 <a:solidFill>
                   <a:srgbClr val="333333"/>
                 </a:solidFill>
@@ -5408,7 +5408,7 @@
               <a:t> repartidas entre enero de 2025 y diciembre de 2026, para que haya dos años que particionar. Si ves 5.010 donde esperabas 30.010, </a:t>
             </a:r>
             <a:r>
-              <a:rPr sz="1600" b="1" i="0">
+              <a:rPr sz="2000" b="1" i="0">
                 <a:solidFill>
                   <a:srgbClr val="333333"/>
                 </a:solidFill>
@@ -5417,7 +5417,7 @@
               <a:t>no es un error</a:t>
             </a:r>
             <a:r>
-              <a:rPr sz="1600" b="0" i="0">
+              <a:rPr sz="2000" b="0" i="0">
                 <a:solidFill>
                   <a:srgbClr val="333333"/>
                 </a:solidFill>
@@ -5433,7 +5433,7 @@
               </a:spcAft>
             </a:pPr>
             <a:r>
-              <a:rPr sz="1600" b="0" i="0">
+              <a:rPr sz="2000" b="0" i="0">
                 <a:solidFill>
                   <a:srgbClr val="333333"/>
                 </a:solidFill>
@@ -5442,7 +5442,7 @@
               <a:t>–   </a:t>
             </a:r>
             <a:r>
-              <a:rPr sz="1600" b="1" i="0">
+              <a:rPr sz="2000" b="1" i="0">
                 <a:solidFill>
                   <a:srgbClr val="333333"/>
                 </a:solidFill>
@@ -5451,7 +5451,7 @@
               <a:t>Motor:</a:t>
             </a:r>
             <a:r>
-              <a:rPr sz="1600" b="0" i="0">
+              <a:rPr sz="2000" b="0" i="0">
                 <a:solidFill>
                   <a:srgbClr val="333333"/>
                 </a:solidFill>
@@ -5467,7 +5467,7 @@
               </a:spcAft>
             </a:pPr>
             <a:r>
-              <a:rPr sz="1600" b="0" i="0">
+              <a:rPr sz="2000" b="0" i="0">
                 <a:solidFill>
                   <a:srgbClr val="333333"/>
                 </a:solidFill>
@@ -5476,7 +5476,7 @@
               <a:t>–   Los nombres del curso son </a:t>
             </a:r>
             <a:r>
-              <a:rPr sz="1600" b="1" i="0">
+              <a:rPr sz="2000" b="1" i="0">
                 <a:solidFill>
                   <a:srgbClr val="333333"/>
                 </a:solidFill>
@@ -5485,7 +5485,7 @@
               <a:t>minúsculas y sin eñes</a:t>
             </a:r>
             <a:r>
-              <a:rPr sz="1600" b="0" i="0">
+              <a:rPr sz="2000" b="0" i="0">
                 <a:solidFill>
                   <a:srgbClr val="333333"/>
                 </a:solidFill>
@@ -8270,7 +8270,7 @@
               </a:spcAft>
             </a:pPr>
             <a:r>
-              <a:rPr sz="1600" b="0" i="0">
+              <a:rPr sz="2000" b="0" i="0">
                 <a:solidFill>
                   <a:srgbClr val="333333"/>
                 </a:solidFill>
@@ -8279,7 +8279,7 @@
               <a:t>–   </a:t>
             </a:r>
             <a:r>
-              <a:rPr sz="1600" b="1" i="0">
+              <a:rPr sz="2000" b="1" i="0">
                 <a:solidFill>
                   <a:srgbClr val="333333"/>
                 </a:solidFill>
@@ -8288,7 +8288,7 @@
               <a:t>Entregable:</a:t>
             </a:r>
             <a:r>
-              <a:rPr sz="1600" b="0" i="0">
+              <a:rPr sz="2000" b="0" i="0">
                 <a:solidFill>
                   <a:srgbClr val="333333"/>
                 </a:solidFill>
@@ -8304,7 +8304,7 @@
               </a:spcAft>
             </a:pPr>
             <a:r>
-              <a:rPr sz="1600" b="0" i="0">
+              <a:rPr sz="2000" b="0" i="0">
                 <a:solidFill>
                   <a:srgbClr val="333333"/>
                 </a:solidFill>
@@ -8320,7 +8320,7 @@
               </a:spcAft>
             </a:pPr>
             <a:r>
-              <a:rPr sz="1600" b="0" i="0">
+              <a:rPr sz="2000" b="0" i="0">
                 <a:solidFill>
                   <a:srgbClr val="333333"/>
                 </a:solidFill>
@@ -8336,7 +8336,7 @@
               </a:spcAft>
             </a:pPr>
             <a:r>
-              <a:rPr sz="1600" b="0" i="0">
+              <a:rPr sz="2000" b="0" i="0">
                 <a:solidFill>
                   <a:srgbClr val="333333"/>
                 </a:solidFill>
@@ -8352,7 +8352,7 @@
               </a:spcAft>
             </a:pPr>
             <a:r>
-              <a:rPr sz="1600" b="0" i="0">
+              <a:rPr sz="2000" b="0" i="0">
                 <a:solidFill>
                   <a:srgbClr val="333333"/>
                 </a:solidFill>
@@ -8361,7 +8361,7 @@
               <a:t>–   </a:t>
             </a:r>
             <a:r>
-              <a:rPr sz="1600" b="1" i="0">
+              <a:rPr sz="2000" b="1" i="0">
                 <a:solidFill>
                   <a:srgbClr val="333333"/>
                 </a:solidFill>
@@ -8370,7 +8370,7 @@
               <a:t>Entrega en ExamLab</a:t>
             </a:r>
             <a:r>
-              <a:rPr sz="1600" b="0" i="0">
+              <a:rPr sz="2000" b="0" i="0">
                 <a:solidFill>
                   <a:srgbClr val="333333"/>
                 </a:solidFill>
@@ -9417,7 +9417,7 @@
               </a:spcAft>
             </a:pPr>
             <a:r>
-              <a:rPr sz="1600" b="0" i="0">
+              <a:rPr sz="2000" b="0" i="0">
                 <a:solidFill>
                   <a:srgbClr val="333333"/>
                 </a:solidFill>
@@ -9426,7 +9426,7 @@
               <a:t>–   </a:t>
             </a:r>
             <a:r>
-              <a:rPr sz="1600" b="1" i="0">
+              <a:rPr sz="2000" b="1" i="0">
                 <a:solidFill>
                   <a:srgbClr val="333333"/>
                 </a:solidFill>
@@ -9435,7 +9435,7 @@
               <a:t>Hoy avanzamos el PI en:</a:t>
             </a:r>
             <a:r>
-              <a:rPr sz="1600" b="0" i="0">
+              <a:rPr sz="2000" b="0" i="0">
                 <a:solidFill>
                   <a:srgbClr val="333333"/>
                 </a:solidFill>
@@ -9451,7 +9451,7 @@
               </a:spcAft>
             </a:pPr>
             <a:r>
-              <a:rPr sz="1600" b="0" i="0">
+              <a:rPr sz="2000" b="0" i="0">
                 <a:solidFill>
                   <a:srgbClr val="333333"/>
                 </a:solidFill>
@@ -9460,7 +9460,7 @@
               <a:t>–   Herramienta: </a:t>
             </a:r>
             <a:r>
-              <a:rPr sz="1600" b="1" i="0">
+              <a:rPr sz="2000" b="1" i="0">
                 <a:solidFill>
                   <a:srgbClr val="333333"/>
                 </a:solidFill>
@@ -9469,7 +9469,7 @@
               <a:t>ExamLab (PostgreSQL/PGlite)</a:t>
             </a:r>
             <a:r>
-              <a:rPr sz="1600" b="0" i="0">
+              <a:rPr sz="2000" b="0" i="0">
                 <a:solidFill>
                   <a:srgbClr val="333333"/>
                 </a:solidFill>
@@ -9478,7 +9478,7 @@
               <a:t> · Bloque </a:t>
             </a:r>
             <a:r>
-              <a:rPr sz="1600" b="1" i="0">
+              <a:rPr sz="2000" b="1" i="0">
                 <a:solidFill>
                   <a:srgbClr val="333333"/>
                 </a:solidFill>
@@ -9487,7 +9487,7 @@
               <a:t>120 min</a:t>
             </a:r>
             <a:r>
-              <a:rPr sz="1600" b="0" i="0">
+              <a:rPr sz="2000" b="0" i="0">
                 <a:solidFill>
                   <a:srgbClr val="333333"/>
                 </a:solidFill>
@@ -9503,7 +9503,7 @@
               </a:spcAft>
             </a:pPr>
             <a:r>
-              <a:rPr sz="1600" b="0" i="0">
+              <a:rPr sz="2000" b="0" i="0">
                 <a:solidFill>
                   <a:srgbClr val="333333"/>
                 </a:solidFill>
@@ -9512,7 +9512,7 @@
               <a:t>–   </a:t>
             </a:r>
             <a:r>
-              <a:rPr sz="1600" b="1" i="0">
+              <a:rPr sz="2000" b="1" i="0">
                 <a:solidFill>
                   <a:srgbClr val="333333"/>
                 </a:solidFill>
@@ -9521,7 +9521,7 @@
               <a:t>Entregable de hoy:</a:t>
             </a:r>
             <a:r>
-              <a:rPr sz="1600" b="0" i="0">
+              <a:rPr sz="2000" b="0" i="0">
                 <a:solidFill>
                   <a:srgbClr val="333333"/>
                 </a:solidFill>
@@ -9537,7 +9537,7 @@
               </a:spcAft>
             </a:pPr>
             <a:r>
-              <a:rPr sz="1600" b="0" i="0">
+              <a:rPr sz="2000" b="0" i="0">
                 <a:solidFill>
                   <a:srgbClr val="333333"/>
                 </a:solidFill>
@@ -9553,7 +9553,7 @@
               </a:spcAft>
             </a:pPr>
             <a:r>
-              <a:rPr sz="1600" b="0" i="0">
+              <a:rPr sz="2000" b="0" i="0">
                 <a:solidFill>
                   <a:srgbClr val="333333"/>
                 </a:solidFill>
@@ -9569,7 +9569,7 @@
               </a:spcAft>
             </a:pPr>
             <a:r>
-              <a:rPr sz="1600" b="0" i="0">
+              <a:rPr sz="2000" b="0" i="0">
                 <a:solidFill>
                   <a:srgbClr val="333333"/>
                 </a:solidFill>
@@ -9893,7 +9893,7 @@
         <p:spPr>
           <a:xfrm>
             <a:off x="502920" y="2587752"/>
-            <a:ext cx="2164019" cy="2560320"/>
+            <a:ext cx="2164019" cy="3310128"/>
           </a:xfrm>
           <a:prstGeom prst="rect">
             <a:avLst/>
@@ -10008,7 +10008,7 @@
         <p:spPr>
           <a:xfrm>
             <a:off x="2758379" y="2587752"/>
-            <a:ext cx="2164019" cy="2560320"/>
+            <a:ext cx="2164019" cy="3310128"/>
           </a:xfrm>
           <a:prstGeom prst="rect">
             <a:avLst/>
@@ -10123,7 +10123,7 @@
         <p:spPr>
           <a:xfrm>
             <a:off x="5013838" y="2587752"/>
-            <a:ext cx="2164019" cy="2560320"/>
+            <a:ext cx="2164019" cy="3310128"/>
           </a:xfrm>
           <a:prstGeom prst="rect">
             <a:avLst/>
@@ -10238,7 +10238,7 @@
         <p:spPr>
           <a:xfrm>
             <a:off x="7269297" y="2587752"/>
-            <a:ext cx="2164019" cy="2560320"/>
+            <a:ext cx="2164019" cy="3310128"/>
           </a:xfrm>
           <a:prstGeom prst="rect">
             <a:avLst/>
@@ -10353,7 +10353,7 @@
         <p:spPr>
           <a:xfrm>
             <a:off x="9524756" y="2587752"/>
-            <a:ext cx="2164019" cy="2560320"/>
+            <a:ext cx="2164019" cy="3310128"/>
           </a:xfrm>
           <a:prstGeom prst="rect">
             <a:avLst/>
@@ -10387,8 +10387,8 @@
         </p:nvSpPr>
         <p:spPr>
           <a:xfrm>
-            <a:off x="457200" y="5943600"/>
-            <a:ext cx="11277295" cy="365760"/>
+            <a:off x="457200" y="5806440"/>
+            <a:ext cx="11277295" cy="640080"/>
           </a:xfrm>
           <a:prstGeom prst="rect">
             <a:avLst/>
@@ -10641,7 +10641,7 @@
               </a:spcAft>
             </a:pPr>
             <a:r>
-              <a:rPr sz="1500" b="0" i="0">
+              <a:rPr sz="2000" b="0" i="0">
                 <a:solidFill>
                   <a:srgbClr val="333333"/>
                 </a:solidFill>
@@ -10657,7 +10657,7 @@
               </a:spcAft>
             </a:pPr>
             <a:r>
-              <a:rPr sz="1500" b="0" i="0">
+              <a:rPr sz="2000" b="0" i="0">
                 <a:solidFill>
                   <a:srgbClr val="333333"/>
                 </a:solidFill>
@@ -10673,7 +10673,7 @@
               </a:spcAft>
             </a:pPr>
             <a:r>
-              <a:rPr sz="1500" b="0" i="0">
+              <a:rPr sz="2000" b="0" i="0">
                 <a:solidFill>
                   <a:srgbClr val="333333"/>
                 </a:solidFill>
@@ -10689,7 +10689,7 @@
               </a:spcAft>
             </a:pPr>
             <a:r>
-              <a:rPr sz="1500" b="0" i="0">
+              <a:rPr sz="2000" b="0" i="0">
                 <a:solidFill>
                   <a:srgbClr val="333333"/>
                 </a:solidFill>
@@ -10705,7 +10705,7 @@
               </a:spcAft>
             </a:pPr>
             <a:r>
-              <a:rPr sz="1500" b="0" i="0">
+              <a:rPr sz="2000" b="0" i="0">
                 <a:solidFill>
                   <a:srgbClr val="333333"/>
                 </a:solidFill>
@@ -11478,7 +11478,7 @@
               </a:spcAft>
             </a:pPr>
             <a:r>
-              <a:rPr sz="1300" b="0" i="0">
+              <a:rPr sz="1800" b="0" i="0">
                 <a:solidFill>
                   <a:srgbClr val="333333"/>
                 </a:solidFill>
@@ -11487,7 +11487,7 @@
               <a:t>–   </a:t>
             </a:r>
             <a:r>
-              <a:rPr sz="1300" b="1" i="0">
+              <a:rPr sz="1800" b="1" i="0">
                 <a:solidFill>
                   <a:srgbClr val="333333"/>
                 </a:solidFill>
@@ -11496,7 +11496,7 @@
               <a:t>El nombre se califica.</a:t>
             </a:r>
             <a:r>
-              <a:rPr sz="1300" b="0" i="0">
+              <a:rPr sz="1800" b="0" i="0">
                 <a:solidFill>
                   <a:srgbClr val="333333"/>
                 </a:solidFill>
@@ -11505,7 +11505,7 @@
               <a:t> La actividad dice «nombres exactos» y los compara letra por letra: «idx_cita_fecha_hora», «idx_mascota_dueno», «idx_cita_programada_fecha» en la pregunta 1, y «idx_cita_estado_fecha» + «idx_cita_fecha_estado» en la 2. </a:t>
             </a:r>
             <a:r>
-              <a:rPr sz="1300" b="1" i="0">
+              <a:rPr sz="1800" b="1" i="0">
                 <a:solidFill>
                   <a:srgbClr val="333333"/>
                 </a:solidFill>
@@ -11514,7 +11514,7 @@
               <a:t>«idx_cita_fecha» no es ninguno de los cinco</a:t>
             </a:r>
             <a:r>
-              <a:rPr sz="1300" b="0" i="0">
+              <a:rPr sz="1800" b="0" i="0">
                 <a:solidFill>
                   <a:srgbClr val="333333"/>
                 </a:solidFill>
@@ -11530,7 +11530,7 @@
               </a:spcAft>
             </a:pPr>
             <a:r>
-              <a:rPr sz="1300" b="0" i="0">
+              <a:rPr sz="1800" b="0" i="0">
                 <a:solidFill>
                   <a:srgbClr val="333333"/>
                 </a:solidFill>
@@ -11539,7 +11539,7 @@
               <a:t>–   </a:t>
             </a:r>
             <a:r>
-              <a:rPr sz="1300" b="1" i="0">
+              <a:rPr sz="1800" b="1" i="0">
                 <a:solidFill>
                   <a:srgbClr val="333333"/>
                 </a:solidFill>
@@ -11548,7 +11548,7 @@
               <a:t>Simple o compuesto.</a:t>
             </a:r>
             <a:r>
-              <a:rPr sz="1300" b="0" i="0">
+              <a:rPr sz="1800" b="0" i="0">
                 <a:solidFill>
                   <a:srgbClr val="333333"/>
                 </a:solidFill>
@@ -11557,7 +11557,7 @@
               <a:t> Los tres primeros son de una columna; los dos ultimos llevan las mismas dos columnas </a:t>
             </a:r>
             <a:r>
-              <a:rPr sz="1300" b="1" i="0">
+              <a:rPr sz="1800" b="1" i="0">
                 <a:solidFill>
                   <a:srgbClr val="333333"/>
                 </a:solidFill>
@@ -11566,7 +11566,7 @@
               <a:t>en orden inverso</a:t>
             </a:r>
             <a:r>
-              <a:rPr sz="1300" b="0" i="0">
+              <a:rPr sz="1800" b="0" i="0">
                 <a:solidFill>
                   <a:srgbClr val="333333"/>
                 </a:solidFill>
@@ -11582,7 +11582,7 @@
               </a:spcAft>
             </a:pPr>
             <a:r>
-              <a:rPr sz="1300" b="0" i="0">
+              <a:rPr sz="1800" b="0" i="0">
                 <a:solidFill>
                   <a:srgbClr val="333333"/>
                 </a:solidFill>
@@ -11591,7 +11591,7 @@
               <a:t>–   </a:t>
             </a:r>
             <a:r>
-              <a:rPr sz="1300" b="1" i="0">
+              <a:rPr sz="1800" b="1" i="0">
                 <a:solidFill>
                   <a:srgbClr val="333333"/>
                 </a:solidFill>
@@ -11600,7 +11600,7 @@
               <a:t>La secuencia que hay que respetar.</a:t>
             </a:r>
             <a:r>
-              <a:rPr sz="1300" b="0" i="0">
+              <a:rPr sz="1800" b="0" i="0">
                 <a:solidFill>
                   <a:srgbClr val="333333"/>
                 </a:solidFill>
@@ -11609,7 +11609,7 @@
               <a:t> «EXPLAIN ANALYZE» </a:t>
             </a:r>
             <a:r>
-              <a:rPr sz="1300" b="1" i="0">
+              <a:rPr sz="1800" b="1" i="0">
                 <a:solidFill>
                   <a:srgbClr val="333333"/>
                 </a:solidFill>
@@ -11618,7 +11618,7 @@
               <a:t>antes</a:t>
             </a:r>
             <a:r>
-              <a:rPr sz="1300" b="0" i="0">
+              <a:rPr sz="1800" b="0" i="0">
                 <a:solidFill>
                   <a:srgbClr val="333333"/>
                 </a:solidFill>
@@ -11627,7 +11627,7 @@
               <a:t> (tiene que salir «Seq Scan») -&gt; «CREATE INDEX» -&gt; </a:t>
             </a:r>
             <a:r>
-              <a:rPr sz="1300" b="1" i="0">
+              <a:rPr sz="1800" b="1" i="0">
                 <a:solidFill>
                   <a:srgbClr val="333333"/>
                 </a:solidFill>
@@ -11636,7 +11636,7 @@
               <a:t>«ANALYZE cita;»</a:t>
             </a:r>
             <a:r>
-              <a:rPr sz="1300" b="0" i="0">
+              <a:rPr sz="1800" b="0" i="0">
                 <a:solidFill>
                   <a:srgbClr val="333333"/>
                 </a:solidFill>
@@ -11652,7 +11652,7 @@
               </a:spcAft>
             </a:pPr>
             <a:r>
-              <a:rPr sz="1300" b="0" i="0">
+              <a:rPr sz="1800" b="0" i="0">
                 <a:solidFill>
                   <a:srgbClr val="333333"/>
                 </a:solidFill>
@@ -11661,7 +11661,7 @@
               <a:t>–   </a:t>
             </a:r>
             <a:r>
-              <a:rPr sz="1300" b="1" i="0">
+              <a:rPr sz="1800" b="1" i="0">
                 <a:solidFill>
                   <a:srgbClr val="333333"/>
                 </a:solidFill>
@@ -11670,7 +11670,7 @@
               <a:t>La evidencia de que existen.</a:t>
             </a:r>
             <a:r>
-              <a:rPr sz="1300" b="0" i="0">
+              <a:rPr sz="1800" b="0" i="0">
                 <a:solidFill>
                   <a:srgbClr val="333333"/>
                 </a:solidFill>
@@ -11686,7 +11686,7 @@
               </a:spcAft>
             </a:pPr>
             <a:r>
-              <a:rPr sz="1300" b="0" i="0">
+              <a:rPr sz="1800" b="0" i="0">
                 <a:solidFill>
                   <a:srgbClr val="333333"/>
                 </a:solidFill>
@@ -11695,7 +11695,7 @@
               <a:t>–   </a:t>
             </a:r>
             <a:r>
-              <a:rPr sz="1300" b="1" i="0">
+              <a:rPr sz="1800" b="1" i="0">
                 <a:solidFill>
                   <a:srgbClr val="333333"/>
                 </a:solidFill>
@@ -11704,7 +11704,7 @@
               <a:t>Y el experimento del orden.</a:t>
             </a:r>
             <a:r>
-              <a:rPr sz="1300" b="0" i="0">
+              <a:rPr sz="1800" b="0" i="0">
                 <a:solidFill>
                   <a:srgbClr val="333333"/>
                 </a:solidFill>
@@ -11713,7 +11713,7 @@
               <a:t> Con los dos compuestos creados se miden tres consultas: estado + rango de fecha, solo rango, solo estado. Despues se hace «DROP INDEX idx_cita_fecha_estado» y se vuelve a medir la del rango solo. </a:t>
             </a:r>
             <a:r>
-              <a:rPr sz="1300" b="1" i="0">
+              <a:rPr sz="1800" b="1" i="0">
                 <a:solidFill>
                   <a:srgbClr val="333333"/>
                 </a:solidFill>
@@ -11722,7 +11722,7 @@
               <a:t>La columna de igualdad va primero y la de rango al final</a:t>
             </a:r>
             <a:r>
-              <a:rPr sz="1300" b="0" i="0">
+              <a:rPr sz="1800" b="0" i="0">
                 <a:solidFill>
                   <a:srgbClr val="333333"/>
                 </a:solidFill>
@@ -11976,7 +11976,7 @@
               </a:spcAft>
             </a:pPr>
             <a:r>
-              <a:rPr sz="1300" b="0" i="0">
+              <a:rPr sz="1900" b="0" i="0">
                 <a:solidFill>
                   <a:srgbClr val="333333"/>
                 </a:solidFill>
@@ -11985,7 +11985,7 @@
               <a:t>–   </a:t>
             </a:r>
             <a:r>
-              <a:rPr sz="1300" b="1" i="0">
+              <a:rPr sz="1900" b="1" i="0">
                 <a:solidFill>
                   <a:srgbClr val="333333"/>
                 </a:solidFill>
@@ -11994,7 +11994,7 @@
               <a:t>Que es.</a:t>
             </a:r>
             <a:r>
-              <a:rPr sz="1300" b="0" i="0">
+              <a:rPr sz="1900" b="0" i="0">
                 <a:solidFill>
                   <a:srgbClr val="333333"/>
                 </a:solidFill>
@@ -12003,7 +12003,7 @@
               <a:t> Un indice que solo contiene las filas que cumplen una condicion: «CREATE INDEX idx_cita_programada_fecha ON cita (fecha_hora) WHERE estado = 'PROGRAMADA';». El «WHERE» no es el de la consulta: es </a:t>
             </a:r>
             <a:r>
-              <a:rPr sz="1300" b="1" i="0">
+              <a:rPr sz="1900" b="1" i="0">
                 <a:solidFill>
                   <a:srgbClr val="333333"/>
                 </a:solidFill>
@@ -12012,7 +12012,7 @@
               <a:t>parte de la definicion del indice</a:t>
             </a:r>
             <a:r>
-              <a:rPr sz="1300" b="0" i="0">
+              <a:rPr sz="1900" b="0" i="0">
                 <a:solidFill>
                   <a:srgbClr val="333333"/>
                 </a:solidFill>
@@ -12028,7 +12028,7 @@
               </a:spcAft>
             </a:pPr>
             <a:r>
-              <a:rPr sz="1300" b="0" i="0">
+              <a:rPr sz="1900" b="0" i="0">
                 <a:solidFill>
                   <a:srgbClr val="333333"/>
                 </a:solidFill>
@@ -12037,7 +12037,7 @@
               <a:t>–   </a:t>
             </a:r>
             <a:r>
-              <a:rPr sz="1300" b="1" i="0">
+              <a:rPr sz="1900" b="1" i="0">
                 <a:solidFill>
                   <a:srgbClr val="333333"/>
                 </a:solidFill>
@@ -12046,7 +12046,7 @@
               <a:t>Cuanto se ahorra, con los datos de hoy.</a:t>
             </a:r>
             <a:r>
-              <a:rPr sz="1300" b="0" i="0">
+              <a:rPr sz="1900" b="0" i="0">
                 <a:solidFill>
                   <a:srgbClr val="333333"/>
                 </a:solidFill>
@@ -12055,7 +12055,7 @@
               <a:t> De las 30.010 citas sembradas, </a:t>
             </a:r>
             <a:r>
-              <a:rPr sz="1300" b="1" i="0">
+              <a:rPr sz="1900" b="1" i="0">
                 <a:solidFill>
                   <a:srgbClr val="333333"/>
                 </a:solidFill>
@@ -12064,7 +12064,7 @@
               <a:t>18.187</a:t>
             </a:r>
             <a:r>
-              <a:rPr sz="1300" b="0" i="0">
+              <a:rPr sz="1900" b="0" i="0">
                 <a:solidFill>
                   <a:srgbClr val="333333"/>
                 </a:solidFill>
@@ -12073,7 +12073,7 @@
               <a:t> estan «PROGRAMADA» (el 61 %): el indice completo indexa 30.010 entradas y el parcial 18.187, cuatro de cada diez menos. Menos entradas es menos disco, menos cache ocupada y menos trabajo en cada escritura de una cita </a:t>
             </a:r>
             <a:r>
-              <a:rPr sz="1300" b="1" i="0">
+              <a:rPr sz="1900" b="1" i="0">
                 <a:solidFill>
                   <a:srgbClr val="333333"/>
                 </a:solidFill>
@@ -12082,7 +12082,7 @@
               <a:t>que no este programada</a:t>
             </a:r>
             <a:r>
-              <a:rPr sz="1300" b="0" i="0">
+              <a:rPr sz="1900" b="0" i="0">
                 <a:solidFill>
                   <a:srgbClr val="333333"/>
                 </a:solidFill>
@@ -12098,7 +12098,7 @@
               </a:spcAft>
             </a:pPr>
             <a:r>
-              <a:rPr sz="1300" b="0" i="0">
+              <a:rPr sz="1900" b="0" i="0">
                 <a:solidFill>
                   <a:srgbClr val="333333"/>
                 </a:solidFill>
@@ -12107,7 +12107,7 @@
               <a:t>–   </a:t>
             </a:r>
             <a:r>
-              <a:rPr sz="1300" b="1" i="0">
+              <a:rPr sz="1900" b="1" i="0">
                 <a:solidFill>
                   <a:srgbClr val="333333"/>
                 </a:solidFill>
@@ -12116,7 +12116,7 @@
               <a:t>La condicion para que sirva.</a:t>
             </a:r>
             <a:r>
-              <a:rPr sz="1300" b="0" i="0">
+              <a:rPr sz="1900" b="0" i="0">
                 <a:solidFill>
                   <a:srgbClr val="333333"/>
                 </a:solidFill>
@@ -12125,7 +12125,7 @@
               <a:t> El planeador solo lo usa si puede demostrar que la consulta </a:t>
             </a:r>
             <a:r>
-              <a:rPr sz="1300" b="1" i="0">
+              <a:rPr sz="1900" b="1" i="0">
                 <a:solidFill>
                   <a:srgbClr val="333333"/>
                 </a:solidFill>
@@ -12134,7 +12134,7 @@
               <a:t>trae la misma condicion</a:t>
             </a:r>
             <a:r>
-              <a:rPr sz="1300" b="0" i="0">
+              <a:rPr sz="1900" b="0" i="0">
                 <a:solidFill>
                   <a:srgbClr val="333333"/>
                 </a:solidFill>
@@ -12143,7 +12143,7 @@
               <a:t> del indice. «WHERE estado = 'PROGRAMADA' AND fecha_hora &gt;= ...» si lo aprovecha; la misma consulta sin el filtro de estado </a:t>
             </a:r>
             <a:r>
-              <a:rPr sz="1300" b="1" i="0">
+              <a:rPr sz="1900" b="1" i="0">
                 <a:solidFill>
                   <a:srgbClr val="333333"/>
                 </a:solidFill>
@@ -12152,7 +12152,7 @@
               <a:t>no</a:t>
             </a:r>
             <a:r>
-              <a:rPr sz="1300" b="0" i="0">
+              <a:rPr sz="1900" b="0" i="0">
                 <a:solidFill>
                   <a:srgbClr val="333333"/>
                 </a:solidFill>
@@ -12168,7 +12168,7 @@
               </a:spcAft>
             </a:pPr>
             <a:r>
-              <a:rPr sz="1300" b="0" i="0">
+              <a:rPr sz="1900" b="0" i="0">
                 <a:solidFill>
                   <a:srgbClr val="333333"/>
                 </a:solidFill>
@@ -12177,7 +12177,7 @@
               <a:t>–   </a:t>
             </a:r>
             <a:r>
-              <a:rPr sz="1300" b="1" i="0">
+              <a:rPr sz="1900" b="1" i="0">
                 <a:solidFill>
                   <a:srgbClr val="333333"/>
                 </a:solidFill>
@@ -12186,7 +12186,7 @@
               <a:t>El caso de VetCare que lo justifica.</a:t>
             </a:r>
             <a:r>
-              <a:rPr sz="1300" b="0" i="0">
+              <a:rPr sz="1900" b="0" i="0">
                 <a:solidFill>
                   <a:srgbClr val="333333"/>
                 </a:solidFill>
@@ -12195,7 +12195,7 @@
               <a:t> La agenda del dia de la recepcion </a:t>
             </a:r>
             <a:r>
-              <a:rPr sz="1300" b="1" i="0">
+              <a:rPr sz="1900" b="1" i="0">
                 <a:solidFill>
                   <a:srgbClr val="333333"/>
                 </a:solidFill>
@@ -12204,7 +12204,7 @@
               <a:t>siempre</a:t>
             </a:r>
             <a:r>
-              <a:rPr sz="1300" b="0" i="0">
+              <a:rPr sz="1900" b="0" i="0">
                 <a:solidFill>
                   <a:srgbClr val="333333"/>
                 </a:solidFill>
@@ -12220,7 +12220,7 @@
               </a:spcAft>
             </a:pPr>
             <a:r>
-              <a:rPr sz="1300" b="0" i="0">
+              <a:rPr sz="1900" b="0" i="0">
                 <a:solidFill>
                   <a:srgbClr val="333333"/>
                 </a:solidFill>
@@ -12229,7 +12229,7 @@
               <a:t>–   </a:t>
             </a:r>
             <a:r>
-              <a:rPr sz="1300" b="1" i="0">
+              <a:rPr sz="1900" b="1" i="0">
                 <a:solidFill>
                   <a:srgbClr val="333333"/>
                 </a:solidFill>
@@ -12238,7 +12238,7 @@
               <a:t>Cual de los dos elige.</a:t>
             </a:r>
             <a:r>
-              <a:rPr sz="1300" b="0" i="0">
+              <a:rPr sz="1900" b="0" i="0">
                 <a:solidFill>
                   <a:srgbClr val="333333"/>
                 </a:solidFill>
@@ -12247,7 +12247,7 @@
               <a:t> Con «idx_cita_fecha_hora» y «idx_cita_programada_fecha» compitiendo por la misma consulta, el plan nombra al ganador: hay que leer el «Index Scan using ...» y </a:t>
             </a:r>
             <a:r>
-              <a:rPr sz="1300" b="1" i="0">
+              <a:rPr sz="1900" b="1" i="0">
                 <a:solidFill>
                   <a:srgbClr val="333333"/>
                 </a:solidFill>
@@ -12256,7 +12256,7 @@
               <a:t>escribir cual salio</a:t>
             </a:r>
             <a:r>
-              <a:rPr sz="1300" b="0" i="0">
+              <a:rPr sz="1900" b="0" i="0">
                 <a:solidFill>
                   <a:srgbClr val="333333"/>
                 </a:solidFill>
@@ -12510,7 +12510,7 @@
               </a:spcAft>
             </a:pPr>
             <a:r>
-              <a:rPr sz="1300" b="0" i="0">
+              <a:rPr sz="1700" b="0" i="0">
                 <a:solidFill>
                   <a:srgbClr val="333333"/>
                 </a:solidFill>
@@ -12519,7 +12519,7 @@
               <a:t>–   </a:t>
             </a:r>
             <a:r>
-              <a:rPr sz="1300" b="1" i="0">
+              <a:rPr sz="1700" b="1" i="0">
                 <a:solidFill>
                   <a:srgbClr val="333333"/>
                 </a:solidFill>
@@ -12528,7 +12528,7 @@
               <a:t>El DDL, en tres sentencias.</a:t>
             </a:r>
             <a:r>
-              <a:rPr sz="1300" b="0" i="0">
+              <a:rPr sz="1700" b="0" i="0">
                 <a:solidFill>
                   <a:srgbClr val="333333"/>
                 </a:solidFill>
@@ -12537,7 +12537,7 @@
               <a:t> «CREATE TABLE cita_hist (... ) PARTITION BY RANGE (fecha_hora);» y despues una particion por ano: «CREATE TABLE cita_hist_2025 PARTITION OF cita_hist FOR VALUES FROM (TIMESTAMP '2025-01-01') TO (TIMESTAMP '2026-01-01');». El rango es </a:t>
             </a:r>
             <a:r>
-              <a:rPr sz="1300" b="1" i="0">
+              <a:rPr sz="1700" b="1" i="0">
                 <a:solidFill>
                   <a:srgbClr val="333333"/>
                 </a:solidFill>
@@ -12546,7 +12546,7 @@
               <a:t>cerrado por abajo y abierto por arriba</a:t>
             </a:r>
             <a:r>
-              <a:rPr sz="1300" b="0" i="0">
+              <a:rPr sz="1700" b="0" i="0">
                 <a:solidFill>
                   <a:srgbClr val="333333"/>
                 </a:solidFill>
@@ -12562,7 +12562,7 @@
               </a:spcAft>
             </a:pPr>
             <a:r>
-              <a:rPr sz="1300" b="0" i="0">
+              <a:rPr sz="1700" b="0" i="0">
                 <a:solidFill>
                   <a:srgbClr val="333333"/>
                 </a:solidFill>
@@ -12571,7 +12571,7 @@
               <a:t>–   </a:t>
             </a:r>
             <a:r>
-              <a:rPr sz="1300" b="1" i="0">
+              <a:rPr sz="1700" b="1" i="0">
                 <a:solidFill>
                   <a:srgbClr val="333333"/>
                 </a:solidFill>
@@ -12580,7 +12580,7 @@
               <a:t>La trampa que cuesta la pregunta.</a:t>
             </a:r>
             <a:r>
-              <a:rPr sz="1300" b="0" i="0">
+              <a:rPr sz="1700" b="0" i="0">
                 <a:solidFill>
                   <a:srgbClr val="333333"/>
                 </a:solidFill>
@@ -12589,7 +12589,7 @@
               <a:t> En una tabla particionada la clave primaria </a:t>
             </a:r>
             <a:r>
-              <a:rPr sz="1300" b="1" i="0">
+              <a:rPr sz="1700" b="1" i="0">
                 <a:solidFill>
                   <a:srgbClr val="333333"/>
                 </a:solidFill>
@@ -12598,7 +12598,7 @@
               <a:t>debe incluir la columna de particion</a:t>
             </a:r>
             <a:r>
-              <a:rPr sz="1300" b="0" i="0">
+              <a:rPr sz="1700" b="0" i="0">
                 <a:solidFill>
                   <a:srgbClr val="333333"/>
                 </a:solidFill>
@@ -12614,7 +12614,7 @@
               </a:spcAft>
             </a:pPr>
             <a:r>
-              <a:rPr sz="1300" b="0" i="0">
+              <a:rPr sz="1700" b="0" i="0">
                 <a:solidFill>
                   <a:srgbClr val="333333"/>
                 </a:solidFill>
@@ -12623,7 +12623,7 @@
               <a:t>–   </a:t>
             </a:r>
             <a:r>
-              <a:rPr sz="1300" b="1" i="0">
+              <a:rPr sz="1700" b="1" i="0">
                 <a:solidFill>
                   <a:srgbClr val="333333"/>
                 </a:solidFill>
@@ -12632,7 +12632,7 @@
               <a:t>La prueba de que el reparto ocurrio.</a:t>
             </a:r>
             <a:r>
-              <a:rPr sz="1300" b="0" i="0">
+              <a:rPr sz="1700" b="0" i="0">
                 <a:solidFill>
                   <a:srgbClr val="333333"/>
                 </a:solidFill>
@@ -12641,7 +12641,7 @@
               <a:t> «SELECT tableoid::regclass AS particion, COUNT(*), MIN(fecha_hora), MAX(fecha_hora) FROM cita_hist GROUP BY 1 ORDER BY 1;» — «tableoid» es la columna de sistema que dice </a:t>
             </a:r>
             <a:r>
-              <a:rPr sz="1300" b="1" i="0">
+              <a:rPr sz="1700" b="1" i="0">
                 <a:solidFill>
                   <a:srgbClr val="333333"/>
                 </a:solidFill>
@@ -12650,7 +12650,7 @@
               <a:t>en que tabla fisica vive cada fila</a:t>
             </a:r>
             <a:r>
-              <a:rPr sz="1300" b="0" i="0">
+              <a:rPr sz="1700" b="0" i="0">
                 <a:solidFill>
                   <a:srgbClr val="333333"/>
                 </a:solidFill>
@@ -12666,7 +12666,7 @@
               </a:spcAft>
             </a:pPr>
             <a:r>
-              <a:rPr sz="1300" b="0" i="0">
+              <a:rPr sz="1700" b="0" i="0">
                 <a:solidFill>
                   <a:srgbClr val="333333"/>
                 </a:solidFill>
@@ -12675,7 +12675,7 @@
               <a:t>–   </a:t>
             </a:r>
             <a:r>
-              <a:rPr sz="1300" b="1" i="0">
+              <a:rPr sz="1700" b="1" i="0">
                 <a:solidFill>
                   <a:srgbClr val="333333"/>
                 </a:solidFill>
@@ -12684,7 +12684,7 @@
               <a:t>La poda, que es lo unico que mejora hoy.</a:t>
             </a:r>
             <a:r>
-              <a:rPr sz="1300" b="0" i="0">
+              <a:rPr sz="1700" b="0" i="0">
                 <a:solidFill>
                   <a:srgbClr val="333333"/>
                 </a:solidFill>
@@ -12693,7 +12693,7 @@
               <a:t> En «EXPLAIN ANALYZE» de una consulta acotada a 2026 el plan tiene que mencionar </a:t>
             </a:r>
             <a:r>
-              <a:rPr sz="1300" b="1" i="0">
+              <a:rPr sz="1700" b="1" i="0">
                 <a:solidFill>
                   <a:srgbClr val="333333"/>
                 </a:solidFill>
@@ -12702,7 +12702,7 @@
               <a:t>solo «cita_hist_2026»</a:t>
             </a:r>
             <a:r>
-              <a:rPr sz="1300" b="0" i="0">
+              <a:rPr sz="1700" b="0" i="0">
                 <a:solidFill>
                   <a:srgbClr val="333333"/>
                 </a:solidFill>
@@ -12711,7 +12711,7 @@
               <a:t>. Con 5.010 filas el tiempo no baja de forma apreciable y hay que decirlo: lo que se demuestra es que el motor </a:t>
             </a:r>
             <a:r>
-              <a:rPr sz="1300" b="1" i="0">
+              <a:rPr sz="1700" b="1" i="0">
                 <a:solidFill>
                   <a:srgbClr val="333333"/>
                 </a:solidFill>
@@ -12720,7 +12720,7 @@
               <a:t>descarta particiones enteras</a:t>
             </a:r>
             <a:r>
-              <a:rPr sz="1300" b="0" i="0">
+              <a:rPr sz="1700" b="0" i="0">
                 <a:solidFill>
                   <a:srgbClr val="333333"/>
                 </a:solidFill>
@@ -12736,7 +12736,7 @@
               </a:spcAft>
             </a:pPr>
             <a:r>
-              <a:rPr sz="1300" b="0" i="0">
+              <a:rPr sz="1700" b="0" i="0">
                 <a:solidFill>
                   <a:srgbClr val="333333"/>
                 </a:solidFill>
@@ -12745,7 +12745,7 @@
               <a:t>–   </a:t>
             </a:r>
             <a:r>
-              <a:rPr sz="1300" b="1" i="0">
+              <a:rPr sz="1700" b="1" i="0">
                 <a:solidFill>
                   <a:srgbClr val="333333"/>
                 </a:solidFill>
@@ -12754,7 +12754,7 @@
               <a:t>Y el beneficio real, que es de mantenimiento.</a:t>
             </a:r>
             <a:r>
-              <a:rPr sz="1300" b="0" i="0">
+              <a:rPr sz="1700" b="0" i="0">
                 <a:solidFill>
                   <a:srgbClr val="333333"/>
                 </a:solidFill>
@@ -12763,7 +12763,7 @@
               <a:t> Archivar 2025 es «DROP TABLE cita_hist_2025», una operacion de </a:t>
             </a:r>
             <a:r>
-              <a:rPr sz="1300" b="1" i="0">
+              <a:rPr sz="1700" b="1" i="0">
                 <a:solidFill>
                   <a:srgbClr val="333333"/>
                 </a:solidFill>
@@ -12772,7 +12772,7 @@
               <a:t>metadatos</a:t>
             </a:r>
             <a:r>
-              <a:rPr sz="1300" b="0" i="0">
+              <a:rPr sz="1700" b="0" i="0">
                 <a:solidFill>
                   <a:srgbClr val="333333"/>
                 </a:solidFill>
@@ -12992,7 +12992,7 @@
               </a:spcAft>
             </a:pPr>
             <a:r>
-              <a:rPr sz="1600" b="0" i="0">
+              <a:rPr sz="2000" b="0" i="0">
                 <a:solidFill>
                   <a:srgbClr val="333333"/>
                 </a:solidFill>
@@ -13001,7 +13001,7 @@
               <a:t>–   </a:t>
             </a:r>
             <a:r>
-              <a:rPr sz="1600" b="1" i="0">
+              <a:rPr sz="2000" b="1" i="0">
                 <a:solidFill>
                   <a:srgbClr val="333333"/>
                 </a:solidFill>
@@ -13010,7 +13010,7 @@
               <a:t>Herramienta:</a:t>
             </a:r>
             <a:r>
-              <a:rPr sz="1600" b="0" i="0">
+              <a:rPr sz="2000" b="0" i="0">
                 <a:solidFill>
                   <a:srgbClr val="333333"/>
                 </a:solidFill>
@@ -13026,7 +13026,7 @@
               </a:spcAft>
             </a:pPr>
             <a:r>
-              <a:rPr sz="1600" b="0" i="0">
+              <a:rPr sz="2000" b="0" i="0">
                 <a:solidFill>
                   <a:srgbClr val="333333"/>
                 </a:solidFill>
@@ -13035,7 +13035,7 @@
               <a:t>–   </a:t>
             </a:r>
             <a:r>
-              <a:rPr sz="1600" b="1" i="0">
+              <a:rPr sz="2000" b="1" i="0">
                 <a:solidFill>
                   <a:srgbClr val="333333"/>
                 </a:solidFill>
@@ -13044,7 +13044,7 @@
               <a:t>Demo:</a:t>
             </a:r>
             <a:r>
-              <a:rPr sz="1600" b="0" i="0">
+              <a:rPr sz="2000" b="0" i="0">
                 <a:solidFill>
                   <a:srgbClr val="333333"/>
                 </a:solidFill>
@@ -13060,7 +13060,7 @@
               </a:spcAft>
             </a:pPr>
             <a:r>
-              <a:rPr sz="1600" b="0" i="0">
+              <a:rPr sz="2000" b="0" i="0">
                 <a:solidFill>
                   <a:srgbClr val="333333"/>
                 </a:solidFill>
@@ -13076,7 +13076,7 @@
               </a:spcAft>
             </a:pPr>
             <a:r>
-              <a:rPr sz="1600" b="0" i="0">
+              <a:rPr sz="2000" b="0" i="0">
                 <a:solidFill>
                   <a:srgbClr val="333333"/>
                 </a:solidFill>

--- a/Bases de Datos II/Clases/Clase 7 - Indices y particionamiento/Presentacion.pptx
+++ b/Bases de Datos II/Clases/Clase 7 - Indices y particionamiento/Presentacion.pptx
@@ -3845,7 +3845,7 @@
                 </a:solidFill>
                 <a:latin typeface="Calibri"/>
               </a:rPr>
-              <a:t>ExamLab</a:t>
+              <a:t>la plataforma del curso</a:t>
             </a:r>
           </a:p>
           <a:p>
@@ -5045,7 +5045,7 @@
                 </a:solidFill>
                 <a:latin typeface="Calibri"/>
               </a:rPr>
-              <a:t> Entrega domingo 23:59.</a:t>
+              <a:t> Entrega en la fecha que indique el docente.</a:t>
             </a:r>
           </a:p>
         </p:txBody>
@@ -5457,7 +5457,7 @@
                 </a:solidFill>
                 <a:latin typeface="Calibri"/>
               </a:rPr>
-              <a:t> PostgreSQL dentro de ExamLab, en el navegador. «EXPLAIN ANALYZE», los índices parciales, «PARTITION BY RANGE» y la poda de particiones corren de verdad; ahí se califica.</a:t>
+              <a:t> PostgreSQL dentro de la plataforma del curso, en el navegador. «EXPLAIN ANALYZE», los índices parciales, «PARTITION BY RANGE» y la poda de particiones corren de verdad; ahí se califica.</a:t>
             </a:r>
           </a:p>
           <a:p>
@@ -8310,7 +8310,7 @@
                 </a:solidFill>
                 <a:latin typeface="Calibri"/>
               </a:rPr>
-              <a:t>–   Evidencia: el SQL y su salida quedan guardados en cada pregunta de ExamLab.</a:t>
+              <a:t>–   Evidencia: el SQL y su salida quedan guardados en cada pregunta de la plataforma del curso.</a:t>
             </a:r>
           </a:p>
           <a:p>
@@ -8367,7 +8367,7 @@
                 </a:solidFill>
                 <a:latin typeface="Calibri"/>
               </a:rPr>
-              <a:t>Entrega en ExamLab</a:t>
+              <a:t>Entrega en la plataforma del curso</a:t>
             </a:r>
             <a:r>
               <a:rPr sz="2000" b="0" i="0">
@@ -8376,7 +8376,7 @@
                 </a:solidFill>
                 <a:latin typeface="Calibri"/>
               </a:rPr>
-              <a:t> (https://uniaj.examlab.workers.dev/) — domingo 23:59 cuando aplique taller.</a:t>
+              <a:t> — en la fecha que indique el docente.</a:t>
             </a:r>
           </a:p>
         </p:txBody>
@@ -8971,7 +8971,7 @@
                 </a:solidFill>
                 <a:latin typeface="Calibri"/>
               </a:rPr>
-              <a:t>Taller de la semana en ExamLab (https://uniaj.examlab.workers.dev/): domingo 23:59 (regla del Acuerdo) cuando aplique.</a:t>
+              <a:t>Si el docente asigna taller esta semana, él indica el canal y la fecha.</a:t>
             </a:r>
           </a:p>
         </p:txBody>
@@ -9466,7 +9466,7 @@
                 </a:solidFill>
                 <a:latin typeface="Calibri"/>
               </a:rPr>
-              <a:t>ExamLab (PostgreSQL/PGlite)</a:t>
+              <a:t>PostgreSQL en el navegador</a:t>
             </a:r>
             <a:r>
               <a:rPr sz="2000" b="0" i="0">
@@ -13016,7 +13016,7 @@
                 </a:solidFill>
                 <a:latin typeface="Calibri"/>
               </a:rPr>
-              <a:t> ExamLab (PostgreSQL/PGlite)</a:t>
+              <a:t> PostgreSQL en el navegador</a:t>
             </a:r>
           </a:p>
           <a:p>
